--- a/04-LLVM-IR.pptx
+++ b/04-LLVM-IR.pptx
@@ -2,64 +2,73 @@
 <file path=ppt/presentation.xml><?xml version="1.0" encoding="utf-8"?>
 <p:presentation xmlns:a="http://schemas.openxmlformats.org/drawingml/2006/main" xmlns:r="http://schemas.openxmlformats.org/officeDocument/2006/relationships" xmlns:mc="http://schemas.openxmlformats.org/markup-compatibility/2006" xmlns:mv="urn:schemas-microsoft-com:mac:vml" xmlns:p="http://schemas.openxmlformats.org/presentationml/2006/main" xmlns:c="http://schemas.openxmlformats.org/drawingml/2006/chart" xmlns:dgm="http://schemas.openxmlformats.org/drawingml/2006/diagram" xmlns:o="urn:schemas-microsoft-com:office:office" xmlns:v="urn:schemas-microsoft-com:vml" xmlns:pvml="urn:schemas-microsoft-com:office:powerpoint" xmlns:com="http://schemas.openxmlformats.org/drawingml/2006/compatibility" xmlns:p14="http://schemas.microsoft.com/office/powerpoint/2010/main" xmlns:p15="http://schemas.microsoft.com/office/powerpoint/2012/main" xmlns:ahyp="http://schemas.microsoft.com/office/drawing/2018/hyperlinkcolor" autoCompressPictures="0" embedTrueTypeFonts="1" strictFirstAndLastChars="0" saveSubsetFonts="1">
   <p:sldMasterIdLst>
-    <p:sldMasterId id="2147483648" r:id="rId4"/>
+    <p:sldMasterId id="2147483648" r:id="rId5"/>
   </p:sldMasterIdLst>
   <p:notesMasterIdLst>
-    <p:notesMasterId r:id="rId5"/>
+    <p:notesMasterId r:id="rId6"/>
   </p:notesMasterIdLst>
   <p:sldIdLst>
-    <p:sldId id="256" r:id="rId6"/>
-    <p:sldId id="257" r:id="rId7"/>
-    <p:sldId id="258" r:id="rId8"/>
-    <p:sldId id="259" r:id="rId9"/>
-    <p:sldId id="260" r:id="rId10"/>
-    <p:sldId id="261" r:id="rId11"/>
-    <p:sldId id="262" r:id="rId12"/>
-    <p:sldId id="263" r:id="rId13"/>
-    <p:sldId id="264" r:id="rId14"/>
-    <p:sldId id="265" r:id="rId15"/>
-    <p:sldId id="266" r:id="rId16"/>
-    <p:sldId id="267" r:id="rId17"/>
-    <p:sldId id="268" r:id="rId18"/>
-    <p:sldId id="269" r:id="rId19"/>
-    <p:sldId id="270" r:id="rId20"/>
-    <p:sldId id="271" r:id="rId21"/>
-    <p:sldId id="272" r:id="rId22"/>
-    <p:sldId id="273" r:id="rId23"/>
-    <p:sldId id="274" r:id="rId24"/>
-    <p:sldId id="275" r:id="rId25"/>
-    <p:sldId id="276" r:id="rId26"/>
-    <p:sldId id="277" r:id="rId27"/>
-    <p:sldId id="278" r:id="rId28"/>
-    <p:sldId id="279" r:id="rId29"/>
-    <p:sldId id="280" r:id="rId30"/>
-    <p:sldId id="281" r:id="rId31"/>
-    <p:sldId id="282" r:id="rId32"/>
-    <p:sldId id="283" r:id="rId33"/>
-    <p:sldId id="284" r:id="rId34"/>
-    <p:sldId id="285" r:id="rId35"/>
-    <p:sldId id="286" r:id="rId36"/>
-    <p:sldId id="287" r:id="rId37"/>
-    <p:sldId id="288" r:id="rId38"/>
-    <p:sldId id="289" r:id="rId39"/>
-    <p:sldId id="290" r:id="rId40"/>
-    <p:sldId id="291" r:id="rId41"/>
-    <p:sldId id="292" r:id="rId42"/>
-    <p:sldId id="293" r:id="rId43"/>
-    <p:sldId id="294" r:id="rId44"/>
-    <p:sldId id="295" r:id="rId45"/>
-    <p:sldId id="296" r:id="rId46"/>
-    <p:sldId id="297" r:id="rId47"/>
+    <p:sldId id="256" r:id="rId7"/>
+    <p:sldId id="257" r:id="rId8"/>
+    <p:sldId id="258" r:id="rId9"/>
+    <p:sldId id="259" r:id="rId10"/>
+    <p:sldId id="260" r:id="rId11"/>
+    <p:sldId id="261" r:id="rId12"/>
+    <p:sldId id="262" r:id="rId13"/>
+    <p:sldId id="263" r:id="rId14"/>
+    <p:sldId id="264" r:id="rId15"/>
+    <p:sldId id="265" r:id="rId16"/>
+    <p:sldId id="266" r:id="rId17"/>
+    <p:sldId id="267" r:id="rId18"/>
+    <p:sldId id="268" r:id="rId19"/>
+    <p:sldId id="269" r:id="rId20"/>
+    <p:sldId id="270" r:id="rId21"/>
+    <p:sldId id="271" r:id="rId22"/>
+    <p:sldId id="272" r:id="rId23"/>
+    <p:sldId id="273" r:id="rId24"/>
+    <p:sldId id="274" r:id="rId25"/>
+    <p:sldId id="275" r:id="rId26"/>
+    <p:sldId id="276" r:id="rId27"/>
+    <p:sldId id="277" r:id="rId28"/>
+    <p:sldId id="278" r:id="rId29"/>
+    <p:sldId id="279" r:id="rId30"/>
+    <p:sldId id="280" r:id="rId31"/>
+    <p:sldId id="281" r:id="rId32"/>
+    <p:sldId id="282" r:id="rId33"/>
+    <p:sldId id="283" r:id="rId34"/>
+    <p:sldId id="284" r:id="rId35"/>
+    <p:sldId id="285" r:id="rId36"/>
+    <p:sldId id="286" r:id="rId37"/>
+    <p:sldId id="287" r:id="rId38"/>
+    <p:sldId id="288" r:id="rId39"/>
+    <p:sldId id="289" r:id="rId40"/>
+    <p:sldId id="290" r:id="rId41"/>
+    <p:sldId id="291" r:id="rId42"/>
+    <p:sldId id="292" r:id="rId43"/>
+    <p:sldId id="293" r:id="rId44"/>
+    <p:sldId id="294" r:id="rId45"/>
+    <p:sldId id="295" r:id="rId46"/>
+    <p:sldId id="296" r:id="rId47"/>
+    <p:sldId id="297" r:id="rId48"/>
+    <p:sldId id="298" r:id="rId49"/>
+    <p:sldId id="299" r:id="rId50"/>
   </p:sldIdLst>
   <p:sldSz cy="6858000" cx="12192000"/>
   <p:notesSz cx="6858000" cy="9144000"/>
   <p:embeddedFontLst>
     <p:embeddedFont>
       <p:font typeface="Helvetica Neue"/>
-      <p:regular r:id="rId48"/>
-      <p:bold r:id="rId49"/>
-      <p:italic r:id="rId50"/>
-      <p:boldItalic r:id="rId51"/>
+      <p:regular r:id="rId51"/>
+      <p:bold r:id="rId52"/>
+      <p:italic r:id="rId53"/>
+      <p:boldItalic r:id="rId54"/>
+    </p:embeddedFont>
+    <p:embeddedFont>
+      <p:font typeface="Roboto Mono"/>
+      <p:regular r:id="rId55"/>
+      <p:bold r:id="rId56"/>
+      <p:italic r:id="rId57"/>
+      <p:boldItalic r:id="rId58"/>
     </p:embeddedFont>
   </p:embeddedFontLst>
   <p:defaultTextStyle>
@@ -307,7 +316,7 @@
       </p15:sldGuideLst>
     </p:ext>
     <p:ext uri="GoogleSlidesCustomDataVersion2">
-      <go:slidesCustomData xmlns:go="http://customooxmlschemas.google.com/" r:id="rId52" roundtripDataSignature="AMtx7mhi+EARJAMOB7exK/u2ajSFBUChdQ=="/>
+      <go:slidesCustomData xmlns:go="http://customooxmlschemas.google.com/" r:id="rId59" roundtripDataSignature="AMtx7mhjh8Cmnue7RBT0hv7apr9YQgN0rw=="/>
     </p:ext>
   </p:extLst>
 </p:presentation>
@@ -1910,7 +1919,7 @@
   <p:cSld>
     <p:spTree>
       <p:nvGrpSpPr>
-        <p:cNvPr id="334" name="Shape 334"/>
+        <p:cNvPr id="333" name="Shape 333"/>
         <p:cNvGrpSpPr/>
         <p:nvPr/>
       </p:nvGrpSpPr>
@@ -1924,7 +1933,7 @@
       </p:grpSpPr>
       <p:sp>
         <p:nvSpPr>
-          <p:cNvPr id="335" name="Google Shape;335;p15:notes"/>
+          <p:cNvPr id="334" name="Google Shape;334;p15:notes"/>
           <p:cNvSpPr txBox="1"/>
           <p:nvPr>
             <p:ph idx="1" type="body"/>
@@ -1963,7 +1972,7 @@
       </p:sp>
       <p:sp>
         <p:nvSpPr>
-          <p:cNvPr id="336" name="Google Shape;336;p15:notes"/>
+          <p:cNvPr id="335" name="Google Shape;335;p15:notes"/>
           <p:cNvSpPr/>
           <p:nvPr>
             <p:ph idx="2" type="sldImg"/>
@@ -2108,7 +2117,7 @@
   <p:cSld>
     <p:spTree>
       <p:nvGrpSpPr>
-        <p:cNvPr id="345" name="Shape 345"/>
+        <p:cNvPr id="344" name="Shape 344"/>
         <p:cNvGrpSpPr/>
         <p:nvPr/>
       </p:nvGrpSpPr>
@@ -2122,7 +2131,7 @@
       </p:grpSpPr>
       <p:sp>
         <p:nvSpPr>
-          <p:cNvPr id="346" name="Google Shape;346;p16:notes"/>
+          <p:cNvPr id="345" name="Google Shape;345;p16:notes"/>
           <p:cNvSpPr txBox="1"/>
           <p:nvPr>
             <p:ph idx="1" type="body"/>
@@ -2161,7 +2170,7 @@
       </p:sp>
       <p:sp>
         <p:nvSpPr>
-          <p:cNvPr id="347" name="Google Shape;347;p16:notes"/>
+          <p:cNvPr id="346" name="Google Shape;346;p16:notes"/>
           <p:cNvSpPr/>
           <p:nvPr>
             <p:ph idx="2" type="sldImg"/>
@@ -2207,7 +2216,7 @@
   <p:cSld>
     <p:spTree>
       <p:nvGrpSpPr>
-        <p:cNvPr id="356" name="Shape 356"/>
+        <p:cNvPr id="355" name="Shape 355"/>
         <p:cNvGrpSpPr/>
         <p:nvPr/>
       </p:nvGrpSpPr>
@@ -2221,7 +2230,7 @@
       </p:grpSpPr>
       <p:sp>
         <p:nvSpPr>
-          <p:cNvPr id="357" name="Google Shape;357;p17:notes"/>
+          <p:cNvPr id="356" name="Google Shape;356;p17:notes"/>
           <p:cNvSpPr txBox="1"/>
           <p:nvPr>
             <p:ph idx="1" type="body"/>
@@ -2260,7 +2269,7 @@
       </p:sp>
       <p:sp>
         <p:nvSpPr>
-          <p:cNvPr id="358" name="Google Shape;358;p17:notes"/>
+          <p:cNvPr id="357" name="Google Shape;357;p17:notes"/>
           <p:cNvSpPr/>
           <p:nvPr>
             <p:ph idx="2" type="sldImg"/>
@@ -2306,7 +2315,7 @@
   <p:cSld>
     <p:spTree>
       <p:nvGrpSpPr>
-        <p:cNvPr id="371" name="Shape 371"/>
+        <p:cNvPr id="370" name="Shape 370"/>
         <p:cNvGrpSpPr/>
         <p:nvPr/>
       </p:nvGrpSpPr>
@@ -2320,7 +2329,7 @@
       </p:grpSpPr>
       <p:sp>
         <p:nvSpPr>
-          <p:cNvPr id="372" name="Google Shape;372;p18:notes"/>
+          <p:cNvPr id="371" name="Google Shape;371;p18:notes"/>
           <p:cNvSpPr txBox="1"/>
           <p:nvPr>
             <p:ph idx="1" type="body"/>
@@ -2359,7 +2368,7 @@
       </p:sp>
       <p:sp>
         <p:nvSpPr>
-          <p:cNvPr id="373" name="Google Shape;373;p18:notes"/>
+          <p:cNvPr id="372" name="Google Shape;372;p18:notes"/>
           <p:cNvSpPr/>
           <p:nvPr>
             <p:ph idx="2" type="sldImg"/>
@@ -2405,7 +2414,7 @@
   <p:cSld>
     <p:spTree>
       <p:nvGrpSpPr>
-        <p:cNvPr id="383" name="Shape 383"/>
+        <p:cNvPr id="382" name="Shape 382"/>
         <p:cNvGrpSpPr/>
         <p:nvPr/>
       </p:nvGrpSpPr>
@@ -2419,7 +2428,7 @@
       </p:grpSpPr>
       <p:sp>
         <p:nvSpPr>
-          <p:cNvPr id="384" name="Google Shape;384;p19:notes"/>
+          <p:cNvPr id="383" name="Google Shape;383;p19:notes"/>
           <p:cNvSpPr txBox="1"/>
           <p:nvPr>
             <p:ph idx="1" type="body"/>
@@ -2458,7 +2467,7 @@
       </p:sp>
       <p:sp>
         <p:nvSpPr>
-          <p:cNvPr id="385" name="Google Shape;385;p19:notes"/>
+          <p:cNvPr id="384" name="Google Shape;384;p19:notes"/>
           <p:cNvSpPr/>
           <p:nvPr>
             <p:ph idx="2" type="sldImg"/>
@@ -2504,7 +2513,7 @@
   <p:cSld>
     <p:spTree>
       <p:nvGrpSpPr>
-        <p:cNvPr id="394" name="Shape 394"/>
+        <p:cNvPr id="393" name="Shape 393"/>
         <p:cNvGrpSpPr/>
         <p:nvPr/>
       </p:nvGrpSpPr>
@@ -2518,7 +2527,7 @@
       </p:grpSpPr>
       <p:sp>
         <p:nvSpPr>
-          <p:cNvPr id="395" name="Google Shape;395;p20:notes"/>
+          <p:cNvPr id="394" name="Google Shape;394;p20:notes"/>
           <p:cNvSpPr txBox="1"/>
           <p:nvPr>
             <p:ph idx="1" type="body"/>
@@ -2557,7 +2566,7 @@
       </p:sp>
       <p:sp>
         <p:nvSpPr>
-          <p:cNvPr id="396" name="Google Shape;396;p20:notes"/>
+          <p:cNvPr id="395" name="Google Shape;395;p20:notes"/>
           <p:cNvSpPr/>
           <p:nvPr>
             <p:ph idx="2" type="sldImg"/>
@@ -2603,7 +2612,7 @@
   <p:cSld>
     <p:spTree>
       <p:nvGrpSpPr>
-        <p:cNvPr id="406" name="Shape 406"/>
+        <p:cNvPr id="405" name="Shape 405"/>
         <p:cNvGrpSpPr/>
         <p:nvPr/>
       </p:nvGrpSpPr>
@@ -2617,7 +2626,7 @@
       </p:grpSpPr>
       <p:sp>
         <p:nvSpPr>
-          <p:cNvPr id="407" name="Google Shape;407;g33ce395d76b_0_19:notes"/>
+          <p:cNvPr id="406" name="Google Shape;406;g33ce395d76b_0_19:notes"/>
           <p:cNvSpPr/>
           <p:nvPr>
             <p:ph idx="2" type="sldImg"/>
@@ -2652,7 +2661,7 @@
       </p:sp>
       <p:sp>
         <p:nvSpPr>
-          <p:cNvPr id="408" name="Google Shape;408;g33ce395d76b_0_19:notes"/>
+          <p:cNvPr id="407" name="Google Shape;407;g33ce395d76b_0_19:notes"/>
           <p:cNvSpPr txBox="1"/>
           <p:nvPr>
             <p:ph idx="1" type="body"/>
@@ -2702,7 +2711,7 @@
   <p:cSld>
     <p:spTree>
       <p:nvGrpSpPr>
-        <p:cNvPr id="412" name="Shape 412"/>
+        <p:cNvPr id="411" name="Shape 411"/>
         <p:cNvGrpSpPr/>
         <p:nvPr/>
       </p:nvGrpSpPr>
@@ -2716,7 +2725,7 @@
       </p:grpSpPr>
       <p:sp>
         <p:nvSpPr>
-          <p:cNvPr id="413" name="Google Shape;413;p21:notes"/>
+          <p:cNvPr id="412" name="Google Shape;412;p21:notes"/>
           <p:cNvSpPr txBox="1"/>
           <p:nvPr>
             <p:ph idx="1" type="body"/>
@@ -2755,7 +2764,7 @@
       </p:sp>
       <p:sp>
         <p:nvSpPr>
-          <p:cNvPr id="414" name="Google Shape;414;p21:notes"/>
+          <p:cNvPr id="413" name="Google Shape;413;p21:notes"/>
           <p:cNvSpPr/>
           <p:nvPr>
             <p:ph idx="2" type="sldImg"/>
@@ -2801,7 +2810,7 @@
   <p:cSld>
     <p:spTree>
       <p:nvGrpSpPr>
-        <p:cNvPr id="432" name="Shape 432"/>
+        <p:cNvPr id="431" name="Shape 431"/>
         <p:cNvGrpSpPr/>
         <p:nvPr/>
       </p:nvGrpSpPr>
@@ -2815,7 +2824,7 @@
       </p:grpSpPr>
       <p:sp>
         <p:nvSpPr>
-          <p:cNvPr id="433" name="Google Shape;433;p22:notes"/>
+          <p:cNvPr id="432" name="Google Shape;432;p22:notes"/>
           <p:cNvSpPr txBox="1"/>
           <p:nvPr>
             <p:ph idx="1" type="body"/>
@@ -2854,7 +2863,7 @@
       </p:sp>
       <p:sp>
         <p:nvSpPr>
-          <p:cNvPr id="434" name="Google Shape;434;p22:notes"/>
+          <p:cNvPr id="433" name="Google Shape;433;p22:notes"/>
           <p:cNvSpPr/>
           <p:nvPr>
             <p:ph idx="2" type="sldImg"/>
@@ -2900,7 +2909,7 @@
   <p:cSld>
     <p:spTree>
       <p:nvGrpSpPr>
-        <p:cNvPr id="439" name="Shape 439"/>
+        <p:cNvPr id="438" name="Shape 438"/>
         <p:cNvGrpSpPr/>
         <p:nvPr/>
       </p:nvGrpSpPr>
@@ -2914,7 +2923,7 @@
       </p:grpSpPr>
       <p:sp>
         <p:nvSpPr>
-          <p:cNvPr id="440" name="Google Shape;440;p23:notes"/>
+          <p:cNvPr id="439" name="Google Shape;439;p23:notes"/>
           <p:cNvSpPr txBox="1"/>
           <p:nvPr>
             <p:ph idx="1" type="body"/>
@@ -2953,7 +2962,7 @@
       </p:sp>
       <p:sp>
         <p:nvSpPr>
-          <p:cNvPr id="441" name="Google Shape;441;p23:notes"/>
+          <p:cNvPr id="440" name="Google Shape;440;p23:notes"/>
           <p:cNvSpPr/>
           <p:nvPr>
             <p:ph idx="2" type="sldImg"/>
@@ -2999,7 +3008,7 @@
   <p:cSld>
     <p:spTree>
       <p:nvGrpSpPr>
-        <p:cNvPr id="452" name="Shape 452"/>
+        <p:cNvPr id="451" name="Shape 451"/>
         <p:cNvGrpSpPr/>
         <p:nvPr/>
       </p:nvGrpSpPr>
@@ -3013,7 +3022,7 @@
       </p:grpSpPr>
       <p:sp>
         <p:nvSpPr>
-          <p:cNvPr id="453" name="Google Shape;453;p24:notes"/>
+          <p:cNvPr id="452" name="Google Shape;452;p24:notes"/>
           <p:cNvSpPr txBox="1"/>
           <p:nvPr>
             <p:ph idx="1" type="body"/>
@@ -3052,7 +3061,7 @@
       </p:sp>
       <p:sp>
         <p:nvSpPr>
-          <p:cNvPr id="454" name="Google Shape;454;p24:notes"/>
+          <p:cNvPr id="453" name="Google Shape;453;p24:notes"/>
           <p:cNvSpPr/>
           <p:nvPr>
             <p:ph idx="2" type="sldImg"/>
@@ -3197,7 +3206,7 @@
   <p:cSld>
     <p:spTree>
       <p:nvGrpSpPr>
-        <p:cNvPr id="462" name="Shape 462"/>
+        <p:cNvPr id="461" name="Shape 461"/>
         <p:cNvGrpSpPr/>
         <p:nvPr/>
       </p:nvGrpSpPr>
@@ -3211,7 +3220,7 @@
       </p:grpSpPr>
       <p:sp>
         <p:nvSpPr>
-          <p:cNvPr id="463" name="Google Shape;463;p25:notes"/>
+          <p:cNvPr id="462" name="Google Shape;462;p25:notes"/>
           <p:cNvSpPr txBox="1"/>
           <p:nvPr>
             <p:ph idx="1" type="body"/>
@@ -3250,7 +3259,7 @@
       </p:sp>
       <p:sp>
         <p:nvSpPr>
-          <p:cNvPr id="464" name="Google Shape;464;p25:notes"/>
+          <p:cNvPr id="463" name="Google Shape;463;p25:notes"/>
           <p:cNvSpPr/>
           <p:nvPr>
             <p:ph idx="2" type="sldImg"/>
@@ -3296,7 +3305,7 @@
   <p:cSld>
     <p:spTree>
       <p:nvGrpSpPr>
-        <p:cNvPr id="477" name="Shape 477"/>
+        <p:cNvPr id="476" name="Shape 476"/>
         <p:cNvGrpSpPr/>
         <p:nvPr/>
       </p:nvGrpSpPr>
@@ -3310,7 +3319,7 @@
       </p:grpSpPr>
       <p:sp>
         <p:nvSpPr>
-          <p:cNvPr id="478" name="Google Shape;478;p26:notes"/>
+          <p:cNvPr id="477" name="Google Shape;477;p26:notes"/>
           <p:cNvSpPr txBox="1"/>
           <p:nvPr>
             <p:ph idx="1" type="body"/>
@@ -3349,7 +3358,7 @@
       </p:sp>
       <p:sp>
         <p:nvSpPr>
-          <p:cNvPr id="479" name="Google Shape;479;p26:notes"/>
+          <p:cNvPr id="478" name="Google Shape;478;p26:notes"/>
           <p:cNvSpPr/>
           <p:nvPr>
             <p:ph idx="2" type="sldImg"/>
@@ -3395,7 +3404,7 @@
   <p:cSld>
     <p:spTree>
       <p:nvGrpSpPr>
-        <p:cNvPr id="486" name="Shape 486"/>
+        <p:cNvPr id="485" name="Shape 485"/>
         <p:cNvGrpSpPr/>
         <p:nvPr/>
       </p:nvGrpSpPr>
@@ -3409,7 +3418,7 @@
       </p:grpSpPr>
       <p:sp>
         <p:nvSpPr>
-          <p:cNvPr id="487" name="Google Shape;487;g2bee99cf594_0_1:notes"/>
+          <p:cNvPr id="486" name="Google Shape;486;g3f347eb07e7_0_0:notes"/>
           <p:cNvSpPr/>
           <p:nvPr>
             <p:ph idx="2" type="sldImg"/>
@@ -3444,7 +3453,7 @@
       </p:sp>
       <p:sp>
         <p:nvSpPr>
-          <p:cNvPr id="488" name="Google Shape;488;g2bee99cf594_0_1:notes"/>
+          <p:cNvPr id="487" name="Google Shape;487;g3f347eb07e7_0_0:notes"/>
           <p:cNvSpPr txBox="1"/>
           <p:nvPr>
             <p:ph idx="1" type="body"/>
@@ -3494,7 +3503,7 @@
   <p:cSld>
     <p:spTree>
       <p:nvGrpSpPr>
-        <p:cNvPr id="492" name="Shape 492"/>
+        <p:cNvPr id="494" name="Shape 494"/>
         <p:cNvGrpSpPr/>
         <p:nvPr/>
       </p:nvGrpSpPr>
@@ -3508,7 +3517,7 @@
       </p:grpSpPr>
       <p:sp>
         <p:nvSpPr>
-          <p:cNvPr id="493" name="Google Shape;493;g2bee99cf594_0_7:notes"/>
+          <p:cNvPr id="495" name="Google Shape;495;g3f453c19afd_0_3:notes"/>
           <p:cNvSpPr/>
           <p:nvPr>
             <p:ph idx="2" type="sldImg"/>
@@ -3543,7 +3552,7 @@
       </p:sp>
       <p:sp>
         <p:nvSpPr>
-          <p:cNvPr id="494" name="Google Shape;494;g2bee99cf594_0_7:notes"/>
+          <p:cNvPr id="496" name="Google Shape;496;g3f453c19afd_0_3:notes"/>
           <p:cNvSpPr txBox="1"/>
           <p:nvPr>
             <p:ph idx="1" type="body"/>
@@ -3593,7 +3602,7 @@
   <p:cSld>
     <p:spTree>
       <p:nvGrpSpPr>
-        <p:cNvPr id="498" name="Shape 498"/>
+        <p:cNvPr id="503" name="Shape 503"/>
         <p:cNvGrpSpPr/>
         <p:nvPr/>
       </p:nvGrpSpPr>
@@ -3607,106 +3616,7 @@
       </p:grpSpPr>
       <p:sp>
         <p:nvSpPr>
-          <p:cNvPr id="499" name="Google Shape;499;p27:notes"/>
-          <p:cNvSpPr txBox="1"/>
-          <p:nvPr>
-            <p:ph idx="1" type="body"/>
-          </p:nvPr>
-        </p:nvSpPr>
-        <p:spPr>
-          <a:xfrm>
-            <a:off x="914400" y="4343400"/>
-            <a:ext cx="5029200" cy="4114800"/>
-          </a:xfrm>
-          <a:prstGeom prst="rect">
-            <a:avLst/>
-          </a:prstGeom>
-        </p:spPr>
-        <p:txBody>
-          <a:bodyPr anchorCtr="0" anchor="t" bIns="45700" lIns="91425" spcFirstLastPara="1" rIns="91425" wrap="square" tIns="45700">
-            <a:noAutofit/>
-          </a:bodyPr>
-          <a:lstStyle/>
-          <a:p>
-            <a:pPr indent="0" lvl="0" marL="0" rtl="0" algn="l">
-              <a:spcBef>
-                <a:spcPts val="0"/>
-              </a:spcBef>
-              <a:spcAft>
-                <a:spcPts val="0"/>
-              </a:spcAft>
-              <a:buNone/>
-            </a:pPr>
-            <a:r>
-              <a:t/>
-            </a:r>
-            <a:endParaRPr/>
-          </a:p>
-        </p:txBody>
-      </p:sp>
-      <p:sp>
-        <p:nvSpPr>
-          <p:cNvPr id="500" name="Google Shape;500;p27:notes"/>
-          <p:cNvSpPr/>
-          <p:nvPr>
-            <p:ph idx="2" type="sldImg"/>
-          </p:nvPr>
-        </p:nvSpPr>
-        <p:spPr>
-          <a:xfrm>
-            <a:off x="381000" y="685800"/>
-            <a:ext cx="6096000" cy="3429000"/>
-          </a:xfrm>
-          <a:custGeom>
-            <a:rect b="b" l="l" r="r" t="t"/>
-            <a:pathLst>
-              <a:path extrusionOk="0" h="120000" w="120000">
-                <a:moveTo>
-                  <a:pt x="0" y="0"/>
-                </a:moveTo>
-                <a:lnTo>
-                  <a:pt x="120000" y="0"/>
-                </a:lnTo>
-                <a:lnTo>
-                  <a:pt x="120000" y="120000"/>
-                </a:lnTo>
-                <a:lnTo>
-                  <a:pt x="0" y="120000"/>
-                </a:lnTo>
-                <a:close/>
-              </a:path>
-            </a:pathLst>
-          </a:custGeom>
-        </p:spPr>
-      </p:sp>
-    </p:spTree>
-  </p:cSld>
-  <p:clrMapOvr>
-    <a:masterClrMapping/>
-  </p:clrMapOvr>
-</p:notes>
-</file>
-
-<file path=ppt/notesSlides/notesSlide35.xml><?xml version="1.0" encoding="utf-8"?>
-<p:notes xmlns:a="http://schemas.openxmlformats.org/drawingml/2006/main" xmlns:r="http://schemas.openxmlformats.org/officeDocument/2006/relationships" xmlns:mc="http://schemas.openxmlformats.org/markup-compatibility/2006" xmlns:mv="urn:schemas-microsoft-com:mac:vml" xmlns:p="http://schemas.openxmlformats.org/presentationml/2006/main" xmlns:c="http://schemas.openxmlformats.org/drawingml/2006/chart" xmlns:dgm="http://schemas.openxmlformats.org/drawingml/2006/diagram" xmlns:o="urn:schemas-microsoft-com:office:office" xmlns:v="urn:schemas-microsoft-com:vml" xmlns:pvml="urn:schemas-microsoft-com:office:powerpoint" xmlns:com="http://schemas.openxmlformats.org/drawingml/2006/compatibility" xmlns:p14="http://schemas.microsoft.com/office/powerpoint/2010/main" xmlns:p15="http://schemas.microsoft.com/office/powerpoint/2012/main" xmlns:ahyp="http://schemas.microsoft.com/office/drawing/2018/hyperlinkcolor" showMasterPhAnim="0" showMasterSp="0">
-  <p:cSld>
-    <p:spTree>
-      <p:nvGrpSpPr>
-        <p:cNvPr id="504" name="Shape 504"/>
-        <p:cNvGrpSpPr/>
-        <p:nvPr/>
-      </p:nvGrpSpPr>
-      <p:grpSpPr>
-        <a:xfrm>
-          <a:off x="0" y="0"/>
-          <a:ext cx="0" cy="0"/>
-          <a:chOff x="0" y="0"/>
-          <a:chExt cx="0" cy="0"/>
-        </a:xfrm>
-      </p:grpSpPr>
-      <p:sp>
-        <p:nvSpPr>
-          <p:cNvPr id="505" name="Google Shape;505;g2bee99cf594_0_14:notes"/>
+          <p:cNvPr id="504" name="Google Shape;504;g2bee99cf594_0_1:notes"/>
           <p:cNvSpPr/>
           <p:nvPr>
             <p:ph idx="2" type="sldImg"/>
@@ -3741,7 +3651,106 @@
       </p:sp>
       <p:sp>
         <p:nvSpPr>
-          <p:cNvPr id="506" name="Google Shape;506;g2bee99cf594_0_14:notes"/>
+          <p:cNvPr id="505" name="Google Shape;505;g2bee99cf594_0_1:notes"/>
+          <p:cNvSpPr txBox="1"/>
+          <p:nvPr>
+            <p:ph idx="1" type="body"/>
+          </p:nvPr>
+        </p:nvSpPr>
+        <p:spPr>
+          <a:xfrm>
+            <a:off x="914400" y="4343400"/>
+            <a:ext cx="5029200" cy="4114800"/>
+          </a:xfrm>
+          <a:prstGeom prst="rect">
+            <a:avLst/>
+          </a:prstGeom>
+        </p:spPr>
+        <p:txBody>
+          <a:bodyPr anchorCtr="0" anchor="t" bIns="45700" lIns="91425" spcFirstLastPara="1" rIns="91425" wrap="square" tIns="45700">
+            <a:noAutofit/>
+          </a:bodyPr>
+          <a:lstStyle/>
+          <a:p>
+            <a:pPr indent="0" lvl="0" marL="0" rtl="0" algn="l">
+              <a:spcBef>
+                <a:spcPts val="0"/>
+              </a:spcBef>
+              <a:spcAft>
+                <a:spcPts val="0"/>
+              </a:spcAft>
+              <a:buNone/>
+            </a:pPr>
+            <a:r>
+              <a:t/>
+            </a:r>
+            <a:endParaRPr/>
+          </a:p>
+        </p:txBody>
+      </p:sp>
+    </p:spTree>
+  </p:cSld>
+  <p:clrMapOvr>
+    <a:masterClrMapping/>
+  </p:clrMapOvr>
+</p:notes>
+</file>
+
+<file path=ppt/notesSlides/notesSlide35.xml><?xml version="1.0" encoding="utf-8"?>
+<p:notes xmlns:a="http://schemas.openxmlformats.org/drawingml/2006/main" xmlns:r="http://schemas.openxmlformats.org/officeDocument/2006/relationships" xmlns:mc="http://schemas.openxmlformats.org/markup-compatibility/2006" xmlns:mv="urn:schemas-microsoft-com:mac:vml" xmlns:p="http://schemas.openxmlformats.org/presentationml/2006/main" xmlns:c="http://schemas.openxmlformats.org/drawingml/2006/chart" xmlns:dgm="http://schemas.openxmlformats.org/drawingml/2006/diagram" xmlns:o="urn:schemas-microsoft-com:office:office" xmlns:v="urn:schemas-microsoft-com:vml" xmlns:pvml="urn:schemas-microsoft-com:office:powerpoint" xmlns:com="http://schemas.openxmlformats.org/drawingml/2006/compatibility" xmlns:p14="http://schemas.microsoft.com/office/powerpoint/2010/main" xmlns:p15="http://schemas.microsoft.com/office/powerpoint/2012/main" xmlns:ahyp="http://schemas.microsoft.com/office/drawing/2018/hyperlinkcolor" showMasterPhAnim="0" showMasterSp="0">
+  <p:cSld>
+    <p:spTree>
+      <p:nvGrpSpPr>
+        <p:cNvPr id="509" name="Shape 509"/>
+        <p:cNvGrpSpPr/>
+        <p:nvPr/>
+      </p:nvGrpSpPr>
+      <p:grpSpPr>
+        <a:xfrm>
+          <a:off x="0" y="0"/>
+          <a:ext cx="0" cy="0"/>
+          <a:chOff x="0" y="0"/>
+          <a:chExt cx="0" cy="0"/>
+        </a:xfrm>
+      </p:grpSpPr>
+      <p:sp>
+        <p:nvSpPr>
+          <p:cNvPr id="510" name="Google Shape;510;g2bee99cf594_0_7:notes"/>
+          <p:cNvSpPr/>
+          <p:nvPr>
+            <p:ph idx="2" type="sldImg"/>
+          </p:nvPr>
+        </p:nvSpPr>
+        <p:spPr>
+          <a:xfrm>
+            <a:off x="381000" y="685800"/>
+            <a:ext cx="6096000" cy="3429000"/>
+          </a:xfrm>
+          <a:custGeom>
+            <a:rect b="b" l="l" r="r" t="t"/>
+            <a:pathLst>
+              <a:path extrusionOk="0" h="120000" w="120000">
+                <a:moveTo>
+                  <a:pt x="0" y="0"/>
+                </a:moveTo>
+                <a:lnTo>
+                  <a:pt x="120000" y="0"/>
+                </a:lnTo>
+                <a:lnTo>
+                  <a:pt x="120000" y="120000"/>
+                </a:lnTo>
+                <a:lnTo>
+                  <a:pt x="0" y="120000"/>
+                </a:lnTo>
+                <a:close/>
+              </a:path>
+            </a:pathLst>
+          </a:custGeom>
+        </p:spPr>
+      </p:sp>
+      <p:sp>
+        <p:nvSpPr>
+          <p:cNvPr id="511" name="Google Shape;511;g2bee99cf594_0_7:notes"/>
           <p:cNvSpPr txBox="1"/>
           <p:nvPr>
             <p:ph idx="1" type="body"/>
@@ -3791,7 +3800,7 @@
   <p:cSld>
     <p:spTree>
       <p:nvGrpSpPr>
-        <p:cNvPr id="510" name="Shape 510"/>
+        <p:cNvPr id="515" name="Shape 515"/>
         <p:cNvGrpSpPr/>
         <p:nvPr/>
       </p:nvGrpSpPr>
@@ -3805,7 +3814,7 @@
       </p:grpSpPr>
       <p:sp>
         <p:nvSpPr>
-          <p:cNvPr id="511" name="Google Shape;511;p28:notes"/>
+          <p:cNvPr id="516" name="Google Shape;516;p27:notes"/>
           <p:cNvSpPr txBox="1"/>
           <p:nvPr>
             <p:ph idx="1" type="body"/>
@@ -3844,7 +3853,7 @@
       </p:sp>
       <p:sp>
         <p:nvSpPr>
-          <p:cNvPr id="512" name="Google Shape;512;p28:notes"/>
+          <p:cNvPr id="517" name="Google Shape;517;p27:notes"/>
           <p:cNvSpPr/>
           <p:nvPr>
             <p:ph idx="2" type="sldImg"/>
@@ -3890,7 +3899,7 @@
   <p:cSld>
     <p:spTree>
       <p:nvGrpSpPr>
-        <p:cNvPr id="516" name="Shape 516"/>
+        <p:cNvPr id="521" name="Shape 521"/>
         <p:cNvGrpSpPr/>
         <p:nvPr/>
       </p:nvGrpSpPr>
@@ -3904,46 +3913,7 @@
       </p:grpSpPr>
       <p:sp>
         <p:nvSpPr>
-          <p:cNvPr id="517" name="Google Shape;517;p29:notes"/>
-          <p:cNvSpPr txBox="1"/>
-          <p:nvPr>
-            <p:ph idx="1" type="body"/>
-          </p:nvPr>
-        </p:nvSpPr>
-        <p:spPr>
-          <a:xfrm>
-            <a:off x="914400" y="4343400"/>
-            <a:ext cx="5029200" cy="4114800"/>
-          </a:xfrm>
-          <a:prstGeom prst="rect">
-            <a:avLst/>
-          </a:prstGeom>
-        </p:spPr>
-        <p:txBody>
-          <a:bodyPr anchorCtr="0" anchor="t" bIns="45700" lIns="91425" spcFirstLastPara="1" rIns="91425" wrap="square" tIns="45700">
-            <a:noAutofit/>
-          </a:bodyPr>
-          <a:lstStyle/>
-          <a:p>
-            <a:pPr indent="0" lvl="0" marL="0" rtl="0" algn="l">
-              <a:spcBef>
-                <a:spcPts val="0"/>
-              </a:spcBef>
-              <a:spcAft>
-                <a:spcPts val="0"/>
-              </a:spcAft>
-              <a:buNone/>
-            </a:pPr>
-            <a:r>
-              <a:t/>
-            </a:r>
-            <a:endParaRPr/>
-          </a:p>
-        </p:txBody>
-      </p:sp>
-      <p:sp>
-        <p:nvSpPr>
-          <p:cNvPr id="518" name="Google Shape;518;p29:notes"/>
+          <p:cNvPr id="522" name="Google Shape;522;g2bee99cf594_0_14:notes"/>
           <p:cNvSpPr/>
           <p:nvPr>
             <p:ph idx="2" type="sldImg"/>
@@ -3976,6 +3946,45 @@
           </a:custGeom>
         </p:spPr>
       </p:sp>
+      <p:sp>
+        <p:nvSpPr>
+          <p:cNvPr id="523" name="Google Shape;523;g2bee99cf594_0_14:notes"/>
+          <p:cNvSpPr txBox="1"/>
+          <p:nvPr>
+            <p:ph idx="1" type="body"/>
+          </p:nvPr>
+        </p:nvSpPr>
+        <p:spPr>
+          <a:xfrm>
+            <a:off x="914400" y="4343400"/>
+            <a:ext cx="5029200" cy="4114800"/>
+          </a:xfrm>
+          <a:prstGeom prst="rect">
+            <a:avLst/>
+          </a:prstGeom>
+        </p:spPr>
+        <p:txBody>
+          <a:bodyPr anchorCtr="0" anchor="t" bIns="45700" lIns="91425" spcFirstLastPara="1" rIns="91425" wrap="square" tIns="45700">
+            <a:noAutofit/>
+          </a:bodyPr>
+          <a:lstStyle/>
+          <a:p>
+            <a:pPr indent="0" lvl="0" marL="0" rtl="0" algn="l">
+              <a:spcBef>
+                <a:spcPts val="0"/>
+              </a:spcBef>
+              <a:spcAft>
+                <a:spcPts val="0"/>
+              </a:spcAft>
+              <a:buNone/>
+            </a:pPr>
+            <a:r>
+              <a:t/>
+            </a:r>
+            <a:endParaRPr/>
+          </a:p>
+        </p:txBody>
+      </p:sp>
     </p:spTree>
   </p:cSld>
   <p:clrMapOvr>
@@ -3989,7 +3998,7 @@
   <p:cSld>
     <p:spTree>
       <p:nvGrpSpPr>
-        <p:cNvPr id="522" name="Shape 522"/>
+        <p:cNvPr id="527" name="Shape 527"/>
         <p:cNvGrpSpPr/>
         <p:nvPr/>
       </p:nvGrpSpPr>
@@ -4003,7 +4012,7 @@
       </p:grpSpPr>
       <p:sp>
         <p:nvSpPr>
-          <p:cNvPr id="523" name="Google Shape;523;p30:notes"/>
+          <p:cNvPr id="528" name="Google Shape;528;p28:notes"/>
           <p:cNvSpPr txBox="1"/>
           <p:nvPr>
             <p:ph idx="1" type="body"/>
@@ -4042,7 +4051,7 @@
       </p:sp>
       <p:sp>
         <p:nvSpPr>
-          <p:cNvPr id="524" name="Google Shape;524;p30:notes"/>
+          <p:cNvPr id="529" name="Google Shape;529;p28:notes"/>
           <p:cNvSpPr/>
           <p:nvPr>
             <p:ph idx="2" type="sldImg"/>
@@ -4088,7 +4097,7 @@
   <p:cSld>
     <p:spTree>
       <p:nvGrpSpPr>
-        <p:cNvPr id="528" name="Shape 528"/>
+        <p:cNvPr id="533" name="Shape 533"/>
         <p:cNvGrpSpPr/>
         <p:nvPr/>
       </p:nvGrpSpPr>
@@ -4102,7 +4111,46 @@
       </p:grpSpPr>
       <p:sp>
         <p:nvSpPr>
-          <p:cNvPr id="529" name="Google Shape;529;g26a0424328b_0_0:notes"/>
+          <p:cNvPr id="534" name="Google Shape;534;p29:notes"/>
+          <p:cNvSpPr txBox="1"/>
+          <p:nvPr>
+            <p:ph idx="1" type="body"/>
+          </p:nvPr>
+        </p:nvSpPr>
+        <p:spPr>
+          <a:xfrm>
+            <a:off x="914400" y="4343400"/>
+            <a:ext cx="5029200" cy="4114800"/>
+          </a:xfrm>
+          <a:prstGeom prst="rect">
+            <a:avLst/>
+          </a:prstGeom>
+        </p:spPr>
+        <p:txBody>
+          <a:bodyPr anchorCtr="0" anchor="t" bIns="45700" lIns="91425" spcFirstLastPara="1" rIns="91425" wrap="square" tIns="45700">
+            <a:noAutofit/>
+          </a:bodyPr>
+          <a:lstStyle/>
+          <a:p>
+            <a:pPr indent="0" lvl="0" marL="0" rtl="0" algn="l">
+              <a:spcBef>
+                <a:spcPts val="0"/>
+              </a:spcBef>
+              <a:spcAft>
+                <a:spcPts val="0"/>
+              </a:spcAft>
+              <a:buNone/>
+            </a:pPr>
+            <a:r>
+              <a:t/>
+            </a:r>
+            <a:endParaRPr/>
+          </a:p>
+        </p:txBody>
+      </p:sp>
+      <p:sp>
+        <p:nvSpPr>
+          <p:cNvPr id="535" name="Google Shape;535;p29:notes"/>
           <p:cNvSpPr/>
           <p:nvPr>
             <p:ph idx="2" type="sldImg"/>
@@ -4134,45 +4182,6 @@
             </a:pathLst>
           </a:custGeom>
         </p:spPr>
-      </p:sp>
-      <p:sp>
-        <p:nvSpPr>
-          <p:cNvPr id="530" name="Google Shape;530;g26a0424328b_0_0:notes"/>
-          <p:cNvSpPr txBox="1"/>
-          <p:nvPr>
-            <p:ph idx="1" type="body"/>
-          </p:nvPr>
-        </p:nvSpPr>
-        <p:spPr>
-          <a:xfrm>
-            <a:off x="914400" y="4343400"/>
-            <a:ext cx="5029200" cy="4114800"/>
-          </a:xfrm>
-          <a:prstGeom prst="rect">
-            <a:avLst/>
-          </a:prstGeom>
-        </p:spPr>
-        <p:txBody>
-          <a:bodyPr anchorCtr="0" anchor="t" bIns="45700" lIns="91425" spcFirstLastPara="1" rIns="91425" wrap="square" tIns="45700">
-            <a:noAutofit/>
-          </a:bodyPr>
-          <a:lstStyle/>
-          <a:p>
-            <a:pPr indent="0" lvl="0" marL="0" rtl="0" algn="l">
-              <a:spcBef>
-                <a:spcPts val="0"/>
-              </a:spcBef>
-              <a:spcAft>
-                <a:spcPts val="0"/>
-              </a:spcAft>
-              <a:buNone/>
-            </a:pPr>
-            <a:r>
-              <a:t/>
-            </a:r>
-            <a:endParaRPr/>
-          </a:p>
-        </p:txBody>
       </p:sp>
     </p:spTree>
   </p:cSld>
@@ -4286,7 +4295,7 @@
   <p:cSld>
     <p:spTree>
       <p:nvGrpSpPr>
-        <p:cNvPr id="537" name="Shape 537"/>
+        <p:cNvPr id="539" name="Shape 539"/>
         <p:cNvGrpSpPr/>
         <p:nvPr/>
       </p:nvGrpSpPr>
@@ -4300,7 +4309,106 @@
       </p:grpSpPr>
       <p:sp>
         <p:nvSpPr>
-          <p:cNvPr id="538" name="Google Shape;538;g32fbb870741_0_0:notes"/>
+          <p:cNvPr id="540" name="Google Shape;540;p30:notes"/>
+          <p:cNvSpPr txBox="1"/>
+          <p:nvPr>
+            <p:ph idx="1" type="body"/>
+          </p:nvPr>
+        </p:nvSpPr>
+        <p:spPr>
+          <a:xfrm>
+            <a:off x="914400" y="4343400"/>
+            <a:ext cx="5029200" cy="4114800"/>
+          </a:xfrm>
+          <a:prstGeom prst="rect">
+            <a:avLst/>
+          </a:prstGeom>
+        </p:spPr>
+        <p:txBody>
+          <a:bodyPr anchorCtr="0" anchor="t" bIns="45700" lIns="91425" spcFirstLastPara="1" rIns="91425" wrap="square" tIns="45700">
+            <a:noAutofit/>
+          </a:bodyPr>
+          <a:lstStyle/>
+          <a:p>
+            <a:pPr indent="0" lvl="0" marL="0" rtl="0" algn="l">
+              <a:spcBef>
+                <a:spcPts val="0"/>
+              </a:spcBef>
+              <a:spcAft>
+                <a:spcPts val="0"/>
+              </a:spcAft>
+              <a:buNone/>
+            </a:pPr>
+            <a:r>
+              <a:t/>
+            </a:r>
+            <a:endParaRPr/>
+          </a:p>
+        </p:txBody>
+      </p:sp>
+      <p:sp>
+        <p:nvSpPr>
+          <p:cNvPr id="541" name="Google Shape;541;p30:notes"/>
+          <p:cNvSpPr/>
+          <p:nvPr>
+            <p:ph idx="2" type="sldImg"/>
+          </p:nvPr>
+        </p:nvSpPr>
+        <p:spPr>
+          <a:xfrm>
+            <a:off x="381000" y="685800"/>
+            <a:ext cx="6096000" cy="3429000"/>
+          </a:xfrm>
+          <a:custGeom>
+            <a:rect b="b" l="l" r="r" t="t"/>
+            <a:pathLst>
+              <a:path extrusionOk="0" h="120000" w="120000">
+                <a:moveTo>
+                  <a:pt x="0" y="0"/>
+                </a:moveTo>
+                <a:lnTo>
+                  <a:pt x="120000" y="0"/>
+                </a:lnTo>
+                <a:lnTo>
+                  <a:pt x="120000" y="120000"/>
+                </a:lnTo>
+                <a:lnTo>
+                  <a:pt x="0" y="120000"/>
+                </a:lnTo>
+                <a:close/>
+              </a:path>
+            </a:pathLst>
+          </a:custGeom>
+        </p:spPr>
+      </p:sp>
+    </p:spTree>
+  </p:cSld>
+  <p:clrMapOvr>
+    <a:masterClrMapping/>
+  </p:clrMapOvr>
+</p:notes>
+</file>
+
+<file path=ppt/notesSlides/notesSlide41.xml><?xml version="1.0" encoding="utf-8"?>
+<p:notes xmlns:a="http://schemas.openxmlformats.org/drawingml/2006/main" xmlns:r="http://schemas.openxmlformats.org/officeDocument/2006/relationships" xmlns:mc="http://schemas.openxmlformats.org/markup-compatibility/2006" xmlns:mv="urn:schemas-microsoft-com:mac:vml" xmlns:p="http://schemas.openxmlformats.org/presentationml/2006/main" xmlns:c="http://schemas.openxmlformats.org/drawingml/2006/chart" xmlns:dgm="http://schemas.openxmlformats.org/drawingml/2006/diagram" xmlns:o="urn:schemas-microsoft-com:office:office" xmlns:v="urn:schemas-microsoft-com:vml" xmlns:pvml="urn:schemas-microsoft-com:office:powerpoint" xmlns:com="http://schemas.openxmlformats.org/drawingml/2006/compatibility" xmlns:p14="http://schemas.microsoft.com/office/powerpoint/2010/main" xmlns:p15="http://schemas.microsoft.com/office/powerpoint/2012/main" xmlns:ahyp="http://schemas.microsoft.com/office/drawing/2018/hyperlinkcolor" showMasterPhAnim="0" showMasterSp="0">
+  <p:cSld>
+    <p:spTree>
+      <p:nvGrpSpPr>
+        <p:cNvPr id="545" name="Shape 545"/>
+        <p:cNvGrpSpPr/>
+        <p:nvPr/>
+      </p:nvGrpSpPr>
+      <p:grpSpPr>
+        <a:xfrm>
+          <a:off x="0" y="0"/>
+          <a:ext cx="0" cy="0"/>
+          <a:chOff x="0" y="0"/>
+          <a:chExt cx="0" cy="0"/>
+        </a:xfrm>
+      </p:grpSpPr>
+      <p:sp>
+        <p:nvSpPr>
+          <p:cNvPr id="546" name="Google Shape;546;g26a0424328b_0_0:notes"/>
           <p:cNvSpPr/>
           <p:nvPr>
             <p:ph idx="2" type="sldImg"/>
@@ -4335,7 +4443,7 @@
       </p:sp>
       <p:sp>
         <p:nvSpPr>
-          <p:cNvPr id="539" name="Google Shape;539;g32fbb870741_0_0:notes"/>
+          <p:cNvPr id="547" name="Google Shape;547;g26a0424328b_0_0:notes"/>
           <p:cNvSpPr txBox="1"/>
           <p:nvPr>
             <p:ph idx="1" type="body"/>
@@ -4380,12 +4488,12 @@
 </p:notes>
 </file>
 
-<file path=ppt/notesSlides/notesSlide41.xml><?xml version="1.0" encoding="utf-8"?>
+<file path=ppt/notesSlides/notesSlide42.xml><?xml version="1.0" encoding="utf-8"?>
 <p:notes xmlns:a="http://schemas.openxmlformats.org/drawingml/2006/main" xmlns:r="http://schemas.openxmlformats.org/officeDocument/2006/relationships" xmlns:mc="http://schemas.openxmlformats.org/markup-compatibility/2006" xmlns:mv="urn:schemas-microsoft-com:mac:vml" xmlns:p="http://schemas.openxmlformats.org/presentationml/2006/main" xmlns:c="http://schemas.openxmlformats.org/drawingml/2006/chart" xmlns:dgm="http://schemas.openxmlformats.org/drawingml/2006/diagram" xmlns:o="urn:schemas-microsoft-com:office:office" xmlns:v="urn:schemas-microsoft-com:vml" xmlns:pvml="urn:schemas-microsoft-com:office:powerpoint" xmlns:com="http://schemas.openxmlformats.org/drawingml/2006/compatibility" xmlns:p14="http://schemas.microsoft.com/office/powerpoint/2010/main" xmlns:p15="http://schemas.microsoft.com/office/powerpoint/2012/main" xmlns:ahyp="http://schemas.microsoft.com/office/drawing/2018/hyperlinkcolor" showMasterPhAnim="0" showMasterSp="0">
   <p:cSld>
     <p:spTree>
       <p:nvGrpSpPr>
-        <p:cNvPr id="546" name="Shape 546"/>
+        <p:cNvPr id="554" name="Shape 554"/>
         <p:cNvGrpSpPr/>
         <p:nvPr/>
       </p:nvGrpSpPr>
@@ -4399,7 +4507,7 @@
       </p:grpSpPr>
       <p:sp>
         <p:nvSpPr>
-          <p:cNvPr id="547" name="Google Shape;547;g3c4d2c5fc43_0_0:notes"/>
+          <p:cNvPr id="555" name="Google Shape;555;g32fbb870741_0_0:notes"/>
           <p:cNvSpPr/>
           <p:nvPr>
             <p:ph idx="2" type="sldImg"/>
@@ -4434,7 +4542,7 @@
       </p:sp>
       <p:sp>
         <p:nvSpPr>
-          <p:cNvPr id="548" name="Google Shape;548;g3c4d2c5fc43_0_0:notes"/>
+          <p:cNvPr id="556" name="Google Shape;556;g32fbb870741_0_0:notes"/>
           <p:cNvSpPr txBox="1"/>
           <p:nvPr>
             <p:ph idx="1" type="body"/>
@@ -4479,12 +4587,12 @@
 </p:notes>
 </file>
 
-<file path=ppt/notesSlides/notesSlide42.xml><?xml version="1.0" encoding="utf-8"?>
+<file path=ppt/notesSlides/notesSlide43.xml><?xml version="1.0" encoding="utf-8"?>
 <p:notes xmlns:a="http://schemas.openxmlformats.org/drawingml/2006/main" xmlns:r="http://schemas.openxmlformats.org/officeDocument/2006/relationships" xmlns:mc="http://schemas.openxmlformats.org/markup-compatibility/2006" xmlns:mv="urn:schemas-microsoft-com:mac:vml" xmlns:p="http://schemas.openxmlformats.org/presentationml/2006/main" xmlns:c="http://schemas.openxmlformats.org/drawingml/2006/chart" xmlns:dgm="http://schemas.openxmlformats.org/drawingml/2006/diagram" xmlns:o="urn:schemas-microsoft-com:office:office" xmlns:v="urn:schemas-microsoft-com:vml" xmlns:pvml="urn:schemas-microsoft-com:office:powerpoint" xmlns:com="http://schemas.openxmlformats.org/drawingml/2006/compatibility" xmlns:p14="http://schemas.microsoft.com/office/powerpoint/2010/main" xmlns:p15="http://schemas.microsoft.com/office/powerpoint/2012/main" xmlns:ahyp="http://schemas.microsoft.com/office/drawing/2018/hyperlinkcolor" showMasterPhAnim="0" showMasterSp="0">
   <p:cSld>
     <p:spTree>
       <p:nvGrpSpPr>
-        <p:cNvPr id="555" name="Shape 555"/>
+        <p:cNvPr id="563" name="Shape 563"/>
         <p:cNvGrpSpPr/>
         <p:nvPr/>
       </p:nvGrpSpPr>
@@ -4498,7 +4606,42 @@
       </p:grpSpPr>
       <p:sp>
         <p:nvSpPr>
-          <p:cNvPr id="556" name="Google Shape;556;p31:notes"/>
+          <p:cNvPr id="564" name="Google Shape;564;g3c4d2c5fc43_0_0:notes"/>
+          <p:cNvSpPr/>
+          <p:nvPr>
+            <p:ph idx="2" type="sldImg"/>
+          </p:nvPr>
+        </p:nvSpPr>
+        <p:spPr>
+          <a:xfrm>
+            <a:off x="381000" y="685800"/>
+            <a:ext cx="6096000" cy="3429000"/>
+          </a:xfrm>
+          <a:custGeom>
+            <a:rect b="b" l="l" r="r" t="t"/>
+            <a:pathLst>
+              <a:path extrusionOk="0" h="120000" w="120000">
+                <a:moveTo>
+                  <a:pt x="0" y="0"/>
+                </a:moveTo>
+                <a:lnTo>
+                  <a:pt x="120000" y="0"/>
+                </a:lnTo>
+                <a:lnTo>
+                  <a:pt x="120000" y="120000"/>
+                </a:lnTo>
+                <a:lnTo>
+                  <a:pt x="0" y="120000"/>
+                </a:lnTo>
+                <a:close/>
+              </a:path>
+            </a:pathLst>
+          </a:custGeom>
+        </p:spPr>
+      </p:sp>
+      <p:sp>
+        <p:nvSpPr>
+          <p:cNvPr id="565" name="Google Shape;565;g3c4d2c5fc43_0_0:notes"/>
           <p:cNvSpPr txBox="1"/>
           <p:nvPr>
             <p:ph idx="1" type="body"/>
@@ -4535,9 +4678,73 @@
           </a:p>
         </p:txBody>
       </p:sp>
+    </p:spTree>
+  </p:cSld>
+  <p:clrMapOvr>
+    <a:masterClrMapping/>
+  </p:clrMapOvr>
+</p:notes>
+</file>
+
+<file path=ppt/notesSlides/notesSlide44.xml><?xml version="1.0" encoding="utf-8"?>
+<p:notes xmlns:a="http://schemas.openxmlformats.org/drawingml/2006/main" xmlns:r="http://schemas.openxmlformats.org/officeDocument/2006/relationships" xmlns:mc="http://schemas.openxmlformats.org/markup-compatibility/2006" xmlns:mv="urn:schemas-microsoft-com:mac:vml" xmlns:p="http://schemas.openxmlformats.org/presentationml/2006/main" xmlns:c="http://schemas.openxmlformats.org/drawingml/2006/chart" xmlns:dgm="http://schemas.openxmlformats.org/drawingml/2006/diagram" xmlns:o="urn:schemas-microsoft-com:office:office" xmlns:v="urn:schemas-microsoft-com:vml" xmlns:pvml="urn:schemas-microsoft-com:office:powerpoint" xmlns:com="http://schemas.openxmlformats.org/drawingml/2006/compatibility" xmlns:p14="http://schemas.microsoft.com/office/powerpoint/2010/main" xmlns:p15="http://schemas.microsoft.com/office/powerpoint/2012/main" xmlns:ahyp="http://schemas.microsoft.com/office/drawing/2018/hyperlinkcolor" showMasterPhAnim="0" showMasterSp="0">
+  <p:cSld>
+    <p:spTree>
+      <p:nvGrpSpPr>
+        <p:cNvPr id="572" name="Shape 572"/>
+        <p:cNvGrpSpPr/>
+        <p:nvPr/>
+      </p:nvGrpSpPr>
+      <p:grpSpPr>
+        <a:xfrm>
+          <a:off x="0" y="0"/>
+          <a:ext cx="0" cy="0"/>
+          <a:chOff x="0" y="0"/>
+          <a:chExt cx="0" cy="0"/>
+        </a:xfrm>
+      </p:grpSpPr>
       <p:sp>
         <p:nvSpPr>
-          <p:cNvPr id="557" name="Google Shape;557;p31:notes"/>
+          <p:cNvPr id="573" name="Google Shape;573;p31:notes"/>
+          <p:cNvSpPr txBox="1"/>
+          <p:nvPr>
+            <p:ph idx="1" type="body"/>
+          </p:nvPr>
+        </p:nvSpPr>
+        <p:spPr>
+          <a:xfrm>
+            <a:off x="914400" y="4343400"/>
+            <a:ext cx="5029200" cy="4114800"/>
+          </a:xfrm>
+          <a:prstGeom prst="rect">
+            <a:avLst/>
+          </a:prstGeom>
+        </p:spPr>
+        <p:txBody>
+          <a:bodyPr anchorCtr="0" anchor="t" bIns="45700" lIns="91425" spcFirstLastPara="1" rIns="91425" wrap="square" tIns="45700">
+            <a:noAutofit/>
+          </a:bodyPr>
+          <a:lstStyle/>
+          <a:p>
+            <a:pPr indent="0" lvl="0" marL="0" rtl="0" algn="l">
+              <a:spcBef>
+                <a:spcPts val="0"/>
+              </a:spcBef>
+              <a:spcAft>
+                <a:spcPts val="0"/>
+              </a:spcAft>
+              <a:buNone/>
+            </a:pPr>
+            <a:r>
+              <a:t/>
+            </a:r>
+            <a:endParaRPr/>
+          </a:p>
+        </p:txBody>
+      </p:sp>
+      <p:sp>
+        <p:nvSpPr>
+          <p:cNvPr id="574" name="Google Shape;574;p31:notes"/>
           <p:cNvSpPr/>
           <p:nvPr>
             <p:ph idx="2" type="sldImg"/>
@@ -28063,59 +28270,9 @@
           </a:p>
         </p:txBody>
       </p:sp>
-      <p:sp>
-        <p:nvSpPr>
-          <p:cNvPr id="331" name="Google Shape;331;p14"/>
-          <p:cNvSpPr txBox="1"/>
-          <p:nvPr>
-            <p:ph idx="1" type="body"/>
-          </p:nvPr>
-        </p:nvSpPr>
-        <p:spPr>
-          <a:xfrm>
-            <a:off x="571370" y="1673454"/>
-            <a:ext cx="11010900" cy="4574947"/>
-          </a:xfrm>
-          <a:prstGeom prst="rect">
-            <a:avLst/>
-          </a:prstGeom>
-          <a:noFill/>
-          <a:ln>
-            <a:noFill/>
-          </a:ln>
-        </p:spPr>
-        <p:txBody>
-          <a:bodyPr anchorCtr="0" anchor="t" bIns="0" lIns="0" spcFirstLastPara="1" rIns="0" wrap="square" tIns="0">
-            <a:normAutofit/>
-          </a:bodyPr>
-          <a:lstStyle/>
-          <a:p>
-            <a:pPr indent="-50800" lvl="0" marL="228600" rtl="0" algn="l">
-              <a:lnSpc>
-                <a:spcPct val="100000"/>
-              </a:lnSpc>
-              <a:spcBef>
-                <a:spcPts val="0"/>
-              </a:spcBef>
-              <a:spcAft>
-                <a:spcPts val="0"/>
-              </a:spcAft>
-              <a:buClr>
-                <a:schemeClr val="lt2"/>
-              </a:buClr>
-              <a:buSzPts val="2800"/>
-              <a:buNone/>
-            </a:pPr>
-            <a:r>
-              <a:t/>
-            </a:r>
-            <a:endParaRPr/>
-          </a:p>
-        </p:txBody>
-      </p:sp>
       <p:pic>
         <p:nvPicPr>
-          <p:cNvPr id="332" name="Google Shape;332;p14"/>
+          <p:cNvPr id="331" name="Google Shape;331;p14"/>
           <p:cNvPicPr preferRelativeResize="0"/>
           <p:nvPr/>
         </p:nvPicPr>
@@ -28123,13 +28280,13 @@
           <a:blip r:embed="rId3">
             <a:alphaModFix/>
           </a:blip>
-          <a:srcRect b="0" l="0" r="0" t="0"/>
+          <a:srcRect b="13763" l="1221" r="1075" t="4067"/>
           <a:stretch/>
         </p:blipFill>
         <p:spPr>
           <a:xfrm>
-            <a:off x="16886" y="0"/>
-            <a:ext cx="12158227" cy="6858000"/>
+            <a:off x="0" y="286050"/>
+            <a:ext cx="12192000" cy="5783751"/>
           </a:xfrm>
           <a:prstGeom prst="rect">
             <a:avLst/>
@@ -28142,14 +28299,14 @@
       </p:pic>
       <p:sp>
         <p:nvSpPr>
-          <p:cNvPr id="333" name="Google Shape;333;p14"/>
+          <p:cNvPr id="332" name="Google Shape;332;p14"/>
           <p:cNvSpPr txBox="1"/>
           <p:nvPr/>
         </p:nvSpPr>
         <p:spPr>
           <a:xfrm>
-            <a:off x="804545" y="5914082"/>
-            <a:ext cx="11666989" cy="426079"/>
+            <a:off x="483275" y="6188400"/>
+            <a:ext cx="11187000" cy="424800"/>
           </a:xfrm>
           <a:prstGeom prst="rect">
             <a:avLst/>
@@ -28165,7 +28322,7 @@
           </a:bodyPr>
           <a:lstStyle/>
           <a:p>
-            <a:pPr indent="0" lvl="0" marL="0" marR="0" rtl="0" algn="l">
+            <a:pPr indent="0" lvl="0" marL="0" marR="0" rtl="0" algn="ctr">
               <a:lnSpc>
                 <a:spcPct val="90000"/>
               </a:lnSpc>
@@ -28242,7 +28399,7 @@
   <p:cSld>
     <p:spTree>
       <p:nvGrpSpPr>
-        <p:cNvPr id="337" name="Shape 337"/>
+        <p:cNvPr id="336" name="Shape 336"/>
         <p:cNvGrpSpPr/>
         <p:nvPr/>
       </p:nvGrpSpPr>
@@ -28256,7 +28413,7 @@
       </p:grpSpPr>
       <p:sp>
         <p:nvSpPr>
-          <p:cNvPr id="338" name="Google Shape;338;p15"/>
+          <p:cNvPr id="337" name="Google Shape;337;p15"/>
           <p:cNvSpPr txBox="1"/>
           <p:nvPr>
             <p:ph type="title"/>
@@ -28308,7 +28465,7 @@
       </p:sp>
       <p:pic>
         <p:nvPicPr>
-          <p:cNvPr id="339" name="Google Shape;339;p15"/>
+          <p:cNvPr id="338" name="Google Shape;338;p15"/>
           <p:cNvPicPr preferRelativeResize="0"/>
           <p:nvPr/>
         </p:nvPicPr>
@@ -28335,7 +28492,7 @@
       </p:pic>
       <p:pic>
         <p:nvPicPr>
-          <p:cNvPr id="340" name="Google Shape;340;p15"/>
+          <p:cNvPr id="339" name="Google Shape;339;p15"/>
           <p:cNvPicPr preferRelativeResize="0"/>
           <p:nvPr/>
         </p:nvPicPr>
@@ -28362,7 +28519,7 @@
       </p:pic>
       <p:grpSp>
         <p:nvGrpSpPr>
-          <p:cNvPr id="341" name="Google Shape;341;p15"/>
+          <p:cNvPr id="340" name="Google Shape;340;p15"/>
           <p:cNvGrpSpPr/>
           <p:nvPr/>
         </p:nvGrpSpPr>
@@ -28376,7 +28533,7 @@
         </p:grpSpPr>
         <p:sp>
           <p:nvSpPr>
-            <p:cNvPr id="342" name="Google Shape;342;p15"/>
+            <p:cNvPr id="341" name="Google Shape;341;p15"/>
             <p:cNvSpPr/>
             <p:nvPr/>
           </p:nvSpPr>
@@ -28429,7 +28586,7 @@
         </p:sp>
         <p:pic>
           <p:nvPicPr>
-            <p:cNvPr id="343" name="Google Shape;343;p15"/>
+            <p:cNvPr id="342" name="Google Shape;342;p15"/>
             <p:cNvPicPr preferRelativeResize="0"/>
             <p:nvPr/>
           </p:nvPicPr>
@@ -28457,7 +28614,7 @@
         </p:pic>
         <p:sp>
           <p:nvSpPr>
-            <p:cNvPr id="344" name="Google Shape;344;p15"/>
+            <p:cNvPr id="343" name="Google Shape;343;p15"/>
             <p:cNvSpPr/>
             <p:nvPr/>
           </p:nvSpPr>
@@ -29385,7 +29542,7 @@
   <p:cSld>
     <p:spTree>
       <p:nvGrpSpPr>
-        <p:cNvPr id="348" name="Shape 348"/>
+        <p:cNvPr id="347" name="Shape 347"/>
         <p:cNvGrpSpPr/>
         <p:nvPr/>
       </p:nvGrpSpPr>
@@ -29399,7 +29556,7 @@
       </p:grpSpPr>
       <p:sp>
         <p:nvSpPr>
-          <p:cNvPr id="349" name="Google Shape;349;p16"/>
+          <p:cNvPr id="348" name="Google Shape;348;p16"/>
           <p:cNvSpPr txBox="1"/>
           <p:nvPr>
             <p:ph type="title"/>
@@ -29451,7 +29608,7 @@
       </p:sp>
       <p:pic>
         <p:nvPicPr>
-          <p:cNvPr id="350" name="Google Shape;350;p16"/>
+          <p:cNvPr id="349" name="Google Shape;349;p16"/>
           <p:cNvPicPr preferRelativeResize="0"/>
           <p:nvPr/>
         </p:nvPicPr>
@@ -29478,7 +29635,7 @@
       </p:pic>
       <p:pic>
         <p:nvPicPr>
-          <p:cNvPr id="351" name="Google Shape;351;p16"/>
+          <p:cNvPr id="350" name="Google Shape;350;p16"/>
           <p:cNvPicPr preferRelativeResize="0"/>
           <p:nvPr/>
         </p:nvPicPr>
@@ -29505,7 +29662,7 @@
       </p:pic>
       <p:grpSp>
         <p:nvGrpSpPr>
-          <p:cNvPr id="352" name="Google Shape;352;p16"/>
+          <p:cNvPr id="351" name="Google Shape;351;p16"/>
           <p:cNvGrpSpPr/>
           <p:nvPr/>
         </p:nvGrpSpPr>
@@ -29519,7 +29676,7 @@
         </p:grpSpPr>
         <p:sp>
           <p:nvSpPr>
-            <p:cNvPr id="353" name="Google Shape;353;p16"/>
+            <p:cNvPr id="352" name="Google Shape;352;p16"/>
             <p:cNvSpPr/>
             <p:nvPr/>
           </p:nvSpPr>
@@ -29572,7 +29729,7 @@
         </p:sp>
         <p:pic>
           <p:nvPicPr>
-            <p:cNvPr id="354" name="Google Shape;354;p16"/>
+            <p:cNvPr id="353" name="Google Shape;353;p16"/>
             <p:cNvPicPr preferRelativeResize="0"/>
             <p:nvPr/>
           </p:nvPicPr>
@@ -29600,7 +29757,7 @@
         </p:pic>
         <p:sp>
           <p:nvSpPr>
-            <p:cNvPr id="355" name="Google Shape;355;p16"/>
+            <p:cNvPr id="354" name="Google Shape;354;p16"/>
             <p:cNvSpPr/>
             <p:nvPr/>
           </p:nvSpPr>
@@ -29691,7 +29848,7 @@
   <p:cSld>
     <p:spTree>
       <p:nvGrpSpPr>
-        <p:cNvPr id="359" name="Shape 359"/>
+        <p:cNvPr id="358" name="Shape 358"/>
         <p:cNvGrpSpPr/>
         <p:nvPr/>
       </p:nvGrpSpPr>
@@ -29705,7 +29862,7 @@
       </p:grpSpPr>
       <p:sp>
         <p:nvSpPr>
-          <p:cNvPr id="360" name="Google Shape;360;p17"/>
+          <p:cNvPr id="359" name="Google Shape;359;p17"/>
           <p:cNvSpPr txBox="1"/>
           <p:nvPr>
             <p:ph type="title"/>
@@ -29757,7 +29914,7 @@
       </p:sp>
       <p:pic>
         <p:nvPicPr>
-          <p:cNvPr id="361" name="Google Shape;361;p17"/>
+          <p:cNvPr id="360" name="Google Shape;360;p17"/>
           <p:cNvPicPr preferRelativeResize="0"/>
           <p:nvPr/>
         </p:nvPicPr>
@@ -29784,7 +29941,7 @@
       </p:pic>
       <p:pic>
         <p:nvPicPr>
-          <p:cNvPr id="362" name="Google Shape;362;p17"/>
+          <p:cNvPr id="361" name="Google Shape;361;p17"/>
           <p:cNvPicPr preferRelativeResize="0"/>
           <p:nvPr/>
         </p:nvPicPr>
@@ -29811,7 +29968,7 @@
       </p:pic>
       <p:sp>
         <p:nvSpPr>
-          <p:cNvPr id="363" name="Google Shape;363;p17"/>
+          <p:cNvPr id="362" name="Google Shape;362;p17"/>
           <p:cNvSpPr/>
           <p:nvPr/>
         </p:nvSpPr>
@@ -29894,7 +30051,7 @@
       </p:sp>
       <p:sp>
         <p:nvSpPr>
-          <p:cNvPr id="364" name="Google Shape;364;p17"/>
+          <p:cNvPr id="363" name="Google Shape;363;p17"/>
           <p:cNvSpPr/>
           <p:nvPr/>
         </p:nvSpPr>
@@ -29977,7 +30134,7 @@
       </p:sp>
       <p:sp>
         <p:nvSpPr>
-          <p:cNvPr id="365" name="Google Shape;365;p17"/>
+          <p:cNvPr id="364" name="Google Shape;364;p17"/>
           <p:cNvSpPr/>
           <p:nvPr/>
         </p:nvSpPr>
@@ -30060,7 +30217,7 @@
       </p:sp>
       <p:cxnSp>
         <p:nvCxnSpPr>
-          <p:cNvPr id="366" name="Google Shape;366;p17"/>
+          <p:cNvPr id="365" name="Google Shape;365;p17"/>
           <p:cNvCxnSpPr/>
           <p:nvPr/>
         </p:nvCxnSpPr>
@@ -30086,7 +30243,7 @@
       </p:cxnSp>
       <p:grpSp>
         <p:nvGrpSpPr>
-          <p:cNvPr id="367" name="Google Shape;367;p17"/>
+          <p:cNvPr id="366" name="Google Shape;366;p17"/>
           <p:cNvGrpSpPr/>
           <p:nvPr/>
         </p:nvGrpSpPr>
@@ -30100,7 +30257,7 @@
         </p:grpSpPr>
         <p:sp>
           <p:nvSpPr>
-            <p:cNvPr id="368" name="Google Shape;368;p17"/>
+            <p:cNvPr id="367" name="Google Shape;367;p17"/>
             <p:cNvSpPr/>
             <p:nvPr/>
           </p:nvSpPr>
@@ -30153,7 +30310,7 @@
         </p:sp>
         <p:pic>
           <p:nvPicPr>
-            <p:cNvPr id="369" name="Google Shape;369;p17"/>
+            <p:cNvPr id="368" name="Google Shape;368;p17"/>
             <p:cNvPicPr preferRelativeResize="0"/>
             <p:nvPr/>
           </p:nvPicPr>
@@ -30181,7 +30338,7 @@
         </p:pic>
         <p:sp>
           <p:nvSpPr>
-            <p:cNvPr id="370" name="Google Shape;370;p17"/>
+            <p:cNvPr id="369" name="Google Shape;369;p17"/>
             <p:cNvSpPr/>
             <p:nvPr/>
           </p:nvSpPr>
@@ -30272,7 +30429,7 @@
   <p:cSld>
     <p:spTree>
       <p:nvGrpSpPr>
-        <p:cNvPr id="374" name="Shape 374"/>
+        <p:cNvPr id="373" name="Shape 373"/>
         <p:cNvGrpSpPr/>
         <p:nvPr/>
       </p:nvGrpSpPr>
@@ -30286,7 +30443,7 @@
       </p:grpSpPr>
       <p:sp>
         <p:nvSpPr>
-          <p:cNvPr id="375" name="Google Shape;375;p18"/>
+          <p:cNvPr id="374" name="Google Shape;374;p18"/>
           <p:cNvSpPr txBox="1"/>
           <p:nvPr>
             <p:ph type="title"/>
@@ -30338,7 +30495,7 @@
       </p:sp>
       <p:pic>
         <p:nvPicPr>
-          <p:cNvPr id="376" name="Google Shape;376;p18"/>
+          <p:cNvPr id="375" name="Google Shape;375;p18"/>
           <p:cNvPicPr preferRelativeResize="0"/>
           <p:nvPr>
             <p:ph idx="1" type="body"/>
@@ -30367,7 +30524,7 @@
       </p:pic>
       <p:pic>
         <p:nvPicPr>
-          <p:cNvPr id="377" name="Google Shape;377;p18"/>
+          <p:cNvPr id="376" name="Google Shape;376;p18"/>
           <p:cNvPicPr preferRelativeResize="0"/>
           <p:nvPr/>
         </p:nvPicPr>
@@ -30394,7 +30551,7 @@
       </p:pic>
       <p:cxnSp>
         <p:nvCxnSpPr>
-          <p:cNvPr id="378" name="Google Shape;378;p18"/>
+          <p:cNvPr id="377" name="Google Shape;377;p18"/>
           <p:cNvCxnSpPr/>
           <p:nvPr/>
         </p:nvCxnSpPr>
@@ -30420,7 +30577,7 @@
       </p:cxnSp>
       <p:grpSp>
         <p:nvGrpSpPr>
-          <p:cNvPr id="379" name="Google Shape;379;p18"/>
+          <p:cNvPr id="378" name="Google Shape;378;p18"/>
           <p:cNvGrpSpPr/>
           <p:nvPr/>
         </p:nvGrpSpPr>
@@ -30434,7 +30591,7 @@
         </p:grpSpPr>
         <p:sp>
           <p:nvSpPr>
-            <p:cNvPr id="380" name="Google Shape;380;p18"/>
+            <p:cNvPr id="379" name="Google Shape;379;p18"/>
             <p:cNvSpPr/>
             <p:nvPr/>
           </p:nvSpPr>
@@ -30487,7 +30644,7 @@
         </p:sp>
         <p:pic>
           <p:nvPicPr>
-            <p:cNvPr id="381" name="Google Shape;381;p18"/>
+            <p:cNvPr id="380" name="Google Shape;380;p18"/>
             <p:cNvPicPr preferRelativeResize="0"/>
             <p:nvPr/>
           </p:nvPicPr>
@@ -30515,7 +30672,7 @@
         </p:pic>
         <p:sp>
           <p:nvSpPr>
-            <p:cNvPr id="382" name="Google Shape;382;p18"/>
+            <p:cNvPr id="381" name="Google Shape;381;p18"/>
             <p:cNvSpPr/>
             <p:nvPr/>
           </p:nvSpPr>
@@ -30606,7 +30763,7 @@
   <p:cSld>
     <p:spTree>
       <p:nvGrpSpPr>
-        <p:cNvPr id="386" name="Shape 386"/>
+        <p:cNvPr id="385" name="Shape 385"/>
         <p:cNvGrpSpPr/>
         <p:nvPr/>
       </p:nvGrpSpPr>
@@ -30620,7 +30777,7 @@
       </p:grpSpPr>
       <p:sp>
         <p:nvSpPr>
-          <p:cNvPr id="387" name="Google Shape;387;p19"/>
+          <p:cNvPr id="386" name="Google Shape;386;p19"/>
           <p:cNvSpPr txBox="1"/>
           <p:nvPr>
             <p:ph type="title"/>
@@ -30672,7 +30829,7 @@
       </p:sp>
       <p:pic>
         <p:nvPicPr>
-          <p:cNvPr id="388" name="Google Shape;388;p19"/>
+          <p:cNvPr id="387" name="Google Shape;387;p19"/>
           <p:cNvPicPr preferRelativeResize="0"/>
           <p:nvPr>
             <p:ph idx="1" type="body"/>
@@ -30701,7 +30858,7 @@
       </p:pic>
       <p:pic>
         <p:nvPicPr>
-          <p:cNvPr id="389" name="Google Shape;389;p19"/>
+          <p:cNvPr id="388" name="Google Shape;388;p19"/>
           <p:cNvPicPr preferRelativeResize="0"/>
           <p:nvPr/>
         </p:nvPicPr>
@@ -30728,7 +30885,7 @@
       </p:pic>
       <p:grpSp>
         <p:nvGrpSpPr>
-          <p:cNvPr id="390" name="Google Shape;390;p19"/>
+          <p:cNvPr id="389" name="Google Shape;389;p19"/>
           <p:cNvGrpSpPr/>
           <p:nvPr/>
         </p:nvGrpSpPr>
@@ -30742,7 +30899,7 @@
         </p:grpSpPr>
         <p:sp>
           <p:nvSpPr>
-            <p:cNvPr id="391" name="Google Shape;391;p19"/>
+            <p:cNvPr id="390" name="Google Shape;390;p19"/>
             <p:cNvSpPr/>
             <p:nvPr/>
           </p:nvSpPr>
@@ -30795,7 +30952,7 @@
         </p:sp>
         <p:pic>
           <p:nvPicPr>
-            <p:cNvPr id="392" name="Google Shape;392;p19"/>
+            <p:cNvPr id="391" name="Google Shape;391;p19"/>
             <p:cNvPicPr preferRelativeResize="0"/>
             <p:nvPr/>
           </p:nvPicPr>
@@ -30823,7 +30980,7 @@
         </p:pic>
         <p:sp>
           <p:nvSpPr>
-            <p:cNvPr id="393" name="Google Shape;393;p19"/>
+            <p:cNvPr id="392" name="Google Shape;392;p19"/>
             <p:cNvSpPr/>
             <p:nvPr/>
           </p:nvSpPr>
@@ -30914,7 +31071,7 @@
   <p:cSld>
     <p:spTree>
       <p:nvGrpSpPr>
-        <p:cNvPr id="397" name="Shape 397"/>
+        <p:cNvPr id="396" name="Shape 396"/>
         <p:cNvGrpSpPr/>
         <p:nvPr/>
       </p:nvGrpSpPr>
@@ -30928,7 +31085,7 @@
       </p:grpSpPr>
       <p:sp>
         <p:nvSpPr>
-          <p:cNvPr id="398" name="Google Shape;398;p20"/>
+          <p:cNvPr id="397" name="Google Shape;397;p20"/>
           <p:cNvSpPr txBox="1"/>
           <p:nvPr>
             <p:ph type="title"/>
@@ -30980,7 +31137,7 @@
       </p:sp>
       <p:pic>
         <p:nvPicPr>
-          <p:cNvPr id="399" name="Google Shape;399;p20"/>
+          <p:cNvPr id="398" name="Google Shape;398;p20"/>
           <p:cNvPicPr preferRelativeResize="0"/>
           <p:nvPr>
             <p:ph idx="1" type="body"/>
@@ -31009,7 +31166,7 @@
       </p:pic>
       <p:pic>
         <p:nvPicPr>
-          <p:cNvPr id="400" name="Google Shape;400;p20"/>
+          <p:cNvPr id="399" name="Google Shape;399;p20"/>
           <p:cNvPicPr preferRelativeResize="0"/>
           <p:nvPr/>
         </p:nvPicPr>
@@ -31036,7 +31193,7 @@
       </p:pic>
       <p:cxnSp>
         <p:nvCxnSpPr>
-          <p:cNvPr id="401" name="Google Shape;401;p20"/>
+          <p:cNvPr id="400" name="Google Shape;400;p20"/>
           <p:cNvCxnSpPr/>
           <p:nvPr/>
         </p:nvCxnSpPr>
@@ -31062,7 +31219,7 @@
       </p:cxnSp>
       <p:grpSp>
         <p:nvGrpSpPr>
-          <p:cNvPr id="402" name="Google Shape;402;p20"/>
+          <p:cNvPr id="401" name="Google Shape;401;p20"/>
           <p:cNvGrpSpPr/>
           <p:nvPr/>
         </p:nvGrpSpPr>
@@ -31076,7 +31233,7 @@
         </p:grpSpPr>
         <p:sp>
           <p:nvSpPr>
-            <p:cNvPr id="403" name="Google Shape;403;p20"/>
+            <p:cNvPr id="402" name="Google Shape;402;p20"/>
             <p:cNvSpPr/>
             <p:nvPr/>
           </p:nvSpPr>
@@ -31129,7 +31286,7 @@
         </p:sp>
         <p:pic>
           <p:nvPicPr>
-            <p:cNvPr id="404" name="Google Shape;404;p20"/>
+            <p:cNvPr id="403" name="Google Shape;403;p20"/>
             <p:cNvPicPr preferRelativeResize="0"/>
             <p:nvPr/>
           </p:nvPicPr>
@@ -31157,7 +31314,7 @@
         </p:pic>
         <p:sp>
           <p:nvSpPr>
-            <p:cNvPr id="405" name="Google Shape;405;p20"/>
+            <p:cNvPr id="404" name="Google Shape;404;p20"/>
             <p:cNvSpPr/>
             <p:nvPr/>
           </p:nvSpPr>
@@ -31248,7 +31405,7 @@
   <p:cSld>
     <p:spTree>
       <p:nvGrpSpPr>
-        <p:cNvPr id="409" name="Shape 409"/>
+        <p:cNvPr id="408" name="Shape 408"/>
         <p:cNvGrpSpPr/>
         <p:nvPr/>
       </p:nvGrpSpPr>
@@ -31262,7 +31419,7 @@
       </p:grpSpPr>
       <p:sp>
         <p:nvSpPr>
-          <p:cNvPr id="410" name="Google Shape;410;g33ce395d76b_0_19"/>
+          <p:cNvPr id="409" name="Google Shape;409;g33ce395d76b_0_19"/>
           <p:cNvSpPr txBox="1"/>
           <p:nvPr>
             <p:ph type="title"/>
@@ -31302,7 +31459,7 @@
       </p:sp>
       <p:sp>
         <p:nvSpPr>
-          <p:cNvPr id="411" name="Google Shape;411;g33ce395d76b_0_19"/>
+          <p:cNvPr id="410" name="Google Shape;410;g33ce395d76b_0_19"/>
           <p:cNvSpPr txBox="1"/>
           <p:nvPr>
             <p:ph idx="1" type="body"/>
@@ -31396,7 +31553,7 @@
   <p:cSld>
     <p:spTree>
       <p:nvGrpSpPr>
-        <p:cNvPr id="415" name="Shape 415"/>
+        <p:cNvPr id="414" name="Shape 414"/>
         <p:cNvGrpSpPr/>
         <p:nvPr/>
       </p:nvGrpSpPr>
@@ -31410,7 +31567,7 @@
       </p:grpSpPr>
       <p:sp>
         <p:nvSpPr>
-          <p:cNvPr id="416" name="Google Shape;416;p21"/>
+          <p:cNvPr id="415" name="Google Shape;415;p21"/>
           <p:cNvSpPr txBox="1"/>
           <p:nvPr>
             <p:ph type="title"/>
@@ -31462,7 +31619,7 @@
       </p:sp>
       <p:pic>
         <p:nvPicPr>
-          <p:cNvPr id="417" name="Google Shape;417;p21"/>
+          <p:cNvPr id="416" name="Google Shape;416;p21"/>
           <p:cNvPicPr preferRelativeResize="0"/>
           <p:nvPr>
             <p:ph idx="1" type="body"/>
@@ -31491,7 +31648,7 @@
       </p:pic>
       <p:sp>
         <p:nvSpPr>
-          <p:cNvPr id="418" name="Google Shape;418;p21"/>
+          <p:cNvPr id="417" name="Google Shape;417;p21"/>
           <p:cNvSpPr/>
           <p:nvPr/>
         </p:nvSpPr>
@@ -31557,7 +31714,7 @@
       </p:sp>
       <p:sp>
         <p:nvSpPr>
-          <p:cNvPr id="419" name="Google Shape;419;p21"/>
+          <p:cNvPr id="418" name="Google Shape;418;p21"/>
           <p:cNvSpPr/>
           <p:nvPr/>
         </p:nvSpPr>
@@ -31623,7 +31780,7 @@
       </p:sp>
       <p:sp>
         <p:nvSpPr>
-          <p:cNvPr id="420" name="Google Shape;420;p21"/>
+          <p:cNvPr id="419" name="Google Shape;419;p21"/>
           <p:cNvSpPr/>
           <p:nvPr/>
         </p:nvSpPr>
@@ -31689,7 +31846,7 @@
       </p:sp>
       <p:sp>
         <p:nvSpPr>
-          <p:cNvPr id="421" name="Google Shape;421;p21"/>
+          <p:cNvPr id="420" name="Google Shape;420;p21"/>
           <p:cNvSpPr/>
           <p:nvPr/>
         </p:nvSpPr>
@@ -31755,7 +31912,7 @@
       </p:sp>
       <p:sp>
         <p:nvSpPr>
-          <p:cNvPr id="422" name="Google Shape;422;p21"/>
+          <p:cNvPr id="421" name="Google Shape;421;p21"/>
           <p:cNvSpPr txBox="1"/>
           <p:nvPr/>
         </p:nvSpPr>
@@ -31813,7 +31970,7 @@
       </p:sp>
       <p:sp>
         <p:nvSpPr>
-          <p:cNvPr id="423" name="Google Shape;423;p21"/>
+          <p:cNvPr id="422" name="Google Shape;422;p21"/>
           <p:cNvSpPr txBox="1"/>
           <p:nvPr/>
         </p:nvSpPr>
@@ -31871,10 +32028,10 @@
       </p:sp>
       <p:cxnSp>
         <p:nvCxnSpPr>
-          <p:cNvPr id="424" name="Google Shape;424;p21"/>
+          <p:cNvPr id="423" name="Google Shape;423;p21"/>
           <p:cNvCxnSpPr>
-            <a:stCxn id="422" idx="3"/>
-            <a:endCxn id="418" idx="1"/>
+            <a:stCxn id="421" idx="3"/>
+            <a:endCxn id="417" idx="1"/>
           </p:cNvCxnSpPr>
           <p:nvPr/>
         </p:nvCxnSpPr>
@@ -31882,6 +32039,35 @@
           <a:xfrm flipH="1" rot="10800000">
             <a:off x="3330429" y="1774170"/>
             <a:ext cx="1753200" cy="1011300"/>
+          </a:xfrm>
+          <a:prstGeom prst="straightConnector1">
+            <a:avLst/>
+          </a:prstGeom>
+          <a:noFill/>
+          <a:ln cap="flat" cmpd="sng" w="25400">
+            <a:solidFill>
+              <a:srgbClr val="000000"/>
+            </a:solidFill>
+            <a:prstDash val="solid"/>
+            <a:miter lim="400000"/>
+            <a:headEnd len="sm" w="sm" type="none"/>
+            <a:tailEnd len="med" w="med" type="triangle"/>
+          </a:ln>
+        </p:spPr>
+      </p:cxnSp>
+      <p:cxnSp>
+        <p:nvCxnSpPr>
+          <p:cNvPr id="424" name="Google Shape;424;p21"/>
+          <p:cNvCxnSpPr>
+            <a:stCxn id="421" idx="3"/>
+            <a:endCxn id="418" idx="1"/>
+          </p:cNvCxnSpPr>
+          <p:nvPr/>
+        </p:nvCxnSpPr>
+        <p:spPr>
+          <a:xfrm>
+            <a:off x="3330429" y="2785470"/>
+            <a:ext cx="1790400" cy="1145700"/>
           </a:xfrm>
           <a:prstGeom prst="straightConnector1">
             <a:avLst/>
@@ -31902,7 +32088,7 @@
         <p:nvCxnSpPr>
           <p:cNvPr id="425" name="Google Shape;425;p21"/>
           <p:cNvCxnSpPr>
-            <a:stCxn id="422" idx="3"/>
+            <a:stCxn id="421" idx="3"/>
             <a:endCxn id="419" idx="1"/>
           </p:cNvCxnSpPr>
           <p:nvPr/>
@@ -31910,7 +32096,7 @@
         <p:spPr>
           <a:xfrm>
             <a:off x="3330429" y="2785470"/>
-            <a:ext cx="1790400" cy="1145700"/>
+            <a:ext cx="1790400" cy="2298900"/>
           </a:xfrm>
           <a:prstGeom prst="straightConnector1">
             <a:avLst/>
@@ -31931,7 +32117,7 @@
         <p:nvCxnSpPr>
           <p:cNvPr id="426" name="Google Shape;426;p21"/>
           <p:cNvCxnSpPr>
-            <a:stCxn id="422" idx="3"/>
+            <a:stCxn id="421" idx="3"/>
             <a:endCxn id="420" idx="1"/>
           </p:cNvCxnSpPr>
           <p:nvPr/>
@@ -31939,7 +32125,7 @@
         <p:spPr>
           <a:xfrm>
             <a:off x="3330429" y="2785470"/>
-            <a:ext cx="1790400" cy="2298900"/>
+            <a:ext cx="1754700" cy="3330900"/>
           </a:xfrm>
           <a:prstGeom prst="straightConnector1">
             <a:avLst/>
@@ -31961,25 +32147,24 @@
           <p:cNvPr id="427" name="Google Shape;427;p21"/>
           <p:cNvCxnSpPr>
             <a:stCxn id="422" idx="3"/>
-            <a:endCxn id="421" idx="1"/>
           </p:cNvCxnSpPr>
           <p:nvPr/>
         </p:nvCxnSpPr>
         <p:spPr>
-          <a:xfrm>
-            <a:off x="3330429" y="2785470"/>
-            <a:ext cx="1754700" cy="3330900"/>
+          <a:xfrm flipH="1" rot="10800000">
+            <a:off x="3115111" y="3028478"/>
+            <a:ext cx="3218700" cy="987000"/>
           </a:xfrm>
           <a:prstGeom prst="straightConnector1">
             <a:avLst/>
           </a:prstGeom>
           <a:noFill/>
-          <a:ln cap="flat" cmpd="sng" w="25400">
+          <a:ln cap="flat" cmpd="sng" w="38100">
             <a:solidFill>
-              <a:srgbClr val="000000"/>
+              <a:srgbClr val="00C5FD"/>
             </a:solidFill>
             <a:prstDash val="solid"/>
-            <a:miter lim="400000"/>
+            <a:round/>
             <a:headEnd len="sm" w="sm" type="none"/>
             <a:tailEnd len="med" w="med" type="triangle"/>
           </a:ln>
@@ -31989,14 +32174,14 @@
         <p:nvCxnSpPr>
           <p:cNvPr id="428" name="Google Shape;428;p21"/>
           <p:cNvCxnSpPr>
-            <a:stCxn id="423" idx="3"/>
+            <a:stCxn id="422" idx="3"/>
           </p:cNvCxnSpPr>
           <p:nvPr/>
         </p:nvCxnSpPr>
         <p:spPr>
-          <a:xfrm flipH="1" rot="10800000">
-            <a:off x="3115111" y="3028478"/>
-            <a:ext cx="3218700" cy="987000"/>
+          <a:xfrm>
+            <a:off x="3115111" y="4015478"/>
+            <a:ext cx="3218700" cy="184800"/>
           </a:xfrm>
           <a:prstGeom prst="straightConnector1">
             <a:avLst/>
@@ -32017,14 +32202,14 @@
         <p:nvCxnSpPr>
           <p:cNvPr id="429" name="Google Shape;429;p21"/>
           <p:cNvCxnSpPr>
-            <a:stCxn id="423" idx="3"/>
+            <a:stCxn id="422" idx="3"/>
           </p:cNvCxnSpPr>
           <p:nvPr/>
         </p:nvCxnSpPr>
         <p:spPr>
           <a:xfrm>
             <a:off x="3115111" y="4015478"/>
-            <a:ext cx="3218700" cy="184800"/>
+            <a:ext cx="3151500" cy="1372800"/>
           </a:xfrm>
           <a:prstGeom prst="straightConnector1">
             <a:avLst/>
@@ -32045,35 +32230,7 @@
         <p:nvCxnSpPr>
           <p:cNvPr id="430" name="Google Shape;430;p21"/>
           <p:cNvCxnSpPr>
-            <a:stCxn id="423" idx="3"/>
-          </p:cNvCxnSpPr>
-          <p:nvPr/>
-        </p:nvCxnSpPr>
-        <p:spPr>
-          <a:xfrm>
-            <a:off x="3115111" y="4015478"/>
-            <a:ext cx="3151500" cy="1372800"/>
-          </a:xfrm>
-          <a:prstGeom prst="straightConnector1">
-            <a:avLst/>
-          </a:prstGeom>
-          <a:noFill/>
-          <a:ln cap="flat" cmpd="sng" w="38100">
-            <a:solidFill>
-              <a:srgbClr val="00C5FD"/>
-            </a:solidFill>
-            <a:prstDash val="solid"/>
-            <a:round/>
-            <a:headEnd len="sm" w="sm" type="none"/>
-            <a:tailEnd len="med" w="med" type="triangle"/>
-          </a:ln>
-        </p:spPr>
-      </p:cxnSp>
-      <p:cxnSp>
-        <p:nvCxnSpPr>
-          <p:cNvPr id="431" name="Google Shape;431;p21"/>
-          <p:cNvCxnSpPr>
-            <a:stCxn id="423" idx="3"/>
+            <a:stCxn id="422" idx="3"/>
           </p:cNvCxnSpPr>
           <p:nvPr/>
         </p:nvCxnSpPr>
@@ -32122,7 +32279,7 @@
   <p:cSld>
     <p:spTree>
       <p:nvGrpSpPr>
-        <p:cNvPr id="435" name="Shape 435"/>
+        <p:cNvPr id="434" name="Shape 434"/>
         <p:cNvGrpSpPr/>
         <p:nvPr/>
       </p:nvGrpSpPr>
@@ -32136,7 +32293,7 @@
       </p:grpSpPr>
       <p:sp>
         <p:nvSpPr>
-          <p:cNvPr id="436" name="Google Shape;436;p22"/>
+          <p:cNvPr id="435" name="Google Shape;435;p22"/>
           <p:cNvSpPr txBox="1"/>
           <p:nvPr>
             <p:ph type="title"/>
@@ -32188,7 +32345,7 @@
       </p:sp>
       <p:pic>
         <p:nvPicPr>
-          <p:cNvPr id="437" name="Google Shape;437;p22"/>
+          <p:cNvPr id="436" name="Google Shape;436;p22"/>
           <p:cNvPicPr preferRelativeResize="0"/>
           <p:nvPr>
             <p:ph idx="1" type="body"/>
@@ -32217,7 +32374,7 @@
       </p:pic>
       <p:pic>
         <p:nvPicPr>
-          <p:cNvPr id="438" name="Google Shape;438;p22"/>
+          <p:cNvPr id="437" name="Google Shape;437;p22"/>
           <p:cNvPicPr preferRelativeResize="0"/>
           <p:nvPr/>
         </p:nvPicPr>
@@ -32267,7 +32424,7 @@
   <p:cSld>
     <p:spTree>
       <p:nvGrpSpPr>
-        <p:cNvPr id="442" name="Shape 442"/>
+        <p:cNvPr id="441" name="Shape 441"/>
         <p:cNvGrpSpPr/>
         <p:nvPr/>
       </p:nvGrpSpPr>
@@ -32281,7 +32438,7 @@
       </p:grpSpPr>
       <p:sp>
         <p:nvSpPr>
-          <p:cNvPr id="443" name="Google Shape;443;p23"/>
+          <p:cNvPr id="442" name="Google Shape;442;p23"/>
           <p:cNvSpPr txBox="1"/>
           <p:nvPr>
             <p:ph type="title"/>
@@ -32333,7 +32490,7 @@
       </p:sp>
       <p:pic>
         <p:nvPicPr>
-          <p:cNvPr id="444" name="Google Shape;444;p23"/>
+          <p:cNvPr id="443" name="Google Shape;443;p23"/>
           <p:cNvPicPr preferRelativeResize="0"/>
           <p:nvPr>
             <p:ph idx="1" type="body"/>
@@ -32362,7 +32519,7 @@
       </p:pic>
       <p:pic>
         <p:nvPicPr>
-          <p:cNvPr id="445" name="Google Shape;445;p23"/>
+          <p:cNvPr id="444" name="Google Shape;444;p23"/>
           <p:cNvPicPr preferRelativeResize="0"/>
           <p:nvPr/>
         </p:nvPicPr>
@@ -32389,7 +32546,7 @@
       </p:pic>
       <p:pic>
         <p:nvPicPr>
-          <p:cNvPr id="446" name="Google Shape;446;p23"/>
+          <p:cNvPr id="445" name="Google Shape;445;p23"/>
           <p:cNvPicPr preferRelativeResize="0"/>
           <p:nvPr>
             <p:ph idx="1" type="body"/>
@@ -32418,13 +32575,39 @@
       </p:pic>
       <p:cxnSp>
         <p:nvCxnSpPr>
+          <p:cNvPr id="446" name="Google Shape;446;p23"/>
+          <p:cNvCxnSpPr/>
+          <p:nvPr/>
+        </p:nvCxnSpPr>
+        <p:spPr>
+          <a:xfrm>
+            <a:off x="9182900" y="1099225"/>
+            <a:ext cx="194700" cy="0"/>
+          </a:xfrm>
+          <a:prstGeom prst="straightConnector1">
+            <a:avLst/>
+          </a:prstGeom>
+          <a:noFill/>
+          <a:ln cap="flat" cmpd="sng" w="9525">
+            <a:solidFill>
+              <a:srgbClr val="FF0000"/>
+            </a:solidFill>
+            <a:prstDash val="solid"/>
+            <a:round/>
+            <a:headEnd len="med" w="med" type="none"/>
+            <a:tailEnd len="med" w="med" type="triangle"/>
+          </a:ln>
+        </p:spPr>
+      </p:cxnSp>
+      <p:cxnSp>
+        <p:nvCxnSpPr>
           <p:cNvPr id="447" name="Google Shape;447;p23"/>
           <p:cNvCxnSpPr/>
           <p:nvPr/>
         </p:nvCxnSpPr>
         <p:spPr>
           <a:xfrm>
-            <a:off x="9182900" y="1099225"/>
+            <a:off x="9182900" y="2545400"/>
             <a:ext cx="194700" cy="0"/>
           </a:xfrm>
           <a:prstGeom prst="straightConnector1">
@@ -32450,7 +32633,7 @@
         </p:nvCxnSpPr>
         <p:spPr>
           <a:xfrm>
-            <a:off x="9182900" y="2545400"/>
+            <a:off x="9182900" y="3339825"/>
             <a:ext cx="194700" cy="0"/>
           </a:xfrm>
           <a:prstGeom prst="straightConnector1">
@@ -32476,7 +32659,7 @@
         </p:nvCxnSpPr>
         <p:spPr>
           <a:xfrm>
-            <a:off x="9182900" y="3339825"/>
+            <a:off x="9182900" y="4786000"/>
             <a:ext cx="194700" cy="0"/>
           </a:xfrm>
           <a:prstGeom prst="straightConnector1">
@@ -32497,32 +32680,6 @@
       <p:cxnSp>
         <p:nvCxnSpPr>
           <p:cNvPr id="450" name="Google Shape;450;p23"/>
-          <p:cNvCxnSpPr/>
-          <p:nvPr/>
-        </p:nvCxnSpPr>
-        <p:spPr>
-          <a:xfrm>
-            <a:off x="9182900" y="4786000"/>
-            <a:ext cx="194700" cy="0"/>
-          </a:xfrm>
-          <a:prstGeom prst="straightConnector1">
-            <a:avLst/>
-          </a:prstGeom>
-          <a:noFill/>
-          <a:ln cap="flat" cmpd="sng" w="9525">
-            <a:solidFill>
-              <a:srgbClr val="FF0000"/>
-            </a:solidFill>
-            <a:prstDash val="solid"/>
-            <a:round/>
-            <a:headEnd len="med" w="med" type="none"/>
-            <a:tailEnd len="med" w="med" type="triangle"/>
-          </a:ln>
-        </p:spPr>
-      </p:cxnSp>
-      <p:cxnSp>
-        <p:nvCxnSpPr>
-          <p:cNvPr id="451" name="Google Shape;451;p23"/>
           <p:cNvCxnSpPr/>
           <p:nvPr/>
         </p:nvCxnSpPr>
@@ -32571,7 +32728,7 @@
   <p:cSld>
     <p:spTree>
       <p:nvGrpSpPr>
-        <p:cNvPr id="455" name="Shape 455"/>
+        <p:cNvPr id="454" name="Shape 454"/>
         <p:cNvGrpSpPr/>
         <p:nvPr/>
       </p:nvGrpSpPr>
@@ -32585,7 +32742,7 @@
       </p:grpSpPr>
       <p:sp>
         <p:nvSpPr>
-          <p:cNvPr id="456" name="Google Shape;456;p24"/>
+          <p:cNvPr id="455" name="Google Shape;455;p24"/>
           <p:cNvSpPr txBox="1"/>
           <p:nvPr>
             <p:ph type="title"/>
@@ -32637,7 +32794,7 @@
       </p:sp>
       <p:pic>
         <p:nvPicPr>
-          <p:cNvPr id="457" name="Google Shape;457;p24"/>
+          <p:cNvPr id="456" name="Google Shape;456;p24"/>
           <p:cNvPicPr preferRelativeResize="0"/>
           <p:nvPr>
             <p:ph idx="1" type="body"/>
@@ -32666,7 +32823,7 @@
       </p:pic>
       <p:grpSp>
         <p:nvGrpSpPr>
-          <p:cNvPr id="458" name="Google Shape;458;p24"/>
+          <p:cNvPr id="457" name="Google Shape;457;p24"/>
           <p:cNvGrpSpPr/>
           <p:nvPr/>
         </p:nvGrpSpPr>
@@ -32680,7 +32837,7 @@
         </p:grpSpPr>
         <p:sp>
           <p:nvSpPr>
-            <p:cNvPr id="459" name="Google Shape;459;p24"/>
+            <p:cNvPr id="458" name="Google Shape;458;p24"/>
             <p:cNvSpPr/>
             <p:nvPr/>
           </p:nvSpPr>
@@ -32733,7 +32890,7 @@
         </p:sp>
         <p:pic>
           <p:nvPicPr>
-            <p:cNvPr id="460" name="Google Shape;460;p24"/>
+            <p:cNvPr id="459" name="Google Shape;459;p24"/>
             <p:cNvPicPr preferRelativeResize="0"/>
             <p:nvPr/>
           </p:nvPicPr>
@@ -32761,7 +32918,7 @@
         </p:pic>
         <p:sp>
           <p:nvSpPr>
-            <p:cNvPr id="461" name="Google Shape;461;p24"/>
+            <p:cNvPr id="460" name="Google Shape;460;p24"/>
             <p:cNvSpPr/>
             <p:nvPr/>
           </p:nvSpPr>
@@ -33038,7 +33195,7 @@
   <p:cSld>
     <p:spTree>
       <p:nvGrpSpPr>
-        <p:cNvPr id="465" name="Shape 465"/>
+        <p:cNvPr id="464" name="Shape 464"/>
         <p:cNvGrpSpPr/>
         <p:nvPr/>
       </p:nvGrpSpPr>
@@ -33052,7 +33209,7 @@
       </p:grpSpPr>
       <p:sp>
         <p:nvSpPr>
-          <p:cNvPr id="466" name="Google Shape;466;p25"/>
+          <p:cNvPr id="465" name="Google Shape;465;p25"/>
           <p:cNvSpPr txBox="1"/>
           <p:nvPr>
             <p:ph type="title"/>
@@ -33104,7 +33261,7 @@
       </p:sp>
       <p:pic>
         <p:nvPicPr>
-          <p:cNvPr id="467" name="Google Shape;467;p25"/>
+          <p:cNvPr id="466" name="Google Shape;466;p25"/>
           <p:cNvPicPr preferRelativeResize="0"/>
           <p:nvPr>
             <p:ph idx="1" type="body"/>
@@ -33133,7 +33290,7 @@
       </p:pic>
       <p:pic>
         <p:nvPicPr>
-          <p:cNvPr id="468" name="Google Shape;468;p25"/>
+          <p:cNvPr id="467" name="Google Shape;467;p25"/>
           <p:cNvPicPr preferRelativeResize="0"/>
           <p:nvPr/>
         </p:nvPicPr>
@@ -33160,7 +33317,7 @@
       </p:pic>
       <p:cxnSp>
         <p:nvCxnSpPr>
-          <p:cNvPr id="469" name="Google Shape;469;p25"/>
+          <p:cNvPr id="468" name="Google Shape;468;p25"/>
           <p:cNvCxnSpPr/>
           <p:nvPr/>
         </p:nvCxnSpPr>
@@ -33168,6 +33325,32 @@
           <a:xfrm flipH="1" rot="10800000">
             <a:off x="3674378" y="461394"/>
             <a:ext cx="1946246" cy="2189527"/>
+          </a:xfrm>
+          <a:prstGeom prst="straightConnector1">
+            <a:avLst/>
+          </a:prstGeom>
+          <a:noFill/>
+          <a:ln cap="flat" cmpd="sng" w="57150">
+            <a:solidFill>
+              <a:srgbClr val="FF0000"/>
+            </a:solidFill>
+            <a:prstDash val="solid"/>
+            <a:miter lim="400000"/>
+            <a:headEnd len="sm" w="sm" type="none"/>
+            <a:tailEnd len="med" w="med" type="triangle"/>
+          </a:ln>
+        </p:spPr>
+      </p:cxnSp>
+      <p:cxnSp>
+        <p:nvCxnSpPr>
+          <p:cNvPr id="469" name="Google Shape;469;p25"/>
+          <p:cNvCxnSpPr/>
+          <p:nvPr/>
+        </p:nvCxnSpPr>
+        <p:spPr>
+          <a:xfrm flipH="1" rot="10800000">
+            <a:off x="4490548" y="2876395"/>
+            <a:ext cx="1130076" cy="497553"/>
           </a:xfrm>
           <a:prstGeom prst="straightConnector1">
             <a:avLst/>
@@ -33191,9 +33374,9 @@
           <p:nvPr/>
         </p:nvCxnSpPr>
         <p:spPr>
-          <a:xfrm flipH="1" rot="10800000">
-            <a:off x="4490548" y="2876395"/>
-            <a:ext cx="1130076" cy="497553"/>
+          <a:xfrm>
+            <a:off x="4870392" y="4041604"/>
+            <a:ext cx="825733" cy="454693"/>
           </a:xfrm>
           <a:prstGeom prst="straightConnector1">
             <a:avLst/>
@@ -33218,32 +33401,6 @@
         </p:nvCxnSpPr>
         <p:spPr>
           <a:xfrm>
-            <a:off x="4870392" y="4041604"/>
-            <a:ext cx="825733" cy="454693"/>
-          </a:xfrm>
-          <a:prstGeom prst="straightConnector1">
-            <a:avLst/>
-          </a:prstGeom>
-          <a:noFill/>
-          <a:ln cap="flat" cmpd="sng" w="57150">
-            <a:solidFill>
-              <a:srgbClr val="FF0000"/>
-            </a:solidFill>
-            <a:prstDash val="solid"/>
-            <a:miter lim="400000"/>
-            <a:headEnd len="sm" w="sm" type="none"/>
-            <a:tailEnd len="med" w="med" type="triangle"/>
-          </a:ln>
-        </p:spPr>
-      </p:cxnSp>
-      <p:cxnSp>
-        <p:nvCxnSpPr>
-          <p:cNvPr id="472" name="Google Shape;472;p25"/>
-          <p:cNvCxnSpPr/>
-          <p:nvPr/>
-        </p:nvCxnSpPr>
-        <p:spPr>
-          <a:xfrm>
             <a:off x="3818862" y="4734892"/>
             <a:ext cx="1801762" cy="890333"/>
           </a:xfrm>
@@ -33264,7 +33421,7 @@
       </p:cxnSp>
       <p:grpSp>
         <p:nvGrpSpPr>
-          <p:cNvPr id="473" name="Google Shape;473;p25"/>
+          <p:cNvPr id="472" name="Google Shape;472;p25"/>
           <p:cNvGrpSpPr/>
           <p:nvPr/>
         </p:nvGrpSpPr>
@@ -33278,7 +33435,7 @@
         </p:grpSpPr>
         <p:sp>
           <p:nvSpPr>
-            <p:cNvPr id="474" name="Google Shape;474;p25"/>
+            <p:cNvPr id="473" name="Google Shape;473;p25"/>
             <p:cNvSpPr/>
             <p:nvPr/>
           </p:nvSpPr>
@@ -33331,7 +33488,7 @@
         </p:sp>
         <p:pic>
           <p:nvPicPr>
-            <p:cNvPr id="475" name="Google Shape;475;p25"/>
+            <p:cNvPr id="474" name="Google Shape;474;p25"/>
             <p:cNvPicPr preferRelativeResize="0"/>
             <p:nvPr/>
           </p:nvPicPr>
@@ -33359,7 +33516,7 @@
         </p:pic>
         <p:sp>
           <p:nvSpPr>
-            <p:cNvPr id="476" name="Google Shape;476;p25"/>
+            <p:cNvPr id="475" name="Google Shape;475;p25"/>
             <p:cNvSpPr/>
             <p:nvPr/>
           </p:nvSpPr>
@@ -33450,7 +33607,7 @@
   <p:cSld>
     <p:spTree>
       <p:nvGrpSpPr>
-        <p:cNvPr id="480" name="Shape 480"/>
+        <p:cNvPr id="479" name="Shape 479"/>
         <p:cNvGrpSpPr/>
         <p:nvPr/>
       </p:nvGrpSpPr>
@@ -33464,7 +33621,7 @@
       </p:grpSpPr>
       <p:sp>
         <p:nvSpPr>
-          <p:cNvPr id="481" name="Google Shape;481;p26"/>
+          <p:cNvPr id="480" name="Google Shape;480;p26"/>
           <p:cNvSpPr txBox="1"/>
           <p:nvPr>
             <p:ph type="title"/>
@@ -33515,7 +33672,7 @@
       </p:sp>
       <p:sp>
         <p:nvSpPr>
-          <p:cNvPr id="482" name="Google Shape;482;p26"/>
+          <p:cNvPr id="481" name="Google Shape;481;p26"/>
           <p:cNvSpPr txBox="1"/>
           <p:nvPr>
             <p:ph idx="1" type="body"/>
@@ -33565,7 +33722,7 @@
       </p:sp>
       <p:pic>
         <p:nvPicPr>
-          <p:cNvPr id="483" name="Google Shape;483;p26"/>
+          <p:cNvPr id="482" name="Google Shape;482;p26"/>
           <p:cNvPicPr preferRelativeResize="0"/>
           <p:nvPr/>
         </p:nvPicPr>
@@ -33592,7 +33749,7 @@
       </p:pic>
       <p:sp>
         <p:nvSpPr>
-          <p:cNvPr id="484" name="Google Shape;484;p26"/>
+          <p:cNvPr id="483" name="Google Shape;483;p26"/>
           <p:cNvSpPr/>
           <p:nvPr/>
         </p:nvSpPr>
@@ -33650,9 +33807,9 @@
       </p:sp>
       <p:cxnSp>
         <p:nvCxnSpPr>
-          <p:cNvPr id="485" name="Google Shape;485;p26"/>
+          <p:cNvPr id="484" name="Google Shape;484;p26"/>
           <p:cNvCxnSpPr>
-            <a:stCxn id="484" idx="0"/>
+            <a:stCxn id="483" idx="0"/>
           </p:cNvCxnSpPr>
           <p:nvPr/>
         </p:nvCxnSpPr>
@@ -33701,7 +33858,7 @@
   <p:cSld>
     <p:spTree>
       <p:nvGrpSpPr>
-        <p:cNvPr id="489" name="Shape 489"/>
+        <p:cNvPr id="488" name="Shape 488"/>
         <p:cNvGrpSpPr/>
         <p:nvPr/>
       </p:nvGrpSpPr>
@@ -33715,7 +33872,7 @@
       </p:grpSpPr>
       <p:sp>
         <p:nvSpPr>
-          <p:cNvPr id="490" name="Google Shape;490;g2bee99cf594_0_1"/>
+          <p:cNvPr id="489" name="Google Shape;489;g3f347eb07e7_0_0"/>
           <p:cNvSpPr txBox="1"/>
           <p:nvPr>
             <p:ph type="title"/>
@@ -33747,7 +33904,7 @@
             </a:pPr>
             <a:r>
               <a:rPr lang="en-US"/>
-              <a:t>LLVM IR bitcode</a:t>
+              <a:t>LLVM IR Target Information: triple</a:t>
             </a:r>
             <a:endParaRPr/>
           </a:p>
@@ -33755,7 +33912,7 @@
       </p:sp>
       <p:sp>
         <p:nvSpPr>
-          <p:cNvPr id="491" name="Google Shape;491;g2bee99cf594_0_1"/>
+          <p:cNvPr id="490" name="Google Shape;490;g3f347eb07e7_0_0"/>
           <p:cNvSpPr txBox="1"/>
           <p:nvPr>
             <p:ph idx="1" type="body"/>
@@ -33763,8 +33920,8 @@
         </p:nvSpPr>
         <p:spPr>
           <a:xfrm>
-            <a:off x="571375" y="1673450"/>
-            <a:ext cx="11010900" cy="5184600"/>
+            <a:off x="482595" y="1278904"/>
+            <a:ext cx="11010900" cy="4575000"/>
           </a:xfrm>
           <a:prstGeom prst="rect">
             <a:avLst/>
@@ -33787,23 +33944,7 @@
             </a:pPr>
             <a:r>
               <a:rPr lang="en-US"/>
-              <a:t>Binary Representation of LLVM IR</a:t>
-            </a:r>
-            <a:endParaRPr/>
-          </a:p>
-          <a:p>
-            <a:pPr indent="0" lvl="0" marL="0" rtl="0" algn="l">
-              <a:spcBef>
-                <a:spcPts val="1200"/>
-              </a:spcBef>
-              <a:spcAft>
-                <a:spcPts val="0"/>
-              </a:spcAft>
-              <a:buNone/>
-            </a:pPr>
-            <a:r>
-              <a:rPr lang="en-US"/>
-              <a:t>Use Cases:</a:t>
+              <a:t>Target triple:</a:t>
             </a:r>
             <a:endParaRPr/>
           </a:p>
@@ -33820,46 +33961,1460 @@
             </a:pPr>
             <a:r>
               <a:rPr lang="en-US"/>
-              <a:t>distribution (for usage or inspection by other LLVM based tools).</a:t>
+              <a:t>Describes the target:</a:t>
             </a:r>
             <a:endParaRPr/>
           </a:p>
           <a:p>
-            <a:pPr indent="-342900" lvl="0" marL="457200" rtl="0" algn="l">
-              <a:spcBef>
-                <a:spcPts val="0"/>
-              </a:spcBef>
-              <a:spcAft>
-                <a:spcPts val="0"/>
-              </a:spcAft>
-              <a:buSzPts val="1800"/>
-              <a:buChar char="▪"/>
+            <a:pPr indent="-342900" lvl="1" marL="914400" rtl="0" algn="l">
+              <a:lnSpc>
+                <a:spcPct val="115000"/>
+              </a:lnSpc>
+              <a:spcBef>
+                <a:spcPts val="0"/>
+              </a:spcBef>
+              <a:spcAft>
+                <a:spcPts val="0"/>
+              </a:spcAft>
+              <a:buSzPts val="1800"/>
+              <a:buChar char="•"/>
             </a:pPr>
             <a:r>
               <a:rPr lang="en-US"/>
-              <a:t>intermediate step in a build process that involves further optimization or cross-compilation.</a:t>
+              <a:t>architecture-vendor-operating_system-environment</a:t>
             </a:r>
             <a:endParaRPr/>
           </a:p>
           <a:p>
-            <a:pPr indent="-342900" lvl="0" marL="457200" rtl="0" algn="l">
-              <a:spcBef>
-                <a:spcPts val="0"/>
-              </a:spcBef>
-              <a:spcAft>
-                <a:spcPts val="0"/>
-              </a:spcAft>
-              <a:buSzPts val="1800"/>
-              <a:buChar char="▪"/>
+            <a:pPr indent="-342900" lvl="1" marL="914400" rtl="0" algn="l">
+              <a:spcBef>
+                <a:spcPts val="0"/>
+              </a:spcBef>
+              <a:spcAft>
+                <a:spcPts val="0"/>
+              </a:spcAft>
+              <a:buSzPts val="1800"/>
+              <a:buChar char="•"/>
             </a:pPr>
             <a:r>
               <a:rPr lang="en-US"/>
-              <a:t>Just-In-Time (JIT) compilation scenarios.</a:t>
+              <a:t>Example:</a:t>
+            </a:r>
+            <a:endParaRPr/>
+          </a:p>
+          <a:p>
+            <a:pPr indent="-342900" lvl="2" marL="1371600" rtl="0" algn="l">
+              <a:spcBef>
+                <a:spcPts val="0"/>
+              </a:spcBef>
+              <a:spcAft>
+                <a:spcPts val="0"/>
+              </a:spcAft>
+              <a:buSzPts val="1800"/>
+              <a:buChar char="•"/>
+            </a:pPr>
+            <a:r>
+              <a:rPr lang="en-US"/>
+              <a:t>x86_64-unknown-linux-gnu</a:t>
+            </a:r>
+            <a:endParaRPr/>
+          </a:p>
+          <a:p>
+            <a:pPr indent="-342900" lvl="2" marL="1371600" rtl="0" algn="l">
+              <a:spcBef>
+                <a:spcPts val="0"/>
+              </a:spcBef>
+              <a:spcAft>
+                <a:spcPts val="0"/>
+              </a:spcAft>
+              <a:buSzPts val="1800"/>
+              <a:buChar char="•"/>
+            </a:pPr>
+            <a:r>
+              <a:rPr lang="en-US"/>
+              <a:t>aarch64-apple-darwin</a:t>
+            </a:r>
+            <a:endParaRPr/>
+          </a:p>
+          <a:p>
+            <a:pPr indent="-342900" lvl="2" marL="1371600" rtl="0" algn="l">
+              <a:spcBef>
+                <a:spcPts val="0"/>
+              </a:spcBef>
+              <a:spcAft>
+                <a:spcPts val="0"/>
+              </a:spcAft>
+              <a:buSzPts val="1800"/>
+              <a:buChar char="•"/>
+            </a:pPr>
+            <a:r>
+              <a:rPr lang="en-US"/>
+              <a:t>riscv64-unknown-linux-gnu</a:t>
             </a:r>
             <a:endParaRPr/>
           </a:p>
         </p:txBody>
       </p:sp>
+      <p:pic>
+        <p:nvPicPr>
+          <p:cNvPr id="491" name="Google Shape;491;g3f347eb07e7_0_0"/>
+          <p:cNvPicPr preferRelativeResize="0"/>
+          <p:nvPr/>
+        </p:nvPicPr>
+        <p:blipFill rotWithShape="1">
+          <a:blip r:embed="rId3">
+            <a:alphaModFix/>
+          </a:blip>
+          <a:srcRect b="11949" l="1816" r="0" t="0"/>
+          <a:stretch/>
+        </p:blipFill>
+        <p:spPr>
+          <a:xfrm>
+            <a:off x="8169875" y="128250"/>
+            <a:ext cx="4022125" cy="2071450"/>
+          </a:xfrm>
+          <a:prstGeom prst="rect">
+            <a:avLst/>
+          </a:prstGeom>
+          <a:noFill/>
+          <a:ln>
+            <a:noFill/>
+          </a:ln>
+        </p:spPr>
+      </p:pic>
+      <p:sp>
+        <p:nvSpPr>
+          <p:cNvPr id="492" name="Google Shape;492;g3f347eb07e7_0_0"/>
+          <p:cNvSpPr txBox="1"/>
+          <p:nvPr/>
+        </p:nvSpPr>
+        <p:spPr>
+          <a:xfrm>
+            <a:off x="689725" y="4776225"/>
+            <a:ext cx="9363000" cy="2124000"/>
+          </a:xfrm>
+          <a:prstGeom prst="rect">
+            <a:avLst/>
+          </a:prstGeom>
+          <a:noFill/>
+          <a:ln>
+            <a:noFill/>
+          </a:ln>
+        </p:spPr>
+        <p:txBody>
+          <a:bodyPr anchorCtr="0" anchor="t" bIns="91425" lIns="91425" spcFirstLastPara="1" rIns="91425" wrap="square" tIns="91425">
+            <a:spAutoFit/>
+          </a:bodyPr>
+          <a:lstStyle/>
+          <a:p>
+            <a:pPr indent="0" lvl="0" marL="0" rtl="0" algn="l">
+              <a:lnSpc>
+                <a:spcPct val="100000"/>
+              </a:lnSpc>
+              <a:spcBef>
+                <a:spcPts val="0"/>
+              </a:spcBef>
+              <a:spcAft>
+                <a:spcPts val="0"/>
+              </a:spcAft>
+              <a:buNone/>
+            </a:pPr>
+            <a:r>
+              <a:rPr lang="en-US">
+                <a:solidFill>
+                  <a:schemeClr val="dk1"/>
+                </a:solidFill>
+                <a:latin typeface="Consolas"/>
+                <a:ea typeface="Consolas"/>
+                <a:cs typeface="Consolas"/>
+                <a:sym typeface="Consolas"/>
+              </a:rPr>
+              <a:t>source_filename = </a:t>
+            </a:r>
+            <a:r>
+              <a:rPr lang="en-US">
+                <a:solidFill>
+                  <a:srgbClr val="A31515"/>
+                </a:solidFill>
+                <a:latin typeface="Consolas"/>
+                <a:ea typeface="Consolas"/>
+                <a:cs typeface="Consolas"/>
+                <a:sym typeface="Consolas"/>
+              </a:rPr>
+              <a:t>"example.c"</a:t>
+            </a:r>
+            <a:endParaRPr>
+              <a:solidFill>
+                <a:srgbClr val="A31515"/>
+              </a:solidFill>
+              <a:latin typeface="Consolas"/>
+              <a:ea typeface="Consolas"/>
+              <a:cs typeface="Consolas"/>
+              <a:sym typeface="Consolas"/>
+            </a:endParaRPr>
+          </a:p>
+          <a:p>
+            <a:pPr indent="0" lvl="0" marL="0" rtl="0" algn="l">
+              <a:lnSpc>
+                <a:spcPct val="100000"/>
+              </a:lnSpc>
+              <a:spcBef>
+                <a:spcPts val="0"/>
+              </a:spcBef>
+              <a:spcAft>
+                <a:spcPts val="0"/>
+              </a:spcAft>
+              <a:buNone/>
+            </a:pPr>
+            <a:r>
+              <a:rPr lang="en-US">
+                <a:solidFill>
+                  <a:srgbClr val="0000FF"/>
+                </a:solidFill>
+                <a:latin typeface="Consolas"/>
+                <a:ea typeface="Consolas"/>
+                <a:cs typeface="Consolas"/>
+                <a:sym typeface="Consolas"/>
+              </a:rPr>
+              <a:t>target</a:t>
+            </a:r>
+            <a:r>
+              <a:rPr lang="en-US">
+                <a:solidFill>
+                  <a:schemeClr val="dk1"/>
+                </a:solidFill>
+                <a:latin typeface="Consolas"/>
+                <a:ea typeface="Consolas"/>
+                <a:cs typeface="Consolas"/>
+                <a:sym typeface="Consolas"/>
+              </a:rPr>
+              <a:t> </a:t>
+            </a:r>
+            <a:r>
+              <a:rPr lang="en-US">
+                <a:solidFill>
+                  <a:srgbClr val="0000FF"/>
+                </a:solidFill>
+                <a:latin typeface="Consolas"/>
+                <a:ea typeface="Consolas"/>
+                <a:cs typeface="Consolas"/>
+                <a:sym typeface="Consolas"/>
+              </a:rPr>
+              <a:t>triple</a:t>
+            </a:r>
+            <a:r>
+              <a:rPr lang="en-US">
+                <a:solidFill>
+                  <a:schemeClr val="dk1"/>
+                </a:solidFill>
+                <a:latin typeface="Consolas"/>
+                <a:ea typeface="Consolas"/>
+                <a:cs typeface="Consolas"/>
+                <a:sym typeface="Consolas"/>
+              </a:rPr>
+              <a:t> = </a:t>
+            </a:r>
+            <a:r>
+              <a:rPr lang="en-US">
+                <a:solidFill>
+                  <a:srgbClr val="A31515"/>
+                </a:solidFill>
+                <a:latin typeface="Consolas"/>
+                <a:ea typeface="Consolas"/>
+                <a:cs typeface="Consolas"/>
+                <a:sym typeface="Consolas"/>
+              </a:rPr>
+              <a:t>"x86_64-pc-linux-gnu"</a:t>
+            </a:r>
+            <a:endParaRPr>
+              <a:solidFill>
+                <a:srgbClr val="A31515"/>
+              </a:solidFill>
+              <a:latin typeface="Consolas"/>
+              <a:ea typeface="Consolas"/>
+              <a:cs typeface="Consolas"/>
+              <a:sym typeface="Consolas"/>
+            </a:endParaRPr>
+          </a:p>
+          <a:p>
+            <a:pPr indent="0" lvl="0" marL="0" rtl="0" algn="l">
+              <a:lnSpc>
+                <a:spcPct val="100000"/>
+              </a:lnSpc>
+              <a:spcBef>
+                <a:spcPts val="0"/>
+              </a:spcBef>
+              <a:spcAft>
+                <a:spcPts val="0"/>
+              </a:spcAft>
+              <a:buNone/>
+            </a:pPr>
+            <a:r>
+              <a:rPr lang="en-US">
+                <a:solidFill>
+                  <a:srgbClr val="0000FF"/>
+                </a:solidFill>
+                <a:latin typeface="Consolas"/>
+                <a:ea typeface="Consolas"/>
+                <a:cs typeface="Consolas"/>
+                <a:sym typeface="Consolas"/>
+              </a:rPr>
+              <a:t>target</a:t>
+            </a:r>
+            <a:r>
+              <a:rPr lang="en-US">
+                <a:solidFill>
+                  <a:schemeClr val="dk1"/>
+                </a:solidFill>
+                <a:latin typeface="Consolas"/>
+                <a:ea typeface="Consolas"/>
+                <a:cs typeface="Consolas"/>
+                <a:sym typeface="Consolas"/>
+              </a:rPr>
+              <a:t> </a:t>
+            </a:r>
+            <a:r>
+              <a:rPr lang="en-US">
+                <a:solidFill>
+                  <a:srgbClr val="0000FF"/>
+                </a:solidFill>
+                <a:latin typeface="Consolas"/>
+                <a:ea typeface="Consolas"/>
+                <a:cs typeface="Consolas"/>
+                <a:sym typeface="Consolas"/>
+              </a:rPr>
+              <a:t>datalayout</a:t>
+            </a:r>
+            <a:r>
+              <a:rPr lang="en-US">
+                <a:solidFill>
+                  <a:schemeClr val="dk1"/>
+                </a:solidFill>
+                <a:latin typeface="Consolas"/>
+                <a:ea typeface="Consolas"/>
+                <a:cs typeface="Consolas"/>
+                <a:sym typeface="Consolas"/>
+              </a:rPr>
+              <a:t> = </a:t>
+            </a:r>
+            <a:r>
+              <a:rPr lang="en-US">
+                <a:solidFill>
+                  <a:srgbClr val="A31515"/>
+                </a:solidFill>
+                <a:latin typeface="Consolas"/>
+                <a:ea typeface="Consolas"/>
+                <a:cs typeface="Consolas"/>
+                <a:sym typeface="Consolas"/>
+              </a:rPr>
+              <a:t>"e-m:e-p270:32:32-p271:32:32-p272:64:64-i64:64-f80:128-n8:16:32:64-S128"</a:t>
+            </a:r>
+            <a:endParaRPr>
+              <a:solidFill>
+                <a:srgbClr val="A31515"/>
+              </a:solidFill>
+              <a:latin typeface="Consolas"/>
+              <a:ea typeface="Consolas"/>
+              <a:cs typeface="Consolas"/>
+              <a:sym typeface="Consolas"/>
+            </a:endParaRPr>
+          </a:p>
+          <a:p>
+            <a:pPr indent="0" lvl="0" marL="0" rtl="0" algn="l">
+              <a:lnSpc>
+                <a:spcPct val="100000"/>
+              </a:lnSpc>
+              <a:spcBef>
+                <a:spcPts val="0"/>
+              </a:spcBef>
+              <a:spcAft>
+                <a:spcPts val="0"/>
+              </a:spcAft>
+              <a:buNone/>
+            </a:pPr>
+            <a:r>
+              <a:t/>
+            </a:r>
+            <a:endParaRPr>
+              <a:solidFill>
+                <a:schemeClr val="dk1"/>
+              </a:solidFill>
+              <a:latin typeface="Consolas"/>
+              <a:ea typeface="Consolas"/>
+              <a:cs typeface="Consolas"/>
+              <a:sym typeface="Consolas"/>
+            </a:endParaRPr>
+          </a:p>
+          <a:p>
+            <a:pPr indent="0" lvl="0" marL="0" rtl="0" algn="l">
+              <a:lnSpc>
+                <a:spcPct val="100000"/>
+              </a:lnSpc>
+              <a:spcBef>
+                <a:spcPts val="0"/>
+              </a:spcBef>
+              <a:spcAft>
+                <a:spcPts val="0"/>
+              </a:spcAft>
+              <a:buNone/>
+            </a:pPr>
+            <a:r>
+              <a:rPr lang="en-US">
+                <a:solidFill>
+                  <a:srgbClr val="0000FF"/>
+                </a:solidFill>
+                <a:latin typeface="Consolas"/>
+                <a:ea typeface="Consolas"/>
+                <a:cs typeface="Consolas"/>
+                <a:sym typeface="Consolas"/>
+              </a:rPr>
+              <a:t>define</a:t>
+            </a:r>
+            <a:r>
+              <a:rPr lang="en-US">
+                <a:solidFill>
+                  <a:schemeClr val="dk1"/>
+                </a:solidFill>
+                <a:latin typeface="Consolas"/>
+                <a:ea typeface="Consolas"/>
+                <a:cs typeface="Consolas"/>
+                <a:sym typeface="Consolas"/>
+              </a:rPr>
+              <a:t> </a:t>
+            </a:r>
+            <a:r>
+              <a:rPr lang="en-US">
+                <a:solidFill>
+                  <a:srgbClr val="0000FF"/>
+                </a:solidFill>
+                <a:latin typeface="Consolas"/>
+                <a:ea typeface="Consolas"/>
+                <a:cs typeface="Consolas"/>
+                <a:sym typeface="Consolas"/>
+              </a:rPr>
+              <a:t>i32</a:t>
+            </a:r>
+            <a:r>
+              <a:rPr lang="en-US">
+                <a:solidFill>
+                  <a:schemeClr val="dk1"/>
+                </a:solidFill>
+                <a:latin typeface="Consolas"/>
+                <a:ea typeface="Consolas"/>
+                <a:cs typeface="Consolas"/>
+                <a:sym typeface="Consolas"/>
+              </a:rPr>
+              <a:t> </a:t>
+            </a:r>
+            <a:r>
+              <a:rPr lang="en-US">
+                <a:solidFill>
+                  <a:srgbClr val="0000FF"/>
+                </a:solidFill>
+                <a:latin typeface="Consolas"/>
+                <a:ea typeface="Consolas"/>
+                <a:cs typeface="Consolas"/>
+                <a:sym typeface="Consolas"/>
+              </a:rPr>
+              <a:t>@add</a:t>
+            </a:r>
+            <a:r>
+              <a:rPr lang="en-US">
+                <a:solidFill>
+                  <a:schemeClr val="dk1"/>
+                </a:solidFill>
+                <a:latin typeface="Consolas"/>
+                <a:ea typeface="Consolas"/>
+                <a:cs typeface="Consolas"/>
+                <a:sym typeface="Consolas"/>
+              </a:rPr>
+              <a:t>(</a:t>
+            </a:r>
+            <a:r>
+              <a:rPr lang="en-US">
+                <a:solidFill>
+                  <a:srgbClr val="0000FF"/>
+                </a:solidFill>
+                <a:latin typeface="Consolas"/>
+                <a:ea typeface="Consolas"/>
+                <a:cs typeface="Consolas"/>
+                <a:sym typeface="Consolas"/>
+              </a:rPr>
+              <a:t>i32</a:t>
+            </a:r>
+            <a:r>
+              <a:rPr lang="en-US">
+                <a:solidFill>
+                  <a:schemeClr val="dk1"/>
+                </a:solidFill>
+                <a:latin typeface="Consolas"/>
+                <a:ea typeface="Consolas"/>
+                <a:cs typeface="Consolas"/>
+                <a:sym typeface="Consolas"/>
+              </a:rPr>
+              <a:t> </a:t>
+            </a:r>
+            <a:r>
+              <a:rPr lang="en-US">
+                <a:solidFill>
+                  <a:srgbClr val="0000FF"/>
+                </a:solidFill>
+                <a:latin typeface="Consolas"/>
+                <a:ea typeface="Consolas"/>
+                <a:cs typeface="Consolas"/>
+                <a:sym typeface="Consolas"/>
+              </a:rPr>
+              <a:t>%a</a:t>
+            </a:r>
+            <a:r>
+              <a:rPr lang="en-US">
+                <a:solidFill>
+                  <a:schemeClr val="dk1"/>
+                </a:solidFill>
+                <a:latin typeface="Consolas"/>
+                <a:ea typeface="Consolas"/>
+                <a:cs typeface="Consolas"/>
+                <a:sym typeface="Consolas"/>
+              </a:rPr>
+              <a:t>, </a:t>
+            </a:r>
+            <a:r>
+              <a:rPr lang="en-US">
+                <a:solidFill>
+                  <a:srgbClr val="0000FF"/>
+                </a:solidFill>
+                <a:latin typeface="Consolas"/>
+                <a:ea typeface="Consolas"/>
+                <a:cs typeface="Consolas"/>
+                <a:sym typeface="Consolas"/>
+              </a:rPr>
+              <a:t>i32</a:t>
+            </a:r>
+            <a:r>
+              <a:rPr lang="en-US">
+                <a:solidFill>
+                  <a:schemeClr val="dk1"/>
+                </a:solidFill>
+                <a:latin typeface="Consolas"/>
+                <a:ea typeface="Consolas"/>
+                <a:cs typeface="Consolas"/>
+                <a:sym typeface="Consolas"/>
+              </a:rPr>
+              <a:t> </a:t>
+            </a:r>
+            <a:r>
+              <a:rPr lang="en-US">
+                <a:solidFill>
+                  <a:srgbClr val="0000FF"/>
+                </a:solidFill>
+                <a:latin typeface="Consolas"/>
+                <a:ea typeface="Consolas"/>
+                <a:cs typeface="Consolas"/>
+                <a:sym typeface="Consolas"/>
+              </a:rPr>
+              <a:t>%b</a:t>
+            </a:r>
+            <a:r>
+              <a:rPr lang="en-US">
+                <a:solidFill>
+                  <a:schemeClr val="dk1"/>
+                </a:solidFill>
+                <a:latin typeface="Consolas"/>
+                <a:ea typeface="Consolas"/>
+                <a:cs typeface="Consolas"/>
+                <a:sym typeface="Consolas"/>
+              </a:rPr>
+              <a:t>) {</a:t>
+            </a:r>
+            <a:endParaRPr>
+              <a:solidFill>
+                <a:schemeClr val="dk1"/>
+              </a:solidFill>
+              <a:latin typeface="Consolas"/>
+              <a:ea typeface="Consolas"/>
+              <a:cs typeface="Consolas"/>
+              <a:sym typeface="Consolas"/>
+            </a:endParaRPr>
+          </a:p>
+          <a:p>
+            <a:pPr indent="0" lvl="0" marL="0" rtl="0" algn="l">
+              <a:lnSpc>
+                <a:spcPct val="100000"/>
+              </a:lnSpc>
+              <a:spcBef>
+                <a:spcPts val="0"/>
+              </a:spcBef>
+              <a:spcAft>
+                <a:spcPts val="0"/>
+              </a:spcAft>
+              <a:buNone/>
+            </a:pPr>
+            <a:r>
+              <a:rPr lang="en-US">
+                <a:solidFill>
+                  <a:schemeClr val="dk1"/>
+                </a:solidFill>
+                <a:latin typeface="Consolas"/>
+                <a:ea typeface="Consolas"/>
+                <a:cs typeface="Consolas"/>
+                <a:sym typeface="Consolas"/>
+              </a:rPr>
+              <a:t>entry:</a:t>
+            </a:r>
+            <a:endParaRPr>
+              <a:solidFill>
+                <a:schemeClr val="dk1"/>
+              </a:solidFill>
+              <a:latin typeface="Consolas"/>
+              <a:ea typeface="Consolas"/>
+              <a:cs typeface="Consolas"/>
+              <a:sym typeface="Consolas"/>
+            </a:endParaRPr>
+          </a:p>
+          <a:p>
+            <a:pPr indent="0" lvl="0" marL="0" rtl="0" algn="l">
+              <a:lnSpc>
+                <a:spcPct val="100000"/>
+              </a:lnSpc>
+              <a:spcBef>
+                <a:spcPts val="0"/>
+              </a:spcBef>
+              <a:spcAft>
+                <a:spcPts val="0"/>
+              </a:spcAft>
+              <a:buNone/>
+            </a:pPr>
+            <a:r>
+              <a:rPr lang="en-US">
+                <a:solidFill>
+                  <a:schemeClr val="dk1"/>
+                </a:solidFill>
+                <a:latin typeface="Consolas"/>
+                <a:ea typeface="Consolas"/>
+                <a:cs typeface="Consolas"/>
+                <a:sym typeface="Consolas"/>
+              </a:rPr>
+              <a:t> </a:t>
+            </a:r>
+            <a:r>
+              <a:rPr lang="en-US">
+                <a:solidFill>
+                  <a:srgbClr val="0000FF"/>
+                </a:solidFill>
+                <a:latin typeface="Consolas"/>
+                <a:ea typeface="Consolas"/>
+                <a:cs typeface="Consolas"/>
+                <a:sym typeface="Consolas"/>
+              </a:rPr>
+              <a:t>%sum</a:t>
+            </a:r>
+            <a:r>
+              <a:rPr lang="en-US">
+                <a:solidFill>
+                  <a:schemeClr val="dk1"/>
+                </a:solidFill>
+                <a:latin typeface="Consolas"/>
+                <a:ea typeface="Consolas"/>
+                <a:cs typeface="Consolas"/>
+                <a:sym typeface="Consolas"/>
+              </a:rPr>
+              <a:t> = </a:t>
+            </a:r>
+            <a:r>
+              <a:rPr lang="en-US">
+                <a:solidFill>
+                  <a:srgbClr val="0000FF"/>
+                </a:solidFill>
+                <a:latin typeface="Consolas"/>
+                <a:ea typeface="Consolas"/>
+                <a:cs typeface="Consolas"/>
+                <a:sym typeface="Consolas"/>
+              </a:rPr>
+              <a:t>add</a:t>
+            </a:r>
+            <a:r>
+              <a:rPr lang="en-US">
+                <a:solidFill>
+                  <a:schemeClr val="dk1"/>
+                </a:solidFill>
+                <a:latin typeface="Consolas"/>
+                <a:ea typeface="Consolas"/>
+                <a:cs typeface="Consolas"/>
+                <a:sym typeface="Consolas"/>
+              </a:rPr>
+              <a:t> </a:t>
+            </a:r>
+            <a:r>
+              <a:rPr lang="en-US">
+                <a:solidFill>
+                  <a:srgbClr val="0000FF"/>
+                </a:solidFill>
+                <a:latin typeface="Consolas"/>
+                <a:ea typeface="Consolas"/>
+                <a:cs typeface="Consolas"/>
+                <a:sym typeface="Consolas"/>
+              </a:rPr>
+              <a:t>i32</a:t>
+            </a:r>
+            <a:r>
+              <a:rPr lang="en-US">
+                <a:solidFill>
+                  <a:schemeClr val="dk1"/>
+                </a:solidFill>
+                <a:latin typeface="Consolas"/>
+                <a:ea typeface="Consolas"/>
+                <a:cs typeface="Consolas"/>
+                <a:sym typeface="Consolas"/>
+              </a:rPr>
+              <a:t> </a:t>
+            </a:r>
+            <a:r>
+              <a:rPr lang="en-US">
+                <a:solidFill>
+                  <a:srgbClr val="0000FF"/>
+                </a:solidFill>
+                <a:latin typeface="Consolas"/>
+                <a:ea typeface="Consolas"/>
+                <a:cs typeface="Consolas"/>
+                <a:sym typeface="Consolas"/>
+              </a:rPr>
+              <a:t>%a</a:t>
+            </a:r>
+            <a:r>
+              <a:rPr lang="en-US">
+                <a:solidFill>
+                  <a:schemeClr val="dk1"/>
+                </a:solidFill>
+                <a:latin typeface="Consolas"/>
+                <a:ea typeface="Consolas"/>
+                <a:cs typeface="Consolas"/>
+                <a:sym typeface="Consolas"/>
+              </a:rPr>
+              <a:t>, </a:t>
+            </a:r>
+            <a:r>
+              <a:rPr lang="en-US">
+                <a:solidFill>
+                  <a:srgbClr val="0000FF"/>
+                </a:solidFill>
+                <a:latin typeface="Consolas"/>
+                <a:ea typeface="Consolas"/>
+                <a:cs typeface="Consolas"/>
+                <a:sym typeface="Consolas"/>
+              </a:rPr>
+              <a:t>%b</a:t>
+            </a:r>
+            <a:endParaRPr>
+              <a:solidFill>
+                <a:srgbClr val="0000FF"/>
+              </a:solidFill>
+              <a:latin typeface="Consolas"/>
+              <a:ea typeface="Consolas"/>
+              <a:cs typeface="Consolas"/>
+              <a:sym typeface="Consolas"/>
+            </a:endParaRPr>
+          </a:p>
+          <a:p>
+            <a:pPr indent="0" lvl="0" marL="0" rtl="0" algn="l">
+              <a:lnSpc>
+                <a:spcPct val="100000"/>
+              </a:lnSpc>
+              <a:spcBef>
+                <a:spcPts val="0"/>
+              </a:spcBef>
+              <a:spcAft>
+                <a:spcPts val="0"/>
+              </a:spcAft>
+              <a:buNone/>
+            </a:pPr>
+            <a:r>
+              <a:rPr lang="en-US">
+                <a:solidFill>
+                  <a:schemeClr val="dk1"/>
+                </a:solidFill>
+                <a:latin typeface="Consolas"/>
+                <a:ea typeface="Consolas"/>
+                <a:cs typeface="Consolas"/>
+                <a:sym typeface="Consolas"/>
+              </a:rPr>
+              <a:t> </a:t>
+            </a:r>
+            <a:r>
+              <a:rPr lang="en-US">
+                <a:solidFill>
+                  <a:srgbClr val="0000FF"/>
+                </a:solidFill>
+                <a:latin typeface="Consolas"/>
+                <a:ea typeface="Consolas"/>
+                <a:cs typeface="Consolas"/>
+                <a:sym typeface="Consolas"/>
+              </a:rPr>
+              <a:t>ret</a:t>
+            </a:r>
+            <a:r>
+              <a:rPr lang="en-US">
+                <a:solidFill>
+                  <a:schemeClr val="dk1"/>
+                </a:solidFill>
+                <a:latin typeface="Consolas"/>
+                <a:ea typeface="Consolas"/>
+                <a:cs typeface="Consolas"/>
+                <a:sym typeface="Consolas"/>
+              </a:rPr>
+              <a:t> </a:t>
+            </a:r>
+            <a:r>
+              <a:rPr lang="en-US">
+                <a:solidFill>
+                  <a:srgbClr val="0000FF"/>
+                </a:solidFill>
+                <a:latin typeface="Consolas"/>
+                <a:ea typeface="Consolas"/>
+                <a:cs typeface="Consolas"/>
+                <a:sym typeface="Consolas"/>
+              </a:rPr>
+              <a:t>i32</a:t>
+            </a:r>
+            <a:r>
+              <a:rPr lang="en-US">
+                <a:solidFill>
+                  <a:schemeClr val="dk1"/>
+                </a:solidFill>
+                <a:latin typeface="Consolas"/>
+                <a:ea typeface="Consolas"/>
+                <a:cs typeface="Consolas"/>
+                <a:sym typeface="Consolas"/>
+              </a:rPr>
+              <a:t> </a:t>
+            </a:r>
+            <a:r>
+              <a:rPr lang="en-US">
+                <a:solidFill>
+                  <a:srgbClr val="0000FF"/>
+                </a:solidFill>
+                <a:latin typeface="Consolas"/>
+                <a:ea typeface="Consolas"/>
+                <a:cs typeface="Consolas"/>
+                <a:sym typeface="Consolas"/>
+              </a:rPr>
+              <a:t>%sum</a:t>
+            </a:r>
+            <a:endParaRPr>
+              <a:solidFill>
+                <a:srgbClr val="0000FF"/>
+              </a:solidFill>
+              <a:latin typeface="Consolas"/>
+              <a:ea typeface="Consolas"/>
+              <a:cs typeface="Consolas"/>
+              <a:sym typeface="Consolas"/>
+            </a:endParaRPr>
+          </a:p>
+          <a:p>
+            <a:pPr indent="0" lvl="0" marL="0" rtl="0" algn="l">
+              <a:lnSpc>
+                <a:spcPct val="100000"/>
+              </a:lnSpc>
+              <a:spcBef>
+                <a:spcPts val="0"/>
+              </a:spcBef>
+              <a:spcAft>
+                <a:spcPts val="0"/>
+              </a:spcAft>
+              <a:buNone/>
+            </a:pPr>
+            <a:r>
+              <a:rPr lang="en-US">
+                <a:solidFill>
+                  <a:schemeClr val="dk1"/>
+                </a:solidFill>
+                <a:latin typeface="Consolas"/>
+                <a:ea typeface="Consolas"/>
+                <a:cs typeface="Consolas"/>
+                <a:sym typeface="Consolas"/>
+              </a:rPr>
+              <a:t>}</a:t>
+            </a:r>
+            <a:endParaRPr>
+              <a:solidFill>
+                <a:schemeClr val="dk1"/>
+              </a:solidFill>
+              <a:latin typeface="Consolas"/>
+              <a:ea typeface="Consolas"/>
+              <a:cs typeface="Consolas"/>
+              <a:sym typeface="Consolas"/>
+            </a:endParaRPr>
+          </a:p>
+        </p:txBody>
+      </p:sp>
+      <p:graphicFrame>
+        <p:nvGraphicFramePr>
+          <p:cNvPr id="493" name="Google Shape;493;g3f347eb07e7_0_0"/>
+          <p:cNvGraphicFramePr/>
+          <p:nvPr/>
+        </p:nvGraphicFramePr>
+        <p:xfrm>
+          <a:off x="7255600" y="2785400"/>
+          <a:ext cx="3000000" cy="3000000"/>
+        </p:xfrm>
+        <a:graphic>
+          <a:graphicData uri="http://schemas.openxmlformats.org/drawingml/2006/table">
+            <a:tbl>
+              <a:tblPr>
+                <a:noFill/>
+                <a:tableStyleId>{36D9B874-D8F9-4614-A41A-4F30205731BB}</a:tableStyleId>
+              </a:tblPr>
+              <a:tblGrid>
+                <a:gridCol w="1794675"/>
+                <a:gridCol w="1794675"/>
+              </a:tblGrid>
+              <a:tr h="381000">
+                <a:tc>
+                  <a:txBody>
+                    <a:bodyPr/>
+                    <a:lstStyle/>
+                    <a:p>
+                      <a:pPr indent="0" lvl="0" marL="0" rtl="0" algn="ctr">
+                        <a:lnSpc>
+                          <a:spcPct val="115000"/>
+                        </a:lnSpc>
+                        <a:spcBef>
+                          <a:spcPts val="1200"/>
+                        </a:spcBef>
+                        <a:spcAft>
+                          <a:spcPts val="1200"/>
+                        </a:spcAft>
+                        <a:buNone/>
+                      </a:pPr>
+                      <a:r>
+                        <a:rPr lang="en-US">
+                          <a:solidFill>
+                            <a:srgbClr val="188038"/>
+                          </a:solidFill>
+                        </a:rPr>
+                        <a:t>x86_64</a:t>
+                      </a:r>
+                      <a:endParaRPr>
+                        <a:solidFill>
+                          <a:srgbClr val="188038"/>
+                        </a:solidFill>
+                      </a:endParaRPr>
+                    </a:p>
+                  </a:txBody>
+                  <a:tcPr marT="76200" marB="76200" marR="114300" marL="114300" anchor="ctr">
+                    <a:lnL cap="flat" cmpd="sng" w="9525">
+                      <a:solidFill>
+                        <a:srgbClr val="000000"/>
+                      </a:solidFill>
+                      <a:prstDash val="solid"/>
+                      <a:round/>
+                      <a:headEnd len="sm" w="sm" type="none"/>
+                      <a:tailEnd len="sm" w="sm" type="none"/>
+                    </a:lnL>
+                    <a:lnR cap="flat" cmpd="sng" w="9525">
+                      <a:solidFill>
+                        <a:srgbClr val="000000"/>
+                      </a:solidFill>
+                      <a:prstDash val="solid"/>
+                      <a:round/>
+                      <a:headEnd len="sm" w="sm" type="none"/>
+                      <a:tailEnd len="sm" w="sm" type="none"/>
+                    </a:lnR>
+                    <a:lnT cap="flat" cmpd="sng" w="9525">
+                      <a:solidFill>
+                        <a:srgbClr val="000000"/>
+                      </a:solidFill>
+                      <a:prstDash val="solid"/>
+                      <a:round/>
+                      <a:headEnd len="sm" w="sm" type="none"/>
+                      <a:tailEnd len="sm" w="sm" type="none"/>
+                    </a:lnT>
+                    <a:lnB cap="flat" cmpd="sng" w="9525">
+                      <a:solidFill>
+                        <a:srgbClr val="000000"/>
+                      </a:solidFill>
+                      <a:prstDash val="solid"/>
+                      <a:round/>
+                      <a:headEnd len="sm" w="sm" type="none"/>
+                      <a:tailEnd len="sm" w="sm" type="none"/>
+                    </a:lnB>
+                  </a:tcPr>
+                </a:tc>
+                <a:tc>
+                  <a:txBody>
+                    <a:bodyPr/>
+                    <a:lstStyle/>
+                    <a:p>
+                      <a:pPr indent="0" lvl="0" marL="0" rtl="0" algn="l">
+                        <a:lnSpc>
+                          <a:spcPct val="115000"/>
+                        </a:lnSpc>
+                        <a:spcBef>
+                          <a:spcPts val="1200"/>
+                        </a:spcBef>
+                        <a:spcAft>
+                          <a:spcPts val="1200"/>
+                        </a:spcAft>
+                        <a:buNone/>
+                      </a:pPr>
+                      <a:r>
+                        <a:rPr lang="en-US"/>
+                        <a:t>CPU architecture</a:t>
+                      </a:r>
+                      <a:endParaRPr/>
+                    </a:p>
+                  </a:txBody>
+                  <a:tcPr marT="76200" marB="76200" marR="114300" marL="114300">
+                    <a:lnL cap="flat" cmpd="sng" w="9525">
+                      <a:solidFill>
+                        <a:srgbClr val="000000"/>
+                      </a:solidFill>
+                      <a:prstDash val="solid"/>
+                      <a:round/>
+                      <a:headEnd len="sm" w="sm" type="none"/>
+                      <a:tailEnd len="sm" w="sm" type="none"/>
+                    </a:lnL>
+                    <a:lnR cap="flat" cmpd="sng" w="9525">
+                      <a:solidFill>
+                        <a:srgbClr val="000000"/>
+                      </a:solidFill>
+                      <a:prstDash val="solid"/>
+                      <a:round/>
+                      <a:headEnd len="sm" w="sm" type="none"/>
+                      <a:tailEnd len="sm" w="sm" type="none"/>
+                    </a:lnR>
+                    <a:lnT cap="flat" cmpd="sng" w="9525">
+                      <a:solidFill>
+                        <a:srgbClr val="000000"/>
+                      </a:solidFill>
+                      <a:prstDash val="solid"/>
+                      <a:round/>
+                      <a:headEnd len="sm" w="sm" type="none"/>
+                      <a:tailEnd len="sm" w="sm" type="none"/>
+                    </a:lnT>
+                    <a:lnB cap="flat" cmpd="sng" w="9525">
+                      <a:solidFill>
+                        <a:srgbClr val="000000"/>
+                      </a:solidFill>
+                      <a:prstDash val="solid"/>
+                      <a:round/>
+                      <a:headEnd len="sm" w="sm" type="none"/>
+                      <a:tailEnd len="sm" w="sm" type="none"/>
+                    </a:lnB>
+                  </a:tcPr>
+                </a:tc>
+              </a:tr>
+              <a:tr h="381000">
+                <a:tc>
+                  <a:txBody>
+                    <a:bodyPr/>
+                    <a:lstStyle/>
+                    <a:p>
+                      <a:pPr indent="0" lvl="0" marL="0" rtl="0" algn="ctr">
+                        <a:lnSpc>
+                          <a:spcPct val="115000"/>
+                        </a:lnSpc>
+                        <a:spcBef>
+                          <a:spcPts val="1200"/>
+                        </a:spcBef>
+                        <a:spcAft>
+                          <a:spcPts val="1200"/>
+                        </a:spcAft>
+                        <a:buNone/>
+                      </a:pPr>
+                      <a:r>
+                        <a:rPr lang="en-US">
+                          <a:solidFill>
+                            <a:srgbClr val="188038"/>
+                          </a:solidFill>
+                        </a:rPr>
+                        <a:t>unknown</a:t>
+                      </a:r>
+                      <a:endParaRPr>
+                        <a:solidFill>
+                          <a:srgbClr val="188038"/>
+                        </a:solidFill>
+                      </a:endParaRPr>
+                    </a:p>
+                  </a:txBody>
+                  <a:tcPr marT="76200" marB="76200" marR="114300" marL="114300" anchor="ctr">
+                    <a:lnL cap="flat" cmpd="sng" w="9525">
+                      <a:solidFill>
+                        <a:srgbClr val="000000"/>
+                      </a:solidFill>
+                      <a:prstDash val="solid"/>
+                      <a:round/>
+                      <a:headEnd len="sm" w="sm" type="none"/>
+                      <a:tailEnd len="sm" w="sm" type="none"/>
+                    </a:lnL>
+                    <a:lnR cap="flat" cmpd="sng" w="9525">
+                      <a:solidFill>
+                        <a:srgbClr val="000000"/>
+                      </a:solidFill>
+                      <a:prstDash val="solid"/>
+                      <a:round/>
+                      <a:headEnd len="sm" w="sm" type="none"/>
+                      <a:tailEnd len="sm" w="sm" type="none"/>
+                    </a:lnR>
+                    <a:lnT cap="flat" cmpd="sng" w="9525">
+                      <a:solidFill>
+                        <a:srgbClr val="000000"/>
+                      </a:solidFill>
+                      <a:prstDash val="solid"/>
+                      <a:round/>
+                      <a:headEnd len="sm" w="sm" type="none"/>
+                      <a:tailEnd len="sm" w="sm" type="none"/>
+                    </a:lnT>
+                    <a:lnB cap="flat" cmpd="sng" w="9525">
+                      <a:solidFill>
+                        <a:srgbClr val="000000"/>
+                      </a:solidFill>
+                      <a:prstDash val="solid"/>
+                      <a:round/>
+                      <a:headEnd len="sm" w="sm" type="none"/>
+                      <a:tailEnd len="sm" w="sm" type="none"/>
+                    </a:lnB>
+                  </a:tcPr>
+                </a:tc>
+                <a:tc>
+                  <a:txBody>
+                    <a:bodyPr/>
+                    <a:lstStyle/>
+                    <a:p>
+                      <a:pPr indent="0" lvl="0" marL="0" rtl="0" algn="l">
+                        <a:lnSpc>
+                          <a:spcPct val="115000"/>
+                        </a:lnSpc>
+                        <a:spcBef>
+                          <a:spcPts val="1200"/>
+                        </a:spcBef>
+                        <a:spcAft>
+                          <a:spcPts val="1200"/>
+                        </a:spcAft>
+                        <a:buNone/>
+                      </a:pPr>
+                      <a:r>
+                        <a:rPr lang="en-US"/>
+                        <a:t>Hardware vendor</a:t>
+                      </a:r>
+                      <a:endParaRPr/>
+                    </a:p>
+                  </a:txBody>
+                  <a:tcPr marT="76200" marB="76200" marR="114300" marL="114300">
+                    <a:lnL cap="flat" cmpd="sng" w="9525">
+                      <a:solidFill>
+                        <a:srgbClr val="000000"/>
+                      </a:solidFill>
+                      <a:prstDash val="solid"/>
+                      <a:round/>
+                      <a:headEnd len="sm" w="sm" type="none"/>
+                      <a:tailEnd len="sm" w="sm" type="none"/>
+                    </a:lnL>
+                    <a:lnR cap="flat" cmpd="sng" w="9525">
+                      <a:solidFill>
+                        <a:srgbClr val="000000"/>
+                      </a:solidFill>
+                      <a:prstDash val="solid"/>
+                      <a:round/>
+                      <a:headEnd len="sm" w="sm" type="none"/>
+                      <a:tailEnd len="sm" w="sm" type="none"/>
+                    </a:lnR>
+                    <a:lnT cap="flat" cmpd="sng" w="9525">
+                      <a:solidFill>
+                        <a:srgbClr val="000000"/>
+                      </a:solidFill>
+                      <a:prstDash val="solid"/>
+                      <a:round/>
+                      <a:headEnd len="sm" w="sm" type="none"/>
+                      <a:tailEnd len="sm" w="sm" type="none"/>
+                    </a:lnT>
+                    <a:lnB cap="flat" cmpd="sng" w="9525">
+                      <a:solidFill>
+                        <a:srgbClr val="000000"/>
+                      </a:solidFill>
+                      <a:prstDash val="solid"/>
+                      <a:round/>
+                      <a:headEnd len="sm" w="sm" type="none"/>
+                      <a:tailEnd len="sm" w="sm" type="none"/>
+                    </a:lnB>
+                  </a:tcPr>
+                </a:tc>
+              </a:tr>
+              <a:tr h="381000">
+                <a:tc>
+                  <a:txBody>
+                    <a:bodyPr/>
+                    <a:lstStyle/>
+                    <a:p>
+                      <a:pPr indent="0" lvl="0" marL="0" rtl="0" algn="ctr">
+                        <a:lnSpc>
+                          <a:spcPct val="115000"/>
+                        </a:lnSpc>
+                        <a:spcBef>
+                          <a:spcPts val="1200"/>
+                        </a:spcBef>
+                        <a:spcAft>
+                          <a:spcPts val="1200"/>
+                        </a:spcAft>
+                        <a:buNone/>
+                      </a:pPr>
+                      <a:r>
+                        <a:rPr lang="en-US">
+                          <a:solidFill>
+                            <a:srgbClr val="188038"/>
+                          </a:solidFill>
+                        </a:rPr>
+                        <a:t>linux</a:t>
+                      </a:r>
+                      <a:endParaRPr>
+                        <a:solidFill>
+                          <a:srgbClr val="188038"/>
+                        </a:solidFill>
+                      </a:endParaRPr>
+                    </a:p>
+                  </a:txBody>
+                  <a:tcPr marT="76200" marB="76200" marR="114300" marL="114300" anchor="ctr">
+                    <a:lnL cap="flat" cmpd="sng" w="9525">
+                      <a:solidFill>
+                        <a:srgbClr val="000000"/>
+                      </a:solidFill>
+                      <a:prstDash val="solid"/>
+                      <a:round/>
+                      <a:headEnd len="sm" w="sm" type="none"/>
+                      <a:tailEnd len="sm" w="sm" type="none"/>
+                    </a:lnL>
+                    <a:lnR cap="flat" cmpd="sng" w="9525">
+                      <a:solidFill>
+                        <a:srgbClr val="000000"/>
+                      </a:solidFill>
+                      <a:prstDash val="solid"/>
+                      <a:round/>
+                      <a:headEnd len="sm" w="sm" type="none"/>
+                      <a:tailEnd len="sm" w="sm" type="none"/>
+                    </a:lnR>
+                    <a:lnT cap="flat" cmpd="sng" w="9525">
+                      <a:solidFill>
+                        <a:srgbClr val="000000"/>
+                      </a:solidFill>
+                      <a:prstDash val="solid"/>
+                      <a:round/>
+                      <a:headEnd len="sm" w="sm" type="none"/>
+                      <a:tailEnd len="sm" w="sm" type="none"/>
+                    </a:lnT>
+                    <a:lnB cap="flat" cmpd="sng" w="9525">
+                      <a:solidFill>
+                        <a:srgbClr val="000000"/>
+                      </a:solidFill>
+                      <a:prstDash val="solid"/>
+                      <a:round/>
+                      <a:headEnd len="sm" w="sm" type="none"/>
+                      <a:tailEnd len="sm" w="sm" type="none"/>
+                    </a:lnB>
+                  </a:tcPr>
+                </a:tc>
+                <a:tc>
+                  <a:txBody>
+                    <a:bodyPr/>
+                    <a:lstStyle/>
+                    <a:p>
+                      <a:pPr indent="0" lvl="0" marL="0" rtl="0" algn="l">
+                        <a:lnSpc>
+                          <a:spcPct val="115000"/>
+                        </a:lnSpc>
+                        <a:spcBef>
+                          <a:spcPts val="1200"/>
+                        </a:spcBef>
+                        <a:spcAft>
+                          <a:spcPts val="1200"/>
+                        </a:spcAft>
+                        <a:buNone/>
+                      </a:pPr>
+                      <a:r>
+                        <a:rPr lang="en-US"/>
+                        <a:t>Operating system</a:t>
+                      </a:r>
+                      <a:endParaRPr/>
+                    </a:p>
+                  </a:txBody>
+                  <a:tcPr marT="76200" marB="76200" marR="114300" marL="114300">
+                    <a:lnL cap="flat" cmpd="sng" w="9525">
+                      <a:solidFill>
+                        <a:srgbClr val="000000"/>
+                      </a:solidFill>
+                      <a:prstDash val="solid"/>
+                      <a:round/>
+                      <a:headEnd len="sm" w="sm" type="none"/>
+                      <a:tailEnd len="sm" w="sm" type="none"/>
+                    </a:lnL>
+                    <a:lnR cap="flat" cmpd="sng" w="9525">
+                      <a:solidFill>
+                        <a:srgbClr val="000000"/>
+                      </a:solidFill>
+                      <a:prstDash val="solid"/>
+                      <a:round/>
+                      <a:headEnd len="sm" w="sm" type="none"/>
+                      <a:tailEnd len="sm" w="sm" type="none"/>
+                    </a:lnR>
+                    <a:lnT cap="flat" cmpd="sng" w="9525">
+                      <a:solidFill>
+                        <a:srgbClr val="000000"/>
+                      </a:solidFill>
+                      <a:prstDash val="solid"/>
+                      <a:round/>
+                      <a:headEnd len="sm" w="sm" type="none"/>
+                      <a:tailEnd len="sm" w="sm" type="none"/>
+                    </a:lnT>
+                    <a:lnB cap="flat" cmpd="sng" w="9525">
+                      <a:solidFill>
+                        <a:srgbClr val="000000"/>
+                      </a:solidFill>
+                      <a:prstDash val="solid"/>
+                      <a:round/>
+                      <a:headEnd len="sm" w="sm" type="none"/>
+                      <a:tailEnd len="sm" w="sm" type="none"/>
+                    </a:lnB>
+                  </a:tcPr>
+                </a:tc>
+              </a:tr>
+              <a:tr h="381000">
+                <a:tc>
+                  <a:txBody>
+                    <a:bodyPr/>
+                    <a:lstStyle/>
+                    <a:p>
+                      <a:pPr indent="0" lvl="0" marL="0" rtl="0" algn="ctr">
+                        <a:lnSpc>
+                          <a:spcPct val="115000"/>
+                        </a:lnSpc>
+                        <a:spcBef>
+                          <a:spcPts val="1200"/>
+                        </a:spcBef>
+                        <a:spcAft>
+                          <a:spcPts val="1200"/>
+                        </a:spcAft>
+                        <a:buNone/>
+                      </a:pPr>
+                      <a:r>
+                        <a:rPr lang="en-US">
+                          <a:solidFill>
+                            <a:srgbClr val="188038"/>
+                          </a:solidFill>
+                        </a:rPr>
+                        <a:t>gnu</a:t>
+                      </a:r>
+                      <a:endParaRPr>
+                        <a:solidFill>
+                          <a:srgbClr val="188038"/>
+                        </a:solidFill>
+                      </a:endParaRPr>
+                    </a:p>
+                  </a:txBody>
+                  <a:tcPr marT="76200" marB="76200" marR="114300" marL="114300" anchor="ctr">
+                    <a:lnL cap="flat" cmpd="sng" w="9525">
+                      <a:solidFill>
+                        <a:srgbClr val="000000"/>
+                      </a:solidFill>
+                      <a:prstDash val="solid"/>
+                      <a:round/>
+                      <a:headEnd len="sm" w="sm" type="none"/>
+                      <a:tailEnd len="sm" w="sm" type="none"/>
+                    </a:lnL>
+                    <a:lnR cap="flat" cmpd="sng" w="9525">
+                      <a:solidFill>
+                        <a:srgbClr val="000000"/>
+                      </a:solidFill>
+                      <a:prstDash val="solid"/>
+                      <a:round/>
+                      <a:headEnd len="sm" w="sm" type="none"/>
+                      <a:tailEnd len="sm" w="sm" type="none"/>
+                    </a:lnR>
+                    <a:lnT cap="flat" cmpd="sng" w="9525">
+                      <a:solidFill>
+                        <a:srgbClr val="000000"/>
+                      </a:solidFill>
+                      <a:prstDash val="solid"/>
+                      <a:round/>
+                      <a:headEnd len="sm" w="sm" type="none"/>
+                      <a:tailEnd len="sm" w="sm" type="none"/>
+                    </a:lnT>
+                    <a:lnB cap="flat" cmpd="sng" w="9525">
+                      <a:solidFill>
+                        <a:srgbClr val="000000"/>
+                      </a:solidFill>
+                      <a:prstDash val="solid"/>
+                      <a:round/>
+                      <a:headEnd len="sm" w="sm" type="none"/>
+                      <a:tailEnd len="sm" w="sm" type="none"/>
+                    </a:lnB>
+                  </a:tcPr>
+                </a:tc>
+                <a:tc>
+                  <a:txBody>
+                    <a:bodyPr/>
+                    <a:lstStyle/>
+                    <a:p>
+                      <a:pPr indent="0" lvl="0" marL="0" rtl="0" algn="l">
+                        <a:lnSpc>
+                          <a:spcPct val="115000"/>
+                        </a:lnSpc>
+                        <a:spcBef>
+                          <a:spcPts val="1200"/>
+                        </a:spcBef>
+                        <a:spcAft>
+                          <a:spcPts val="1200"/>
+                        </a:spcAft>
+                        <a:buNone/>
+                      </a:pPr>
+                      <a:r>
+                        <a:rPr lang="en-US"/>
+                        <a:t>ABI/runtime environment</a:t>
+                      </a:r>
+                      <a:endParaRPr/>
+                    </a:p>
+                  </a:txBody>
+                  <a:tcPr marT="76200" marB="76200" marR="114300" marL="114300">
+                    <a:lnL cap="flat" cmpd="sng" w="9525">
+                      <a:solidFill>
+                        <a:srgbClr val="000000"/>
+                      </a:solidFill>
+                      <a:prstDash val="solid"/>
+                      <a:round/>
+                      <a:headEnd len="sm" w="sm" type="none"/>
+                      <a:tailEnd len="sm" w="sm" type="none"/>
+                    </a:lnL>
+                    <a:lnR cap="flat" cmpd="sng" w="9525">
+                      <a:solidFill>
+                        <a:srgbClr val="000000"/>
+                      </a:solidFill>
+                      <a:prstDash val="solid"/>
+                      <a:round/>
+                      <a:headEnd len="sm" w="sm" type="none"/>
+                      <a:tailEnd len="sm" w="sm" type="none"/>
+                    </a:lnR>
+                    <a:lnT cap="flat" cmpd="sng" w="9525">
+                      <a:solidFill>
+                        <a:srgbClr val="000000"/>
+                      </a:solidFill>
+                      <a:prstDash val="solid"/>
+                      <a:round/>
+                      <a:headEnd len="sm" w="sm" type="none"/>
+                      <a:tailEnd len="sm" w="sm" type="none"/>
+                    </a:lnT>
+                    <a:lnB cap="flat" cmpd="sng" w="9525">
+                      <a:solidFill>
+                        <a:srgbClr val="000000"/>
+                      </a:solidFill>
+                      <a:prstDash val="solid"/>
+                      <a:round/>
+                      <a:headEnd len="sm" w="sm" type="none"/>
+                      <a:tailEnd len="sm" w="sm" type="none"/>
+                    </a:lnB>
+                  </a:tcPr>
+                </a:tc>
+              </a:tr>
+            </a:tbl>
+          </a:graphicData>
+        </a:graphic>
+      </p:graphicFrame>
     </p:spTree>
   </p:cSld>
   <p:clrMapOvr>
@@ -33873,7 +35428,7 @@
   <p:cSld>
     <p:spTree>
       <p:nvGrpSpPr>
-        <p:cNvPr id="495" name="Shape 495"/>
+        <p:cNvPr id="497" name="Shape 497"/>
         <p:cNvGrpSpPr/>
         <p:nvPr/>
       </p:nvGrpSpPr>
@@ -33887,7 +35442,7 @@
       </p:grpSpPr>
       <p:sp>
         <p:nvSpPr>
-          <p:cNvPr id="496" name="Google Shape;496;g2bee99cf594_0_7"/>
+          <p:cNvPr id="498" name="Google Shape;498;g3f453c19afd_0_3"/>
           <p:cNvSpPr txBox="1"/>
           <p:nvPr>
             <p:ph type="title"/>
@@ -33918,8 +35473,12 @@
               <a:buNone/>
             </a:pPr>
             <a:r>
-              <a:rPr lang="en-US"/>
-              <a:t>LLVM IR bitcode: tooling</a:t>
+              <a:rPr lang="en-US">
+                <a:solidFill>
+                  <a:schemeClr val="lt2"/>
+                </a:solidFill>
+              </a:rPr>
+              <a:t>LLVM IR Target Information: datalayout</a:t>
             </a:r>
             <a:endParaRPr/>
           </a:p>
@@ -33927,7 +35486,7 @@
       </p:sp>
       <p:sp>
         <p:nvSpPr>
-          <p:cNvPr id="497" name="Google Shape;497;g2bee99cf594_0_7"/>
+          <p:cNvPr id="499" name="Google Shape;499;g3f453c19afd_0_3"/>
           <p:cNvSpPr txBox="1"/>
           <p:nvPr>
             <p:ph idx="1" type="body"/>
@@ -33935,8 +35494,8 @@
         </p:nvSpPr>
         <p:spPr>
           <a:xfrm>
-            <a:off x="571375" y="1203700"/>
-            <a:ext cx="11010900" cy="5654400"/>
+            <a:off x="571370" y="1673454"/>
+            <a:ext cx="11010900" cy="4575000"/>
           </a:xfrm>
           <a:prstGeom prst="rect">
             <a:avLst/>
@@ -33948,44 +35507,1280 @@
           </a:bodyPr>
           <a:lstStyle/>
           <a:p>
-            <a:pPr indent="-342900" lvl="0" marL="457200" rtl="0" algn="l">
+            <a:pPr indent="0" lvl="0" marL="0" rtl="0" algn="l">
               <a:spcBef>
                 <a:spcPts val="1200"/>
               </a:spcBef>
               <a:spcAft>
                 <a:spcPts val="0"/>
               </a:spcAft>
-              <a:buSzPts val="1800"/>
+              <a:buNone/>
+            </a:pPr>
+            <a:r>
+              <a:rPr lang="en-US" sz="2400"/>
+              <a:t>The target data layout describes how data is represented in memory for the target platform. It specifies properties such as:</a:t>
+            </a:r>
+            <a:endParaRPr sz="2400"/>
+          </a:p>
+          <a:p>
+            <a:pPr indent="-317500" lvl="0" marL="457200" rtl="0" algn="l">
+              <a:spcBef>
+                <a:spcPts val="1200"/>
+              </a:spcBef>
+              <a:spcAft>
+                <a:spcPts val="0"/>
+              </a:spcAft>
+              <a:buSzPts val="1400"/>
               <a:buChar char="▪"/>
             </a:pPr>
             <a:r>
+              <a:rPr lang="en-US" sz="2400"/>
+              <a:t>Endianness (big or little endian)</a:t>
+            </a:r>
+            <a:endParaRPr sz="2400"/>
+          </a:p>
+          <a:p>
+            <a:pPr indent="-317500" lvl="0" marL="457200" rtl="0" algn="l">
+              <a:spcBef>
+                <a:spcPts val="0"/>
+              </a:spcBef>
+              <a:spcAft>
+                <a:spcPts val="0"/>
+              </a:spcAft>
+              <a:buSzPts val="1400"/>
+              <a:buChar char="▪"/>
+            </a:pPr>
+            <a:r>
+              <a:rPr lang="en-US" sz="2400"/>
+              <a:t>Pointer sizes and alignments</a:t>
+            </a:r>
+            <a:endParaRPr sz="2400"/>
+          </a:p>
+          <a:p>
+            <a:pPr indent="-317500" lvl="0" marL="457200" rtl="0" algn="l">
+              <a:spcBef>
+                <a:spcPts val="0"/>
+              </a:spcBef>
+              <a:spcAft>
+                <a:spcPts val="0"/>
+              </a:spcAft>
+              <a:buSzPts val="1400"/>
+              <a:buChar char="▪"/>
+            </a:pPr>
+            <a:r>
+              <a:rPr lang="en-US" sz="2400"/>
+              <a:t>Integer, floating-point, and vector alignments</a:t>
+            </a:r>
+            <a:endParaRPr sz="2400"/>
+          </a:p>
+          <a:p>
+            <a:pPr indent="-317500" lvl="0" marL="457200" rtl="0" algn="l">
+              <a:spcBef>
+                <a:spcPts val="0"/>
+              </a:spcBef>
+              <a:spcAft>
+                <a:spcPts val="0"/>
+              </a:spcAft>
+              <a:buSzPts val="1400"/>
+              <a:buChar char="▪"/>
+            </a:pPr>
+            <a:r>
+              <a:rPr lang="en-US" sz="2400"/>
+              <a:t>Native integer widths</a:t>
+            </a:r>
+            <a:endParaRPr sz="2400"/>
+          </a:p>
+          <a:p>
+            <a:pPr indent="-317500" lvl="0" marL="457200" rtl="0" algn="l">
+              <a:spcBef>
+                <a:spcPts val="0"/>
+              </a:spcBef>
+              <a:spcAft>
+                <a:spcPts val="0"/>
+              </a:spcAft>
+              <a:buSzPts val="1400"/>
+              <a:buChar char="▪"/>
+            </a:pPr>
+            <a:r>
+              <a:rPr lang="en-US" sz="2400"/>
+              <a:t>Stack alignment</a:t>
+            </a:r>
+            <a:endParaRPr sz="2400"/>
+          </a:p>
+          <a:p>
+            <a:pPr indent="-317500" lvl="0" marL="457200" rtl="0" algn="l">
+              <a:spcBef>
+                <a:spcPts val="0"/>
+              </a:spcBef>
+              <a:spcAft>
+                <a:spcPts val="0"/>
+              </a:spcAft>
+              <a:buSzPts val="1400"/>
+              <a:buChar char="▪"/>
+            </a:pPr>
+            <a:r>
+              <a:rPr lang="en-US" sz="2400"/>
+              <a:t>Object-file mangling convention</a:t>
+            </a:r>
+            <a:endParaRPr sz="2400"/>
+          </a:p>
+        </p:txBody>
+      </p:sp>
+      <p:sp>
+        <p:nvSpPr>
+          <p:cNvPr id="500" name="Google Shape;500;g3f453c19afd_0_3"/>
+          <p:cNvSpPr txBox="1"/>
+          <p:nvPr/>
+        </p:nvSpPr>
+        <p:spPr>
+          <a:xfrm>
+            <a:off x="8108275" y="2248975"/>
+            <a:ext cx="3000000" cy="400200"/>
+          </a:xfrm>
+          <a:prstGeom prst="rect">
+            <a:avLst/>
+          </a:prstGeom>
+          <a:noFill/>
+          <a:ln>
+            <a:noFill/>
+          </a:ln>
+        </p:spPr>
+        <p:txBody>
+          <a:bodyPr anchorCtr="0" anchor="t" bIns="91425" lIns="91425" spcFirstLastPara="1" rIns="91425" wrap="square" tIns="91425">
+            <a:spAutoFit/>
+          </a:bodyPr>
+          <a:lstStyle/>
+          <a:p>
+            <a:pPr indent="0" lvl="0" marL="0" rtl="0" algn="l">
+              <a:lnSpc>
+                <a:spcPct val="115000"/>
+              </a:lnSpc>
+              <a:spcBef>
+                <a:spcPts val="1200"/>
+              </a:spcBef>
+              <a:spcAft>
+                <a:spcPts val="1200"/>
+              </a:spcAft>
+              <a:buNone/>
+            </a:pPr>
+            <a:r>
               <a:rPr lang="en-US"/>
-              <a:t>Emit bitcode:</a:t>
+              <a:t>e-m:e-i64:64-n8:16:32:64-S128</a:t>
             </a:r>
             <a:endParaRPr/>
           </a:p>
+        </p:txBody>
+      </p:sp>
+      <p:graphicFrame>
+        <p:nvGraphicFramePr>
+          <p:cNvPr id="501" name="Google Shape;501;g3f453c19afd_0_3"/>
+          <p:cNvGraphicFramePr/>
+          <p:nvPr/>
+        </p:nvGraphicFramePr>
+        <p:xfrm>
+          <a:off x="7147100" y="2707070"/>
+          <a:ext cx="3000000" cy="3000000"/>
+        </p:xfrm>
+        <a:graphic>
+          <a:graphicData uri="http://schemas.openxmlformats.org/drawingml/2006/table">
+            <a:tbl>
+              <a:tblPr>
+                <a:noFill/>
+                <a:tableStyleId>{36D9B874-D8F9-4614-A41A-4F30205731BB}</a:tableStyleId>
+              </a:tblPr>
+              <a:tblGrid>
+                <a:gridCol w="1247225"/>
+                <a:gridCol w="3604675"/>
+              </a:tblGrid>
+              <a:tr h="101225">
+                <a:tc>
+                  <a:txBody>
+                    <a:bodyPr/>
+                    <a:lstStyle/>
+                    <a:p>
+                      <a:pPr indent="0" lvl="0" marL="0" rtl="0" algn="ctr">
+                        <a:lnSpc>
+                          <a:spcPct val="115000"/>
+                        </a:lnSpc>
+                        <a:spcBef>
+                          <a:spcPts val="1200"/>
+                        </a:spcBef>
+                        <a:spcAft>
+                          <a:spcPts val="1200"/>
+                        </a:spcAft>
+                        <a:buNone/>
+                      </a:pPr>
+                      <a:r>
+                        <a:rPr lang="en-US" sz="1100">
+                          <a:solidFill>
+                            <a:srgbClr val="188038"/>
+                          </a:solidFill>
+                          <a:latin typeface="Roboto Mono"/>
+                          <a:ea typeface="Roboto Mono"/>
+                          <a:cs typeface="Roboto Mono"/>
+                          <a:sym typeface="Roboto Mono"/>
+                        </a:rPr>
+                        <a:t>e</a:t>
+                      </a:r>
+                      <a:endParaRPr sz="1100">
+                        <a:solidFill>
+                          <a:srgbClr val="188038"/>
+                        </a:solidFill>
+                        <a:latin typeface="Roboto Mono"/>
+                        <a:ea typeface="Roboto Mono"/>
+                        <a:cs typeface="Roboto Mono"/>
+                        <a:sym typeface="Roboto Mono"/>
+                      </a:endParaRPr>
+                    </a:p>
+                  </a:txBody>
+                  <a:tcPr marT="76200" marB="76200" marR="114300" marL="114300" anchor="ctr">
+                    <a:lnL cap="flat" cmpd="sng" w="9525">
+                      <a:solidFill>
+                        <a:srgbClr val="000000"/>
+                      </a:solidFill>
+                      <a:prstDash val="solid"/>
+                      <a:round/>
+                      <a:headEnd len="sm" w="sm" type="none"/>
+                      <a:tailEnd len="sm" w="sm" type="none"/>
+                    </a:lnL>
+                    <a:lnR cap="flat" cmpd="sng" w="9525">
+                      <a:solidFill>
+                        <a:srgbClr val="000000"/>
+                      </a:solidFill>
+                      <a:prstDash val="solid"/>
+                      <a:round/>
+                      <a:headEnd len="sm" w="sm" type="none"/>
+                      <a:tailEnd len="sm" w="sm" type="none"/>
+                    </a:lnR>
+                    <a:lnT cap="flat" cmpd="sng" w="9525">
+                      <a:solidFill>
+                        <a:srgbClr val="000000"/>
+                      </a:solidFill>
+                      <a:prstDash val="solid"/>
+                      <a:round/>
+                      <a:headEnd len="sm" w="sm" type="none"/>
+                      <a:tailEnd len="sm" w="sm" type="none"/>
+                    </a:lnT>
+                    <a:lnB cap="flat" cmpd="sng" w="9525">
+                      <a:solidFill>
+                        <a:srgbClr val="000000"/>
+                      </a:solidFill>
+                      <a:prstDash val="solid"/>
+                      <a:round/>
+                      <a:headEnd len="sm" w="sm" type="none"/>
+                      <a:tailEnd len="sm" w="sm" type="none"/>
+                    </a:lnB>
+                  </a:tcPr>
+                </a:tc>
+                <a:tc>
+                  <a:txBody>
+                    <a:bodyPr/>
+                    <a:lstStyle/>
+                    <a:p>
+                      <a:pPr indent="0" lvl="0" marL="0" rtl="0" algn="l">
+                        <a:lnSpc>
+                          <a:spcPct val="115000"/>
+                        </a:lnSpc>
+                        <a:spcBef>
+                          <a:spcPts val="1200"/>
+                        </a:spcBef>
+                        <a:spcAft>
+                          <a:spcPts val="1200"/>
+                        </a:spcAft>
+                        <a:buNone/>
+                      </a:pPr>
+                      <a:r>
+                        <a:rPr lang="en-US"/>
+                        <a:t>Little-endian</a:t>
+                      </a:r>
+                      <a:endParaRPr/>
+                    </a:p>
+                  </a:txBody>
+                  <a:tcPr marT="76200" marB="76200" marR="114300" marL="114300">
+                    <a:lnL cap="flat" cmpd="sng" w="9525">
+                      <a:solidFill>
+                        <a:srgbClr val="000000"/>
+                      </a:solidFill>
+                      <a:prstDash val="solid"/>
+                      <a:round/>
+                      <a:headEnd len="sm" w="sm" type="none"/>
+                      <a:tailEnd len="sm" w="sm" type="none"/>
+                    </a:lnL>
+                    <a:lnR cap="flat" cmpd="sng" w="9525">
+                      <a:solidFill>
+                        <a:srgbClr val="000000"/>
+                      </a:solidFill>
+                      <a:prstDash val="solid"/>
+                      <a:round/>
+                      <a:headEnd len="sm" w="sm" type="none"/>
+                      <a:tailEnd len="sm" w="sm" type="none"/>
+                    </a:lnR>
+                    <a:lnT cap="flat" cmpd="sng" w="9525">
+                      <a:solidFill>
+                        <a:srgbClr val="000000"/>
+                      </a:solidFill>
+                      <a:prstDash val="solid"/>
+                      <a:round/>
+                      <a:headEnd len="sm" w="sm" type="none"/>
+                      <a:tailEnd len="sm" w="sm" type="none"/>
+                    </a:lnT>
+                    <a:lnB cap="flat" cmpd="sng" w="9525">
+                      <a:solidFill>
+                        <a:srgbClr val="000000"/>
+                      </a:solidFill>
+                      <a:prstDash val="solid"/>
+                      <a:round/>
+                      <a:headEnd len="sm" w="sm" type="none"/>
+                      <a:tailEnd len="sm" w="sm" type="none"/>
+                    </a:lnB>
+                  </a:tcPr>
+                </a:tc>
+              </a:tr>
+              <a:tr h="97325">
+                <a:tc>
+                  <a:txBody>
+                    <a:bodyPr/>
+                    <a:lstStyle/>
+                    <a:p>
+                      <a:pPr indent="0" lvl="0" marL="0" rtl="0" algn="ctr">
+                        <a:lnSpc>
+                          <a:spcPct val="115000"/>
+                        </a:lnSpc>
+                        <a:spcBef>
+                          <a:spcPts val="1200"/>
+                        </a:spcBef>
+                        <a:spcAft>
+                          <a:spcPts val="1200"/>
+                        </a:spcAft>
+                        <a:buNone/>
+                      </a:pPr>
+                      <a:r>
+                        <a:rPr lang="en-US" sz="1100">
+                          <a:solidFill>
+                            <a:srgbClr val="188038"/>
+                          </a:solidFill>
+                          <a:latin typeface="Roboto Mono"/>
+                          <a:ea typeface="Roboto Mono"/>
+                          <a:cs typeface="Roboto Mono"/>
+                          <a:sym typeface="Roboto Mono"/>
+                        </a:rPr>
+                        <a:t>E</a:t>
+                      </a:r>
+                      <a:endParaRPr sz="1100">
+                        <a:solidFill>
+                          <a:srgbClr val="188038"/>
+                        </a:solidFill>
+                        <a:latin typeface="Roboto Mono"/>
+                        <a:ea typeface="Roboto Mono"/>
+                        <a:cs typeface="Roboto Mono"/>
+                        <a:sym typeface="Roboto Mono"/>
+                      </a:endParaRPr>
+                    </a:p>
+                  </a:txBody>
+                  <a:tcPr marT="76200" marB="76200" marR="114300" marL="114300" anchor="ctr">
+                    <a:lnL cap="flat" cmpd="sng" w="9525">
+                      <a:solidFill>
+                        <a:srgbClr val="000000"/>
+                      </a:solidFill>
+                      <a:prstDash val="solid"/>
+                      <a:round/>
+                      <a:headEnd len="sm" w="sm" type="none"/>
+                      <a:tailEnd len="sm" w="sm" type="none"/>
+                    </a:lnL>
+                    <a:lnR cap="flat" cmpd="sng" w="9525">
+                      <a:solidFill>
+                        <a:srgbClr val="000000"/>
+                      </a:solidFill>
+                      <a:prstDash val="solid"/>
+                      <a:round/>
+                      <a:headEnd len="sm" w="sm" type="none"/>
+                      <a:tailEnd len="sm" w="sm" type="none"/>
+                    </a:lnR>
+                    <a:lnT cap="flat" cmpd="sng" w="9525">
+                      <a:solidFill>
+                        <a:srgbClr val="000000"/>
+                      </a:solidFill>
+                      <a:prstDash val="solid"/>
+                      <a:round/>
+                      <a:headEnd len="sm" w="sm" type="none"/>
+                      <a:tailEnd len="sm" w="sm" type="none"/>
+                    </a:lnT>
+                    <a:lnB cap="flat" cmpd="sng" w="9525">
+                      <a:solidFill>
+                        <a:srgbClr val="000000"/>
+                      </a:solidFill>
+                      <a:prstDash val="solid"/>
+                      <a:round/>
+                      <a:headEnd len="sm" w="sm" type="none"/>
+                      <a:tailEnd len="sm" w="sm" type="none"/>
+                    </a:lnB>
+                  </a:tcPr>
+                </a:tc>
+                <a:tc>
+                  <a:txBody>
+                    <a:bodyPr/>
+                    <a:lstStyle/>
+                    <a:p>
+                      <a:pPr indent="0" lvl="0" marL="0" rtl="0" algn="l">
+                        <a:lnSpc>
+                          <a:spcPct val="115000"/>
+                        </a:lnSpc>
+                        <a:spcBef>
+                          <a:spcPts val="1200"/>
+                        </a:spcBef>
+                        <a:spcAft>
+                          <a:spcPts val="1200"/>
+                        </a:spcAft>
+                        <a:buNone/>
+                      </a:pPr>
+                      <a:r>
+                        <a:rPr lang="en-US"/>
+                        <a:t>Big-endian</a:t>
+                      </a:r>
+                      <a:endParaRPr/>
+                    </a:p>
+                  </a:txBody>
+                  <a:tcPr marT="76200" marB="76200" marR="114300" marL="114300">
+                    <a:lnL cap="flat" cmpd="sng" w="9525">
+                      <a:solidFill>
+                        <a:srgbClr val="000000"/>
+                      </a:solidFill>
+                      <a:prstDash val="solid"/>
+                      <a:round/>
+                      <a:headEnd len="sm" w="sm" type="none"/>
+                      <a:tailEnd len="sm" w="sm" type="none"/>
+                    </a:lnL>
+                    <a:lnR cap="flat" cmpd="sng" w="9525">
+                      <a:solidFill>
+                        <a:srgbClr val="000000"/>
+                      </a:solidFill>
+                      <a:prstDash val="solid"/>
+                      <a:round/>
+                      <a:headEnd len="sm" w="sm" type="none"/>
+                      <a:tailEnd len="sm" w="sm" type="none"/>
+                    </a:lnR>
+                    <a:lnT cap="flat" cmpd="sng" w="9525">
+                      <a:solidFill>
+                        <a:srgbClr val="000000"/>
+                      </a:solidFill>
+                      <a:prstDash val="solid"/>
+                      <a:round/>
+                      <a:headEnd len="sm" w="sm" type="none"/>
+                      <a:tailEnd len="sm" w="sm" type="none"/>
+                    </a:lnT>
+                    <a:lnB cap="flat" cmpd="sng" w="9525">
+                      <a:solidFill>
+                        <a:srgbClr val="000000"/>
+                      </a:solidFill>
+                      <a:prstDash val="solid"/>
+                      <a:round/>
+                      <a:headEnd len="sm" w="sm" type="none"/>
+                      <a:tailEnd len="sm" w="sm" type="none"/>
+                    </a:lnB>
+                  </a:tcPr>
+                </a:tc>
+              </a:tr>
+              <a:tr h="97325">
+                <a:tc>
+                  <a:txBody>
+                    <a:bodyPr/>
+                    <a:lstStyle/>
+                    <a:p>
+                      <a:pPr indent="0" lvl="0" marL="0" rtl="0" algn="ctr">
+                        <a:lnSpc>
+                          <a:spcPct val="115000"/>
+                        </a:lnSpc>
+                        <a:spcBef>
+                          <a:spcPts val="1200"/>
+                        </a:spcBef>
+                        <a:spcAft>
+                          <a:spcPts val="1200"/>
+                        </a:spcAft>
+                        <a:buNone/>
+                      </a:pPr>
+                      <a:r>
+                        <a:rPr lang="en-US" sz="1100">
+                          <a:solidFill>
+                            <a:srgbClr val="188038"/>
+                          </a:solidFill>
+                          <a:latin typeface="Roboto Mono"/>
+                          <a:ea typeface="Roboto Mono"/>
+                          <a:cs typeface="Roboto Mono"/>
+                          <a:sym typeface="Roboto Mono"/>
+                        </a:rPr>
+                        <a:t>m:e</a:t>
+                      </a:r>
+                      <a:endParaRPr sz="1100">
+                        <a:solidFill>
+                          <a:srgbClr val="188038"/>
+                        </a:solidFill>
+                        <a:latin typeface="Roboto Mono"/>
+                        <a:ea typeface="Roboto Mono"/>
+                        <a:cs typeface="Roboto Mono"/>
+                        <a:sym typeface="Roboto Mono"/>
+                      </a:endParaRPr>
+                    </a:p>
+                  </a:txBody>
+                  <a:tcPr marT="76200" marB="76200" marR="114300" marL="114300" anchor="ctr">
+                    <a:lnL cap="flat" cmpd="sng" w="9525">
+                      <a:solidFill>
+                        <a:srgbClr val="000000"/>
+                      </a:solidFill>
+                      <a:prstDash val="solid"/>
+                      <a:round/>
+                      <a:headEnd len="sm" w="sm" type="none"/>
+                      <a:tailEnd len="sm" w="sm" type="none"/>
+                    </a:lnL>
+                    <a:lnR cap="flat" cmpd="sng" w="9525">
+                      <a:solidFill>
+                        <a:srgbClr val="000000"/>
+                      </a:solidFill>
+                      <a:prstDash val="solid"/>
+                      <a:round/>
+                      <a:headEnd len="sm" w="sm" type="none"/>
+                      <a:tailEnd len="sm" w="sm" type="none"/>
+                    </a:lnR>
+                    <a:lnT cap="flat" cmpd="sng" w="9525">
+                      <a:solidFill>
+                        <a:srgbClr val="000000"/>
+                      </a:solidFill>
+                      <a:prstDash val="solid"/>
+                      <a:round/>
+                      <a:headEnd len="sm" w="sm" type="none"/>
+                      <a:tailEnd len="sm" w="sm" type="none"/>
+                    </a:lnT>
+                    <a:lnB cap="flat" cmpd="sng" w="9525">
+                      <a:solidFill>
+                        <a:srgbClr val="000000"/>
+                      </a:solidFill>
+                      <a:prstDash val="solid"/>
+                      <a:round/>
+                      <a:headEnd len="sm" w="sm" type="none"/>
+                      <a:tailEnd len="sm" w="sm" type="none"/>
+                    </a:lnB>
+                  </a:tcPr>
+                </a:tc>
+                <a:tc>
+                  <a:txBody>
+                    <a:bodyPr/>
+                    <a:lstStyle/>
+                    <a:p>
+                      <a:pPr indent="0" lvl="0" marL="0" rtl="0" algn="l">
+                        <a:lnSpc>
+                          <a:spcPct val="115000"/>
+                        </a:lnSpc>
+                        <a:spcBef>
+                          <a:spcPts val="1200"/>
+                        </a:spcBef>
+                        <a:spcAft>
+                          <a:spcPts val="1200"/>
+                        </a:spcAft>
+                        <a:buNone/>
+                      </a:pPr>
+                      <a:r>
+                        <a:rPr lang="en-US"/>
+                        <a:t>ELF symbol mangling</a:t>
+                      </a:r>
+                      <a:endParaRPr/>
+                    </a:p>
+                  </a:txBody>
+                  <a:tcPr marT="76200" marB="76200" marR="114300" marL="114300">
+                    <a:lnL cap="flat" cmpd="sng" w="9525">
+                      <a:solidFill>
+                        <a:srgbClr val="000000"/>
+                      </a:solidFill>
+                      <a:prstDash val="solid"/>
+                      <a:round/>
+                      <a:headEnd len="sm" w="sm" type="none"/>
+                      <a:tailEnd len="sm" w="sm" type="none"/>
+                    </a:lnL>
+                    <a:lnR cap="flat" cmpd="sng" w="9525">
+                      <a:solidFill>
+                        <a:srgbClr val="000000"/>
+                      </a:solidFill>
+                      <a:prstDash val="solid"/>
+                      <a:round/>
+                      <a:headEnd len="sm" w="sm" type="none"/>
+                      <a:tailEnd len="sm" w="sm" type="none"/>
+                    </a:lnR>
+                    <a:lnT cap="flat" cmpd="sng" w="9525">
+                      <a:solidFill>
+                        <a:srgbClr val="000000"/>
+                      </a:solidFill>
+                      <a:prstDash val="solid"/>
+                      <a:round/>
+                      <a:headEnd len="sm" w="sm" type="none"/>
+                      <a:tailEnd len="sm" w="sm" type="none"/>
+                    </a:lnT>
+                    <a:lnB cap="flat" cmpd="sng" w="9525">
+                      <a:solidFill>
+                        <a:srgbClr val="000000"/>
+                      </a:solidFill>
+                      <a:prstDash val="solid"/>
+                      <a:round/>
+                      <a:headEnd len="sm" w="sm" type="none"/>
+                      <a:tailEnd len="sm" w="sm" type="none"/>
+                    </a:lnB>
+                  </a:tcPr>
+                </a:tc>
+              </a:tr>
+              <a:tr h="97325">
+                <a:tc>
+                  <a:txBody>
+                    <a:bodyPr/>
+                    <a:lstStyle/>
+                    <a:p>
+                      <a:pPr indent="0" lvl="0" marL="0" rtl="0" algn="ctr">
+                        <a:lnSpc>
+                          <a:spcPct val="115000"/>
+                        </a:lnSpc>
+                        <a:spcBef>
+                          <a:spcPts val="1200"/>
+                        </a:spcBef>
+                        <a:spcAft>
+                          <a:spcPts val="1200"/>
+                        </a:spcAft>
+                        <a:buNone/>
+                      </a:pPr>
+                      <a:r>
+                        <a:rPr lang="en-US" sz="1100">
+                          <a:solidFill>
+                            <a:srgbClr val="188038"/>
+                          </a:solidFill>
+                          <a:latin typeface="Roboto Mono"/>
+                          <a:ea typeface="Roboto Mono"/>
+                          <a:cs typeface="Roboto Mono"/>
+                          <a:sym typeface="Roboto Mono"/>
+                        </a:rPr>
+                        <a:t>i64:64</a:t>
+                      </a:r>
+                      <a:endParaRPr sz="1100">
+                        <a:solidFill>
+                          <a:srgbClr val="188038"/>
+                        </a:solidFill>
+                        <a:latin typeface="Roboto Mono"/>
+                        <a:ea typeface="Roboto Mono"/>
+                        <a:cs typeface="Roboto Mono"/>
+                        <a:sym typeface="Roboto Mono"/>
+                      </a:endParaRPr>
+                    </a:p>
+                  </a:txBody>
+                  <a:tcPr marT="76200" marB="76200" marR="114300" marL="114300" anchor="ctr">
+                    <a:lnL cap="flat" cmpd="sng" w="9525">
+                      <a:solidFill>
+                        <a:srgbClr val="000000"/>
+                      </a:solidFill>
+                      <a:prstDash val="solid"/>
+                      <a:round/>
+                      <a:headEnd len="sm" w="sm" type="none"/>
+                      <a:tailEnd len="sm" w="sm" type="none"/>
+                    </a:lnL>
+                    <a:lnR cap="flat" cmpd="sng" w="9525">
+                      <a:solidFill>
+                        <a:srgbClr val="000000"/>
+                      </a:solidFill>
+                      <a:prstDash val="solid"/>
+                      <a:round/>
+                      <a:headEnd len="sm" w="sm" type="none"/>
+                      <a:tailEnd len="sm" w="sm" type="none"/>
+                    </a:lnR>
+                    <a:lnT cap="flat" cmpd="sng" w="9525">
+                      <a:solidFill>
+                        <a:srgbClr val="000000"/>
+                      </a:solidFill>
+                      <a:prstDash val="solid"/>
+                      <a:round/>
+                      <a:headEnd len="sm" w="sm" type="none"/>
+                      <a:tailEnd len="sm" w="sm" type="none"/>
+                    </a:lnT>
+                    <a:lnB cap="flat" cmpd="sng" w="9525">
+                      <a:solidFill>
+                        <a:srgbClr val="000000"/>
+                      </a:solidFill>
+                      <a:prstDash val="solid"/>
+                      <a:round/>
+                      <a:headEnd len="sm" w="sm" type="none"/>
+                      <a:tailEnd len="sm" w="sm" type="none"/>
+                    </a:lnB>
+                  </a:tcPr>
+                </a:tc>
+                <a:tc>
+                  <a:txBody>
+                    <a:bodyPr/>
+                    <a:lstStyle/>
+                    <a:p>
+                      <a:pPr indent="0" lvl="0" marL="0" rtl="0" algn="l">
+                        <a:lnSpc>
+                          <a:spcPct val="115000"/>
+                        </a:lnSpc>
+                        <a:spcBef>
+                          <a:spcPts val="1200"/>
+                        </a:spcBef>
+                        <a:spcAft>
+                          <a:spcPts val="1200"/>
+                        </a:spcAft>
+                        <a:buNone/>
+                      </a:pPr>
+                      <a:r>
+                        <a:rPr lang="en-US" sz="1100">
+                          <a:solidFill>
+                            <a:srgbClr val="188038"/>
+                          </a:solidFill>
+                          <a:latin typeface="Roboto Mono"/>
+                          <a:ea typeface="Roboto Mono"/>
+                          <a:cs typeface="Roboto Mono"/>
+                          <a:sym typeface="Roboto Mono"/>
+                        </a:rPr>
+                        <a:t>i64</a:t>
+                      </a:r>
+                      <a:r>
+                        <a:rPr lang="en-US" sz="1100"/>
+                        <a:t> has 64-bit ABI alignment</a:t>
+                      </a:r>
+                      <a:endParaRPr sz="1100"/>
+                    </a:p>
+                  </a:txBody>
+                  <a:tcPr marT="76200" marB="76200" marR="114300" marL="114300">
+                    <a:lnL cap="flat" cmpd="sng" w="9525">
+                      <a:solidFill>
+                        <a:srgbClr val="000000"/>
+                      </a:solidFill>
+                      <a:prstDash val="solid"/>
+                      <a:round/>
+                      <a:headEnd len="sm" w="sm" type="none"/>
+                      <a:tailEnd len="sm" w="sm" type="none"/>
+                    </a:lnL>
+                    <a:lnR cap="flat" cmpd="sng" w="9525">
+                      <a:solidFill>
+                        <a:srgbClr val="000000"/>
+                      </a:solidFill>
+                      <a:prstDash val="solid"/>
+                      <a:round/>
+                      <a:headEnd len="sm" w="sm" type="none"/>
+                      <a:tailEnd len="sm" w="sm" type="none"/>
+                    </a:lnR>
+                    <a:lnT cap="flat" cmpd="sng" w="9525">
+                      <a:solidFill>
+                        <a:srgbClr val="000000"/>
+                      </a:solidFill>
+                      <a:prstDash val="solid"/>
+                      <a:round/>
+                      <a:headEnd len="sm" w="sm" type="none"/>
+                      <a:tailEnd len="sm" w="sm" type="none"/>
+                    </a:lnT>
+                    <a:lnB cap="flat" cmpd="sng" w="9525">
+                      <a:solidFill>
+                        <a:srgbClr val="000000"/>
+                      </a:solidFill>
+                      <a:prstDash val="solid"/>
+                      <a:round/>
+                      <a:headEnd len="sm" w="sm" type="none"/>
+                      <a:tailEnd len="sm" w="sm" type="none"/>
+                    </a:lnB>
+                  </a:tcPr>
+                </a:tc>
+              </a:tr>
+              <a:tr h="97325">
+                <a:tc>
+                  <a:txBody>
+                    <a:bodyPr/>
+                    <a:lstStyle/>
+                    <a:p>
+                      <a:pPr indent="0" lvl="0" marL="0" rtl="0" algn="ctr">
+                        <a:lnSpc>
+                          <a:spcPct val="115000"/>
+                        </a:lnSpc>
+                        <a:spcBef>
+                          <a:spcPts val="1200"/>
+                        </a:spcBef>
+                        <a:spcAft>
+                          <a:spcPts val="1200"/>
+                        </a:spcAft>
+                        <a:buNone/>
+                      </a:pPr>
+                      <a:r>
+                        <a:rPr lang="en-US" sz="1100">
+                          <a:solidFill>
+                            <a:srgbClr val="188038"/>
+                          </a:solidFill>
+                          <a:latin typeface="Roboto Mono"/>
+                          <a:ea typeface="Roboto Mono"/>
+                          <a:cs typeface="Roboto Mono"/>
+                          <a:sym typeface="Roboto Mono"/>
+                        </a:rPr>
+                        <a:t>n8:16:32:64</a:t>
+                      </a:r>
+                      <a:endParaRPr sz="1100">
+                        <a:solidFill>
+                          <a:srgbClr val="188038"/>
+                        </a:solidFill>
+                        <a:latin typeface="Roboto Mono"/>
+                        <a:ea typeface="Roboto Mono"/>
+                        <a:cs typeface="Roboto Mono"/>
+                        <a:sym typeface="Roboto Mono"/>
+                      </a:endParaRPr>
+                    </a:p>
+                  </a:txBody>
+                  <a:tcPr marT="76200" marB="76200" marR="114300" marL="114300" anchor="ctr">
+                    <a:lnL cap="flat" cmpd="sng" w="9525">
+                      <a:solidFill>
+                        <a:srgbClr val="000000"/>
+                      </a:solidFill>
+                      <a:prstDash val="solid"/>
+                      <a:round/>
+                      <a:headEnd len="sm" w="sm" type="none"/>
+                      <a:tailEnd len="sm" w="sm" type="none"/>
+                    </a:lnL>
+                    <a:lnR cap="flat" cmpd="sng" w="9525">
+                      <a:solidFill>
+                        <a:srgbClr val="000000"/>
+                      </a:solidFill>
+                      <a:prstDash val="solid"/>
+                      <a:round/>
+                      <a:headEnd len="sm" w="sm" type="none"/>
+                      <a:tailEnd len="sm" w="sm" type="none"/>
+                    </a:lnR>
+                    <a:lnT cap="flat" cmpd="sng" w="9525">
+                      <a:solidFill>
+                        <a:srgbClr val="000000"/>
+                      </a:solidFill>
+                      <a:prstDash val="solid"/>
+                      <a:round/>
+                      <a:headEnd len="sm" w="sm" type="none"/>
+                      <a:tailEnd len="sm" w="sm" type="none"/>
+                    </a:lnT>
+                    <a:lnB cap="flat" cmpd="sng" w="9525">
+                      <a:solidFill>
+                        <a:srgbClr val="000000"/>
+                      </a:solidFill>
+                      <a:prstDash val="solid"/>
+                      <a:round/>
+                      <a:headEnd len="sm" w="sm" type="none"/>
+                      <a:tailEnd len="sm" w="sm" type="none"/>
+                    </a:lnB>
+                  </a:tcPr>
+                </a:tc>
+                <a:tc>
+                  <a:txBody>
+                    <a:bodyPr/>
+                    <a:lstStyle/>
+                    <a:p>
+                      <a:pPr indent="0" lvl="0" marL="0" rtl="0" algn="l">
+                        <a:lnSpc>
+                          <a:spcPct val="115000"/>
+                        </a:lnSpc>
+                        <a:spcBef>
+                          <a:spcPts val="1200"/>
+                        </a:spcBef>
+                        <a:spcAft>
+                          <a:spcPts val="1200"/>
+                        </a:spcAft>
+                        <a:buNone/>
+                      </a:pPr>
+                      <a:r>
+                        <a:rPr lang="en-US"/>
+                        <a:t>Native integer widths</a:t>
+                      </a:r>
+                      <a:endParaRPr/>
+                    </a:p>
+                  </a:txBody>
+                  <a:tcPr marT="76200" marB="76200" marR="114300" marL="114300">
+                    <a:lnL cap="flat" cmpd="sng" w="9525">
+                      <a:solidFill>
+                        <a:srgbClr val="000000"/>
+                      </a:solidFill>
+                      <a:prstDash val="solid"/>
+                      <a:round/>
+                      <a:headEnd len="sm" w="sm" type="none"/>
+                      <a:tailEnd len="sm" w="sm" type="none"/>
+                    </a:lnL>
+                    <a:lnR cap="flat" cmpd="sng" w="9525">
+                      <a:solidFill>
+                        <a:srgbClr val="000000"/>
+                      </a:solidFill>
+                      <a:prstDash val="solid"/>
+                      <a:round/>
+                      <a:headEnd len="sm" w="sm" type="none"/>
+                      <a:tailEnd len="sm" w="sm" type="none"/>
+                    </a:lnR>
+                    <a:lnT cap="flat" cmpd="sng" w="9525">
+                      <a:solidFill>
+                        <a:srgbClr val="000000"/>
+                      </a:solidFill>
+                      <a:prstDash val="solid"/>
+                      <a:round/>
+                      <a:headEnd len="sm" w="sm" type="none"/>
+                      <a:tailEnd len="sm" w="sm" type="none"/>
+                    </a:lnT>
+                    <a:lnB cap="flat" cmpd="sng" w="9525">
+                      <a:solidFill>
+                        <a:srgbClr val="000000"/>
+                      </a:solidFill>
+                      <a:prstDash val="solid"/>
+                      <a:round/>
+                      <a:headEnd len="sm" w="sm" type="none"/>
+                      <a:tailEnd len="sm" w="sm" type="none"/>
+                    </a:lnB>
+                  </a:tcPr>
+                </a:tc>
+              </a:tr>
+              <a:tr h="97325">
+                <a:tc>
+                  <a:txBody>
+                    <a:bodyPr/>
+                    <a:lstStyle/>
+                    <a:p>
+                      <a:pPr indent="0" lvl="0" marL="0" rtl="0" algn="ctr">
+                        <a:lnSpc>
+                          <a:spcPct val="115000"/>
+                        </a:lnSpc>
+                        <a:spcBef>
+                          <a:spcPts val="1200"/>
+                        </a:spcBef>
+                        <a:spcAft>
+                          <a:spcPts val="1200"/>
+                        </a:spcAft>
+                        <a:buNone/>
+                      </a:pPr>
+                      <a:r>
+                        <a:rPr lang="en-US" sz="1100">
+                          <a:solidFill>
+                            <a:srgbClr val="188038"/>
+                          </a:solidFill>
+                          <a:latin typeface="Roboto Mono"/>
+                          <a:ea typeface="Roboto Mono"/>
+                          <a:cs typeface="Roboto Mono"/>
+                          <a:sym typeface="Roboto Mono"/>
+                        </a:rPr>
+                        <a:t>S128</a:t>
+                      </a:r>
+                      <a:endParaRPr sz="1100">
+                        <a:solidFill>
+                          <a:srgbClr val="188038"/>
+                        </a:solidFill>
+                        <a:latin typeface="Roboto Mono"/>
+                        <a:ea typeface="Roboto Mono"/>
+                        <a:cs typeface="Roboto Mono"/>
+                        <a:sym typeface="Roboto Mono"/>
+                      </a:endParaRPr>
+                    </a:p>
+                  </a:txBody>
+                  <a:tcPr marT="76200" marB="76200" marR="114300" marL="114300" anchor="ctr">
+                    <a:lnL cap="flat" cmpd="sng" w="9525">
+                      <a:solidFill>
+                        <a:srgbClr val="000000"/>
+                      </a:solidFill>
+                      <a:prstDash val="solid"/>
+                      <a:round/>
+                      <a:headEnd len="sm" w="sm" type="none"/>
+                      <a:tailEnd len="sm" w="sm" type="none"/>
+                    </a:lnL>
+                    <a:lnR cap="flat" cmpd="sng" w="9525">
+                      <a:solidFill>
+                        <a:srgbClr val="000000"/>
+                      </a:solidFill>
+                      <a:prstDash val="solid"/>
+                      <a:round/>
+                      <a:headEnd len="sm" w="sm" type="none"/>
+                      <a:tailEnd len="sm" w="sm" type="none"/>
+                    </a:lnR>
+                    <a:lnT cap="flat" cmpd="sng" w="9525">
+                      <a:solidFill>
+                        <a:srgbClr val="000000"/>
+                      </a:solidFill>
+                      <a:prstDash val="solid"/>
+                      <a:round/>
+                      <a:headEnd len="sm" w="sm" type="none"/>
+                      <a:tailEnd len="sm" w="sm" type="none"/>
+                    </a:lnT>
+                    <a:lnB cap="flat" cmpd="sng" w="9525">
+                      <a:solidFill>
+                        <a:srgbClr val="000000"/>
+                      </a:solidFill>
+                      <a:prstDash val="solid"/>
+                      <a:round/>
+                      <a:headEnd len="sm" w="sm" type="none"/>
+                      <a:tailEnd len="sm" w="sm" type="none"/>
+                    </a:lnB>
+                  </a:tcPr>
+                </a:tc>
+                <a:tc>
+                  <a:txBody>
+                    <a:bodyPr/>
+                    <a:lstStyle/>
+                    <a:p>
+                      <a:pPr indent="0" lvl="0" marL="0" rtl="0" algn="l">
+                        <a:lnSpc>
+                          <a:spcPct val="115000"/>
+                        </a:lnSpc>
+                        <a:spcBef>
+                          <a:spcPts val="1200"/>
+                        </a:spcBef>
+                        <a:spcAft>
+                          <a:spcPts val="1200"/>
+                        </a:spcAft>
+                        <a:buNone/>
+                      </a:pPr>
+                      <a:r>
+                        <a:rPr lang="en-US"/>
+                        <a:t>Natural stack alignment is 128 bits</a:t>
+                      </a:r>
+                      <a:endParaRPr/>
+                    </a:p>
+                  </a:txBody>
+                  <a:tcPr marT="76200" marB="76200" marR="114300" marL="114300">
+                    <a:lnL cap="flat" cmpd="sng" w="9525">
+                      <a:solidFill>
+                        <a:srgbClr val="000000"/>
+                      </a:solidFill>
+                      <a:prstDash val="solid"/>
+                      <a:round/>
+                      <a:headEnd len="sm" w="sm" type="none"/>
+                      <a:tailEnd len="sm" w="sm" type="none"/>
+                    </a:lnL>
+                    <a:lnR cap="flat" cmpd="sng" w="9525">
+                      <a:solidFill>
+                        <a:srgbClr val="000000"/>
+                      </a:solidFill>
+                      <a:prstDash val="solid"/>
+                      <a:round/>
+                      <a:headEnd len="sm" w="sm" type="none"/>
+                      <a:tailEnd len="sm" w="sm" type="none"/>
+                    </a:lnR>
+                    <a:lnT cap="flat" cmpd="sng" w="9525">
+                      <a:solidFill>
+                        <a:srgbClr val="000000"/>
+                      </a:solidFill>
+                      <a:prstDash val="solid"/>
+                      <a:round/>
+                      <a:headEnd len="sm" w="sm" type="none"/>
+                      <a:tailEnd len="sm" w="sm" type="none"/>
+                    </a:lnT>
+                    <a:lnB cap="flat" cmpd="sng" w="9525">
+                      <a:solidFill>
+                        <a:srgbClr val="000000"/>
+                      </a:solidFill>
+                      <a:prstDash val="solid"/>
+                      <a:round/>
+                      <a:headEnd len="sm" w="sm" type="none"/>
+                      <a:tailEnd len="sm" w="sm" type="none"/>
+                    </a:lnB>
+                  </a:tcPr>
+                </a:tc>
+              </a:tr>
+              <a:tr h="97325">
+                <a:tc>
+                  <a:txBody>
+                    <a:bodyPr/>
+                    <a:lstStyle/>
+                    <a:p>
+                      <a:pPr indent="0" lvl="0" marL="0" rtl="0" algn="ctr">
+                        <a:lnSpc>
+                          <a:spcPct val="115000"/>
+                        </a:lnSpc>
+                        <a:spcBef>
+                          <a:spcPts val="1200"/>
+                        </a:spcBef>
+                        <a:spcAft>
+                          <a:spcPts val="1200"/>
+                        </a:spcAft>
+                        <a:buNone/>
+                      </a:pPr>
+                      <a:r>
+                        <a:rPr lang="en-US" sz="1100">
+                          <a:solidFill>
+                            <a:srgbClr val="188038"/>
+                          </a:solidFill>
+                          <a:latin typeface="Roboto Mono"/>
+                          <a:ea typeface="Roboto Mono"/>
+                          <a:cs typeface="Roboto Mono"/>
+                          <a:sym typeface="Roboto Mono"/>
+                        </a:rPr>
+                        <a:t>p:64:64</a:t>
+                      </a:r>
+                      <a:endParaRPr sz="1100">
+                        <a:solidFill>
+                          <a:srgbClr val="188038"/>
+                        </a:solidFill>
+                        <a:latin typeface="Roboto Mono"/>
+                        <a:ea typeface="Roboto Mono"/>
+                        <a:cs typeface="Roboto Mono"/>
+                        <a:sym typeface="Roboto Mono"/>
+                      </a:endParaRPr>
+                    </a:p>
+                  </a:txBody>
+                  <a:tcPr marT="76200" marB="76200" marR="114300" marL="114300" anchor="ctr">
+                    <a:lnL cap="flat" cmpd="sng" w="9525">
+                      <a:solidFill>
+                        <a:srgbClr val="000000"/>
+                      </a:solidFill>
+                      <a:prstDash val="solid"/>
+                      <a:round/>
+                      <a:headEnd len="sm" w="sm" type="none"/>
+                      <a:tailEnd len="sm" w="sm" type="none"/>
+                    </a:lnL>
+                    <a:lnR cap="flat" cmpd="sng" w="9525">
+                      <a:solidFill>
+                        <a:srgbClr val="000000"/>
+                      </a:solidFill>
+                      <a:prstDash val="solid"/>
+                      <a:round/>
+                      <a:headEnd len="sm" w="sm" type="none"/>
+                      <a:tailEnd len="sm" w="sm" type="none"/>
+                    </a:lnR>
+                    <a:lnT cap="flat" cmpd="sng" w="9525">
+                      <a:solidFill>
+                        <a:srgbClr val="000000"/>
+                      </a:solidFill>
+                      <a:prstDash val="solid"/>
+                      <a:round/>
+                      <a:headEnd len="sm" w="sm" type="none"/>
+                      <a:tailEnd len="sm" w="sm" type="none"/>
+                    </a:lnT>
+                    <a:lnB cap="flat" cmpd="sng" w="9525">
+                      <a:solidFill>
+                        <a:srgbClr val="000000"/>
+                      </a:solidFill>
+                      <a:prstDash val="solid"/>
+                      <a:round/>
+                      <a:headEnd len="sm" w="sm" type="none"/>
+                      <a:tailEnd len="sm" w="sm" type="none"/>
+                    </a:lnB>
+                  </a:tcPr>
+                </a:tc>
+                <a:tc>
+                  <a:txBody>
+                    <a:bodyPr/>
+                    <a:lstStyle/>
+                    <a:p>
+                      <a:pPr indent="0" lvl="0" marL="0" rtl="0" algn="l">
+                        <a:lnSpc>
+                          <a:spcPct val="115000"/>
+                        </a:lnSpc>
+                        <a:spcBef>
+                          <a:spcPts val="1200"/>
+                        </a:spcBef>
+                        <a:spcAft>
+                          <a:spcPts val="1200"/>
+                        </a:spcAft>
+                        <a:buNone/>
+                      </a:pPr>
+                      <a:r>
+                        <a:rPr lang="en-US"/>
+                        <a:t>64-bit pointers with 64-bit alignment</a:t>
+                      </a:r>
+                      <a:endParaRPr/>
+                    </a:p>
+                  </a:txBody>
+                  <a:tcPr marT="76200" marB="76200" marR="114300" marL="114300">
+                    <a:lnL cap="flat" cmpd="sng" w="9525">
+                      <a:solidFill>
+                        <a:srgbClr val="000000"/>
+                      </a:solidFill>
+                      <a:prstDash val="solid"/>
+                      <a:round/>
+                      <a:headEnd len="sm" w="sm" type="none"/>
+                      <a:tailEnd len="sm" w="sm" type="none"/>
+                    </a:lnL>
+                    <a:lnR cap="flat" cmpd="sng" w="9525">
+                      <a:solidFill>
+                        <a:srgbClr val="000000"/>
+                      </a:solidFill>
+                      <a:prstDash val="solid"/>
+                      <a:round/>
+                      <a:headEnd len="sm" w="sm" type="none"/>
+                      <a:tailEnd len="sm" w="sm" type="none"/>
+                    </a:lnR>
+                    <a:lnT cap="flat" cmpd="sng" w="9525">
+                      <a:solidFill>
+                        <a:srgbClr val="000000"/>
+                      </a:solidFill>
+                      <a:prstDash val="solid"/>
+                      <a:round/>
+                      <a:headEnd len="sm" w="sm" type="none"/>
+                      <a:tailEnd len="sm" w="sm" type="none"/>
+                    </a:lnT>
+                    <a:lnB cap="flat" cmpd="sng" w="9525">
+                      <a:solidFill>
+                        <a:srgbClr val="000000"/>
+                      </a:solidFill>
+                      <a:prstDash val="solid"/>
+                      <a:round/>
+                      <a:headEnd len="sm" w="sm" type="none"/>
+                      <a:tailEnd len="sm" w="sm" type="none"/>
+                    </a:lnB>
+                  </a:tcPr>
+                </a:tc>
+              </a:tr>
+            </a:tbl>
+          </a:graphicData>
+        </a:graphic>
+      </p:graphicFrame>
+      <p:sp>
+        <p:nvSpPr>
+          <p:cNvPr id="502" name="Google Shape;502;g3f453c19afd_0_3"/>
+          <p:cNvSpPr txBox="1"/>
+          <p:nvPr/>
+        </p:nvSpPr>
+        <p:spPr>
+          <a:xfrm>
+            <a:off x="689725" y="4776225"/>
+            <a:ext cx="9363000" cy="2124000"/>
+          </a:xfrm>
+          <a:prstGeom prst="rect">
+            <a:avLst/>
+          </a:prstGeom>
+          <a:noFill/>
+          <a:ln>
+            <a:noFill/>
+          </a:ln>
+        </p:spPr>
+        <p:txBody>
+          <a:bodyPr anchorCtr="0" anchor="t" bIns="91425" lIns="91425" spcFirstLastPara="1" rIns="91425" wrap="square" tIns="91425">
+            <a:spAutoFit/>
+          </a:bodyPr>
+          <a:lstStyle/>
           <a:p>
-            <a:pPr indent="-342900" lvl="1" marL="914400" rtl="0" algn="l">
-              <a:spcBef>
-                <a:spcPts val="0"/>
-              </a:spcBef>
-              <a:spcAft>
-                <a:spcPts val="0"/>
-              </a:spcAft>
-              <a:buSzPts val="1800"/>
-              <a:buFont typeface="Consolas"/>
-              <a:buChar char="•"/>
+            <a:pPr indent="0" lvl="0" marL="0" rtl="0" algn="l">
+              <a:lnSpc>
+                <a:spcPct val="100000"/>
+              </a:lnSpc>
+              <a:spcBef>
+                <a:spcPts val="0"/>
+              </a:spcBef>
+              <a:spcAft>
+                <a:spcPts val="0"/>
+              </a:spcAft>
+              <a:buNone/>
             </a:pPr>
             <a:r>
               <a:rPr lang="en-US">
+                <a:solidFill>
+                  <a:schemeClr val="dk1"/>
+                </a:solidFill>
                 <a:latin typeface="Consolas"/>
                 <a:ea typeface="Consolas"/>
                 <a:cs typeface="Consolas"/>
                 <a:sym typeface="Consolas"/>
               </a:rPr>
-              <a:t>clang -emit-llvm -c source.c -o source.bc</a:t>
+              <a:t>source_filename = </a:t>
+            </a:r>
+            <a:r>
+              <a:rPr lang="en-US">
+                <a:solidFill>
+                  <a:srgbClr val="A31515"/>
+                </a:solidFill>
+                <a:latin typeface="Consolas"/>
+                <a:ea typeface="Consolas"/>
+                <a:cs typeface="Consolas"/>
+                <a:sym typeface="Consolas"/>
+              </a:rPr>
+              <a:t>"example.c"</a:t>
             </a:r>
             <a:endParaRPr>
+              <a:solidFill>
+                <a:srgbClr val="A31515"/>
+              </a:solidFill>
               <a:latin typeface="Consolas"/>
               <a:ea typeface="Consolas"/>
               <a:cs typeface="Consolas"/>
@@ -33993,44 +36788,82 @@
             </a:endParaRPr>
           </a:p>
           <a:p>
-            <a:pPr indent="-342900" lvl="0" marL="457200" rtl="0" algn="l">
-              <a:spcBef>
-                <a:spcPts val="0"/>
-              </a:spcBef>
-              <a:spcAft>
-                <a:spcPts val="0"/>
-              </a:spcAft>
-              <a:buSzPts val="1800"/>
-              <a:buChar char="▪"/>
+            <a:pPr indent="0" lvl="0" marL="0" rtl="0" algn="l">
+              <a:lnSpc>
+                <a:spcPct val="100000"/>
+              </a:lnSpc>
+              <a:spcBef>
+                <a:spcPts val="0"/>
+              </a:spcBef>
+              <a:spcAft>
+                <a:spcPts val="0"/>
+              </a:spcAft>
+              <a:buNone/>
             </a:pPr>
             <a:r>
-              <a:rPr lang="en-US"/>
-              <a:t>Converting LLVM IR Bitcode to Human-Readable Format</a:t>
-            </a:r>
-            <a:endParaRPr/>
-          </a:p>
-          <a:p>
-            <a:pPr indent="-342900" lvl="1" marL="914400" rtl="0" algn="l">
-              <a:spcBef>
-                <a:spcPts val="0"/>
-              </a:spcBef>
-              <a:spcAft>
-                <a:spcPts val="0"/>
-              </a:spcAft>
-              <a:buSzPts val="1800"/>
-              <a:buFont typeface="Consolas"/>
-              <a:buChar char="•"/>
-            </a:pPr>
-            <a:r>
               <a:rPr lang="en-US">
+                <a:solidFill>
+                  <a:srgbClr val="0000FF"/>
+                </a:solidFill>
                 <a:latin typeface="Consolas"/>
                 <a:ea typeface="Consolas"/>
                 <a:cs typeface="Consolas"/>
                 <a:sym typeface="Consolas"/>
               </a:rPr>
-              <a:t>llvm-dis source.bc -o source.ll</a:t>
+              <a:t>target</a:t>
+            </a:r>
+            <a:r>
+              <a:rPr lang="en-US">
+                <a:solidFill>
+                  <a:schemeClr val="dk1"/>
+                </a:solidFill>
+                <a:latin typeface="Consolas"/>
+                <a:ea typeface="Consolas"/>
+                <a:cs typeface="Consolas"/>
+                <a:sym typeface="Consolas"/>
+              </a:rPr>
+              <a:t> </a:t>
+            </a:r>
+            <a:r>
+              <a:rPr lang="en-US">
+                <a:solidFill>
+                  <a:srgbClr val="0000FF"/>
+                </a:solidFill>
+                <a:latin typeface="Consolas"/>
+                <a:ea typeface="Consolas"/>
+                <a:cs typeface="Consolas"/>
+                <a:sym typeface="Consolas"/>
+              </a:rPr>
+              <a:t>triple</a:t>
+            </a:r>
+            <a:r>
+              <a:rPr lang="en-US">
+                <a:solidFill>
+                  <a:schemeClr val="dk1"/>
+                </a:solidFill>
+                <a:latin typeface="Consolas"/>
+                <a:ea typeface="Consolas"/>
+                <a:cs typeface="Consolas"/>
+                <a:sym typeface="Consolas"/>
+              </a:rPr>
+              <a:t> = </a:t>
+            </a:r>
+            <a:r>
+              <a:rPr lang="en-US">
+                <a:solidFill>
+                  <a:srgbClr val="A31515"/>
+                </a:solidFill>
+                <a:latin typeface="Consolas"/>
+                <a:ea typeface="Consolas"/>
+                <a:cs typeface="Consolas"/>
+                <a:sym typeface="Consolas"/>
+              </a:rPr>
+              <a:t>"x86_64-pc-linux-gnu"</a:t>
             </a:r>
             <a:endParaRPr>
+              <a:solidFill>
+                <a:srgbClr val="A31515"/>
+              </a:solidFill>
               <a:latin typeface="Consolas"/>
               <a:ea typeface="Consolas"/>
               <a:cs typeface="Consolas"/>
@@ -34038,44 +36871,82 @@
             </a:endParaRPr>
           </a:p>
           <a:p>
-            <a:pPr indent="-342900" lvl="0" marL="457200" rtl="0" algn="l">
-              <a:spcBef>
-                <a:spcPts val="0"/>
-              </a:spcBef>
-              <a:spcAft>
-                <a:spcPts val="0"/>
-              </a:spcAft>
-              <a:buSzPts val="1800"/>
-              <a:buChar char="▪"/>
+            <a:pPr indent="0" lvl="0" marL="0" rtl="0" algn="l">
+              <a:lnSpc>
+                <a:spcPct val="100000"/>
+              </a:lnSpc>
+              <a:spcBef>
+                <a:spcPts val="0"/>
+              </a:spcBef>
+              <a:spcAft>
+                <a:spcPts val="0"/>
+              </a:spcAft>
+              <a:buNone/>
             </a:pPr>
             <a:r>
-              <a:rPr lang="en-US"/>
-              <a:t>Converting Human-Readable LLVM IR to Bitcode</a:t>
-            </a:r>
-            <a:endParaRPr/>
-          </a:p>
-          <a:p>
-            <a:pPr indent="-342900" lvl="1" marL="914400" rtl="0" algn="l">
-              <a:spcBef>
-                <a:spcPts val="0"/>
-              </a:spcBef>
-              <a:spcAft>
-                <a:spcPts val="0"/>
-              </a:spcAft>
-              <a:buSzPts val="1800"/>
-              <a:buFont typeface="Consolas"/>
-              <a:buChar char="•"/>
-            </a:pPr>
-            <a:r>
               <a:rPr lang="en-US">
+                <a:solidFill>
+                  <a:srgbClr val="0000FF"/>
+                </a:solidFill>
                 <a:latin typeface="Consolas"/>
                 <a:ea typeface="Consolas"/>
                 <a:cs typeface="Consolas"/>
                 <a:sym typeface="Consolas"/>
               </a:rPr>
-              <a:t>llvm-as source.ll -o source.bc</a:t>
+              <a:t>target</a:t>
+            </a:r>
+            <a:r>
+              <a:rPr lang="en-US">
+                <a:solidFill>
+                  <a:schemeClr val="dk1"/>
+                </a:solidFill>
+                <a:latin typeface="Consolas"/>
+                <a:ea typeface="Consolas"/>
+                <a:cs typeface="Consolas"/>
+                <a:sym typeface="Consolas"/>
+              </a:rPr>
+              <a:t> </a:t>
+            </a:r>
+            <a:r>
+              <a:rPr lang="en-US">
+                <a:solidFill>
+                  <a:srgbClr val="0000FF"/>
+                </a:solidFill>
+                <a:latin typeface="Consolas"/>
+                <a:ea typeface="Consolas"/>
+                <a:cs typeface="Consolas"/>
+                <a:sym typeface="Consolas"/>
+              </a:rPr>
+              <a:t>datalayout</a:t>
+            </a:r>
+            <a:r>
+              <a:rPr lang="en-US">
+                <a:solidFill>
+                  <a:schemeClr val="dk1"/>
+                </a:solidFill>
+                <a:latin typeface="Consolas"/>
+                <a:ea typeface="Consolas"/>
+                <a:cs typeface="Consolas"/>
+                <a:sym typeface="Consolas"/>
+              </a:rPr>
+              <a:t> = </a:t>
+            </a:r>
+            <a:r>
+              <a:rPr lang="en-US">
+                <a:solidFill>
+                  <a:srgbClr val="A31515"/>
+                </a:solidFill>
+                <a:latin typeface="Consolas"/>
+                <a:ea typeface="Consolas"/>
+                <a:cs typeface="Consolas"/>
+                <a:sym typeface="Consolas"/>
+              </a:rPr>
+              <a:t>"e-m:e-p270:32:32-p271:32:32-p272:64:64-i64:64-f80:128-n8:16:32:64-S128"</a:t>
             </a:r>
             <a:endParaRPr>
+              <a:solidFill>
+                <a:srgbClr val="A31515"/>
+              </a:solidFill>
               <a:latin typeface="Consolas"/>
               <a:ea typeface="Consolas"/>
               <a:cs typeface="Consolas"/>
@@ -34083,44 +36954,25 @@
             </a:endParaRPr>
           </a:p>
           <a:p>
-            <a:pPr indent="-342900" lvl="0" marL="457200" rtl="0" algn="l">
-              <a:spcBef>
-                <a:spcPts val="0"/>
-              </a:spcBef>
-              <a:spcAft>
-                <a:spcPts val="0"/>
-              </a:spcAft>
-              <a:buSzPts val="1800"/>
-              <a:buChar char="▪"/>
+            <a:pPr indent="0" lvl="0" marL="0" rtl="0" algn="l">
+              <a:lnSpc>
+                <a:spcPct val="100000"/>
+              </a:lnSpc>
+              <a:spcBef>
+                <a:spcPts val="0"/>
+              </a:spcBef>
+              <a:spcAft>
+                <a:spcPts val="0"/>
+              </a:spcAft>
+              <a:buNone/>
             </a:pPr>
             <a:r>
-              <a:rPr lang="en-US"/>
-              <a:t>Linking Multiple LLVM Bitcode Files</a:t>
-            </a:r>
-            <a:endParaRPr/>
-          </a:p>
-          <a:p>
-            <a:pPr indent="-342900" lvl="1" marL="914400" rtl="0" algn="l">
-              <a:spcBef>
-                <a:spcPts val="0"/>
-              </a:spcBef>
-              <a:spcAft>
-                <a:spcPts val="0"/>
-              </a:spcAft>
-              <a:buSzPts val="1800"/>
-              <a:buFont typeface="Consolas"/>
-              <a:buChar char="•"/>
-            </a:pPr>
-            <a:r>
-              <a:rPr lang="en-US">
-                <a:latin typeface="Consolas"/>
-                <a:ea typeface="Consolas"/>
-                <a:cs typeface="Consolas"/>
-                <a:sym typeface="Consolas"/>
-              </a:rPr>
-              <a:t>llvm-link file1.bc file2.bc -o combined.bc</a:t>
+              <a:t/>
             </a:r>
             <a:endParaRPr>
+              <a:solidFill>
+                <a:schemeClr val="dk1"/>
+              </a:solidFill>
               <a:latin typeface="Consolas"/>
               <a:ea typeface="Consolas"/>
               <a:cs typeface="Consolas"/>
@@ -34128,55 +36980,498 @@
             </a:endParaRPr>
           </a:p>
           <a:p>
-            <a:pPr indent="-342900" lvl="0" marL="457200" rtl="0" algn="l">
-              <a:spcBef>
-                <a:spcPts val="0"/>
-              </a:spcBef>
-              <a:spcAft>
-                <a:spcPts val="0"/>
-              </a:spcAft>
-              <a:buSzPts val="1800"/>
-              <a:buFont typeface="Calibri"/>
-              <a:buChar char="▪"/>
+            <a:pPr indent="0" lvl="0" marL="0" rtl="0" algn="l">
+              <a:lnSpc>
+                <a:spcPct val="100000"/>
+              </a:lnSpc>
+              <a:spcBef>
+                <a:spcPts val="0"/>
+              </a:spcBef>
+              <a:spcAft>
+                <a:spcPts val="0"/>
+              </a:spcAft>
+              <a:buNone/>
             </a:pPr>
             <a:r>
               <a:rPr lang="en-US">
-                <a:latin typeface="Calibri"/>
-                <a:ea typeface="Calibri"/>
-                <a:cs typeface="Calibri"/>
-                <a:sym typeface="Calibri"/>
-              </a:rPr>
-              <a:t>Execute LLVM IR bitcode</a:t>
-            </a:r>
-            <a:endParaRPr>
-              <a:latin typeface="Calibri"/>
-              <a:ea typeface="Calibri"/>
-              <a:cs typeface="Calibri"/>
-              <a:sym typeface="Calibri"/>
-            </a:endParaRPr>
-          </a:p>
-          <a:p>
-            <a:pPr indent="-342900" lvl="1" marL="914400" rtl="0" algn="l">
-              <a:spcBef>
-                <a:spcPts val="0"/>
-              </a:spcBef>
-              <a:spcAft>
-                <a:spcPts val="0"/>
-              </a:spcAft>
-              <a:buSzPts val="1800"/>
-              <a:buFont typeface="Consolas"/>
-              <a:buChar char="•"/>
-            </a:pPr>
-            <a:r>
-              <a:rPr lang="en-US">
+                <a:solidFill>
+                  <a:srgbClr val="0000FF"/>
+                </a:solidFill>
                 <a:latin typeface="Consolas"/>
                 <a:ea typeface="Consolas"/>
                 <a:cs typeface="Consolas"/>
                 <a:sym typeface="Consolas"/>
               </a:rPr>
-              <a:t>lli source.bc</a:t>
+              <a:t>define</a:t>
+            </a:r>
+            <a:r>
+              <a:rPr lang="en-US">
+                <a:solidFill>
+                  <a:schemeClr val="dk1"/>
+                </a:solidFill>
+                <a:latin typeface="Consolas"/>
+                <a:ea typeface="Consolas"/>
+                <a:cs typeface="Consolas"/>
+                <a:sym typeface="Consolas"/>
+              </a:rPr>
+              <a:t> </a:t>
+            </a:r>
+            <a:r>
+              <a:rPr lang="en-US">
+                <a:solidFill>
+                  <a:srgbClr val="0000FF"/>
+                </a:solidFill>
+                <a:latin typeface="Consolas"/>
+                <a:ea typeface="Consolas"/>
+                <a:cs typeface="Consolas"/>
+                <a:sym typeface="Consolas"/>
+              </a:rPr>
+              <a:t>i32</a:t>
+            </a:r>
+            <a:r>
+              <a:rPr lang="en-US">
+                <a:solidFill>
+                  <a:schemeClr val="dk1"/>
+                </a:solidFill>
+                <a:latin typeface="Consolas"/>
+                <a:ea typeface="Consolas"/>
+                <a:cs typeface="Consolas"/>
+                <a:sym typeface="Consolas"/>
+              </a:rPr>
+              <a:t> </a:t>
+            </a:r>
+            <a:r>
+              <a:rPr lang="en-US">
+                <a:solidFill>
+                  <a:srgbClr val="0000FF"/>
+                </a:solidFill>
+                <a:latin typeface="Consolas"/>
+                <a:ea typeface="Consolas"/>
+                <a:cs typeface="Consolas"/>
+                <a:sym typeface="Consolas"/>
+              </a:rPr>
+              <a:t>@add</a:t>
+            </a:r>
+            <a:r>
+              <a:rPr lang="en-US">
+                <a:solidFill>
+                  <a:schemeClr val="dk1"/>
+                </a:solidFill>
+                <a:latin typeface="Consolas"/>
+                <a:ea typeface="Consolas"/>
+                <a:cs typeface="Consolas"/>
+                <a:sym typeface="Consolas"/>
+              </a:rPr>
+              <a:t>(</a:t>
+            </a:r>
+            <a:r>
+              <a:rPr lang="en-US">
+                <a:solidFill>
+                  <a:srgbClr val="0000FF"/>
+                </a:solidFill>
+                <a:latin typeface="Consolas"/>
+                <a:ea typeface="Consolas"/>
+                <a:cs typeface="Consolas"/>
+                <a:sym typeface="Consolas"/>
+              </a:rPr>
+              <a:t>i32</a:t>
+            </a:r>
+            <a:r>
+              <a:rPr lang="en-US">
+                <a:solidFill>
+                  <a:schemeClr val="dk1"/>
+                </a:solidFill>
+                <a:latin typeface="Consolas"/>
+                <a:ea typeface="Consolas"/>
+                <a:cs typeface="Consolas"/>
+                <a:sym typeface="Consolas"/>
+              </a:rPr>
+              <a:t> </a:t>
+            </a:r>
+            <a:r>
+              <a:rPr lang="en-US">
+                <a:solidFill>
+                  <a:srgbClr val="0000FF"/>
+                </a:solidFill>
+                <a:latin typeface="Consolas"/>
+                <a:ea typeface="Consolas"/>
+                <a:cs typeface="Consolas"/>
+                <a:sym typeface="Consolas"/>
+              </a:rPr>
+              <a:t>%a</a:t>
+            </a:r>
+            <a:r>
+              <a:rPr lang="en-US">
+                <a:solidFill>
+                  <a:schemeClr val="dk1"/>
+                </a:solidFill>
+                <a:latin typeface="Consolas"/>
+                <a:ea typeface="Consolas"/>
+                <a:cs typeface="Consolas"/>
+                <a:sym typeface="Consolas"/>
+              </a:rPr>
+              <a:t>, </a:t>
+            </a:r>
+            <a:r>
+              <a:rPr lang="en-US">
+                <a:solidFill>
+                  <a:srgbClr val="0000FF"/>
+                </a:solidFill>
+                <a:latin typeface="Consolas"/>
+                <a:ea typeface="Consolas"/>
+                <a:cs typeface="Consolas"/>
+                <a:sym typeface="Consolas"/>
+              </a:rPr>
+              <a:t>i32</a:t>
+            </a:r>
+            <a:r>
+              <a:rPr lang="en-US">
+                <a:solidFill>
+                  <a:schemeClr val="dk1"/>
+                </a:solidFill>
+                <a:latin typeface="Consolas"/>
+                <a:ea typeface="Consolas"/>
+                <a:cs typeface="Consolas"/>
+                <a:sym typeface="Consolas"/>
+              </a:rPr>
+              <a:t> </a:t>
+            </a:r>
+            <a:r>
+              <a:rPr lang="en-US">
+                <a:solidFill>
+                  <a:srgbClr val="0000FF"/>
+                </a:solidFill>
+                <a:latin typeface="Consolas"/>
+                <a:ea typeface="Consolas"/>
+                <a:cs typeface="Consolas"/>
+                <a:sym typeface="Consolas"/>
+              </a:rPr>
+              <a:t>%b</a:t>
+            </a:r>
+            <a:r>
+              <a:rPr lang="en-US">
+                <a:solidFill>
+                  <a:schemeClr val="dk1"/>
+                </a:solidFill>
+                <a:latin typeface="Consolas"/>
+                <a:ea typeface="Consolas"/>
+                <a:cs typeface="Consolas"/>
+                <a:sym typeface="Consolas"/>
+              </a:rPr>
+              <a:t>) {</a:t>
             </a:r>
             <a:endParaRPr>
+              <a:solidFill>
+                <a:schemeClr val="dk1"/>
+              </a:solidFill>
+              <a:latin typeface="Consolas"/>
+              <a:ea typeface="Consolas"/>
+              <a:cs typeface="Consolas"/>
+              <a:sym typeface="Consolas"/>
+            </a:endParaRPr>
+          </a:p>
+          <a:p>
+            <a:pPr indent="0" lvl="0" marL="0" rtl="0" algn="l">
+              <a:lnSpc>
+                <a:spcPct val="100000"/>
+              </a:lnSpc>
+              <a:spcBef>
+                <a:spcPts val="0"/>
+              </a:spcBef>
+              <a:spcAft>
+                <a:spcPts val="0"/>
+              </a:spcAft>
+              <a:buNone/>
+            </a:pPr>
+            <a:r>
+              <a:rPr lang="en-US">
+                <a:solidFill>
+                  <a:schemeClr val="dk1"/>
+                </a:solidFill>
+                <a:latin typeface="Consolas"/>
+                <a:ea typeface="Consolas"/>
+                <a:cs typeface="Consolas"/>
+                <a:sym typeface="Consolas"/>
+              </a:rPr>
+              <a:t>entry:</a:t>
+            </a:r>
+            <a:endParaRPr>
+              <a:solidFill>
+                <a:schemeClr val="dk1"/>
+              </a:solidFill>
+              <a:latin typeface="Consolas"/>
+              <a:ea typeface="Consolas"/>
+              <a:cs typeface="Consolas"/>
+              <a:sym typeface="Consolas"/>
+            </a:endParaRPr>
+          </a:p>
+          <a:p>
+            <a:pPr indent="0" lvl="0" marL="0" rtl="0" algn="l">
+              <a:lnSpc>
+                <a:spcPct val="100000"/>
+              </a:lnSpc>
+              <a:spcBef>
+                <a:spcPts val="0"/>
+              </a:spcBef>
+              <a:spcAft>
+                <a:spcPts val="0"/>
+              </a:spcAft>
+              <a:buNone/>
+            </a:pPr>
+            <a:r>
+              <a:rPr lang="en-US">
+                <a:solidFill>
+                  <a:schemeClr val="dk1"/>
+                </a:solidFill>
+                <a:latin typeface="Consolas"/>
+                <a:ea typeface="Consolas"/>
+                <a:cs typeface="Consolas"/>
+                <a:sym typeface="Consolas"/>
+              </a:rPr>
+              <a:t> </a:t>
+            </a:r>
+            <a:r>
+              <a:rPr lang="en-US">
+                <a:solidFill>
+                  <a:srgbClr val="0000FF"/>
+                </a:solidFill>
+                <a:latin typeface="Consolas"/>
+                <a:ea typeface="Consolas"/>
+                <a:cs typeface="Consolas"/>
+                <a:sym typeface="Consolas"/>
+              </a:rPr>
+              <a:t>%sum</a:t>
+            </a:r>
+            <a:r>
+              <a:rPr lang="en-US">
+                <a:solidFill>
+                  <a:schemeClr val="dk1"/>
+                </a:solidFill>
+                <a:latin typeface="Consolas"/>
+                <a:ea typeface="Consolas"/>
+                <a:cs typeface="Consolas"/>
+                <a:sym typeface="Consolas"/>
+              </a:rPr>
+              <a:t> = </a:t>
+            </a:r>
+            <a:r>
+              <a:rPr lang="en-US">
+                <a:solidFill>
+                  <a:srgbClr val="0000FF"/>
+                </a:solidFill>
+                <a:latin typeface="Consolas"/>
+                <a:ea typeface="Consolas"/>
+                <a:cs typeface="Consolas"/>
+                <a:sym typeface="Consolas"/>
+              </a:rPr>
+              <a:t>add</a:t>
+            </a:r>
+            <a:r>
+              <a:rPr lang="en-US">
+                <a:solidFill>
+                  <a:schemeClr val="dk1"/>
+                </a:solidFill>
+                <a:latin typeface="Consolas"/>
+                <a:ea typeface="Consolas"/>
+                <a:cs typeface="Consolas"/>
+                <a:sym typeface="Consolas"/>
+              </a:rPr>
+              <a:t> </a:t>
+            </a:r>
+            <a:r>
+              <a:rPr lang="en-US">
+                <a:solidFill>
+                  <a:srgbClr val="0000FF"/>
+                </a:solidFill>
+                <a:latin typeface="Consolas"/>
+                <a:ea typeface="Consolas"/>
+                <a:cs typeface="Consolas"/>
+                <a:sym typeface="Consolas"/>
+              </a:rPr>
+              <a:t>i32</a:t>
+            </a:r>
+            <a:r>
+              <a:rPr lang="en-US">
+                <a:solidFill>
+                  <a:schemeClr val="dk1"/>
+                </a:solidFill>
+                <a:latin typeface="Consolas"/>
+                <a:ea typeface="Consolas"/>
+                <a:cs typeface="Consolas"/>
+                <a:sym typeface="Consolas"/>
+              </a:rPr>
+              <a:t> </a:t>
+            </a:r>
+            <a:r>
+              <a:rPr lang="en-US">
+                <a:solidFill>
+                  <a:srgbClr val="0000FF"/>
+                </a:solidFill>
+                <a:latin typeface="Consolas"/>
+                <a:ea typeface="Consolas"/>
+                <a:cs typeface="Consolas"/>
+                <a:sym typeface="Consolas"/>
+              </a:rPr>
+              <a:t>%a</a:t>
+            </a:r>
+            <a:r>
+              <a:rPr lang="en-US">
+                <a:solidFill>
+                  <a:schemeClr val="dk1"/>
+                </a:solidFill>
+                <a:latin typeface="Consolas"/>
+                <a:ea typeface="Consolas"/>
+                <a:cs typeface="Consolas"/>
+                <a:sym typeface="Consolas"/>
+              </a:rPr>
+              <a:t>, </a:t>
+            </a:r>
+            <a:r>
+              <a:rPr lang="en-US">
+                <a:solidFill>
+                  <a:srgbClr val="0000FF"/>
+                </a:solidFill>
+                <a:latin typeface="Consolas"/>
+                <a:ea typeface="Consolas"/>
+                <a:cs typeface="Consolas"/>
+                <a:sym typeface="Consolas"/>
+              </a:rPr>
+              <a:t>%b</a:t>
+            </a:r>
+            <a:endParaRPr>
+              <a:solidFill>
+                <a:srgbClr val="0000FF"/>
+              </a:solidFill>
+              <a:latin typeface="Consolas"/>
+              <a:ea typeface="Consolas"/>
+              <a:cs typeface="Consolas"/>
+              <a:sym typeface="Consolas"/>
+            </a:endParaRPr>
+          </a:p>
+          <a:p>
+            <a:pPr indent="0" lvl="0" marL="0" rtl="0" algn="l">
+              <a:lnSpc>
+                <a:spcPct val="100000"/>
+              </a:lnSpc>
+              <a:spcBef>
+                <a:spcPts val="0"/>
+              </a:spcBef>
+              <a:spcAft>
+                <a:spcPts val="0"/>
+              </a:spcAft>
+              <a:buNone/>
+            </a:pPr>
+            <a:r>
+              <a:rPr lang="en-US">
+                <a:solidFill>
+                  <a:schemeClr val="dk1"/>
+                </a:solidFill>
+                <a:latin typeface="Consolas"/>
+                <a:ea typeface="Consolas"/>
+                <a:cs typeface="Consolas"/>
+                <a:sym typeface="Consolas"/>
+              </a:rPr>
+              <a:t> </a:t>
+            </a:r>
+            <a:r>
+              <a:rPr lang="en-US">
+                <a:solidFill>
+                  <a:srgbClr val="0000FF"/>
+                </a:solidFill>
+                <a:latin typeface="Consolas"/>
+                <a:ea typeface="Consolas"/>
+                <a:cs typeface="Consolas"/>
+                <a:sym typeface="Consolas"/>
+              </a:rPr>
+              <a:t>ret</a:t>
+            </a:r>
+            <a:r>
+              <a:rPr lang="en-US">
+                <a:solidFill>
+                  <a:schemeClr val="dk1"/>
+                </a:solidFill>
+                <a:latin typeface="Consolas"/>
+                <a:ea typeface="Consolas"/>
+                <a:cs typeface="Consolas"/>
+                <a:sym typeface="Consolas"/>
+              </a:rPr>
+              <a:t> </a:t>
+            </a:r>
+            <a:r>
+              <a:rPr lang="en-US">
+                <a:solidFill>
+                  <a:srgbClr val="0000FF"/>
+                </a:solidFill>
+                <a:latin typeface="Consolas"/>
+                <a:ea typeface="Consolas"/>
+                <a:cs typeface="Consolas"/>
+                <a:sym typeface="Consolas"/>
+              </a:rPr>
+              <a:t>i32</a:t>
+            </a:r>
+            <a:r>
+              <a:rPr lang="en-US">
+                <a:solidFill>
+                  <a:schemeClr val="dk1"/>
+                </a:solidFill>
+                <a:latin typeface="Consolas"/>
+                <a:ea typeface="Consolas"/>
+                <a:cs typeface="Consolas"/>
+                <a:sym typeface="Consolas"/>
+              </a:rPr>
+              <a:t> </a:t>
+            </a:r>
+            <a:r>
+              <a:rPr lang="en-US">
+                <a:solidFill>
+                  <a:srgbClr val="0000FF"/>
+                </a:solidFill>
+                <a:latin typeface="Consolas"/>
+                <a:ea typeface="Consolas"/>
+                <a:cs typeface="Consolas"/>
+                <a:sym typeface="Consolas"/>
+              </a:rPr>
+              <a:t>%sum</a:t>
+            </a:r>
+            <a:endParaRPr>
+              <a:solidFill>
+                <a:srgbClr val="0000FF"/>
+              </a:solidFill>
+              <a:latin typeface="Consolas"/>
+              <a:ea typeface="Consolas"/>
+              <a:cs typeface="Consolas"/>
+              <a:sym typeface="Consolas"/>
+            </a:endParaRPr>
+          </a:p>
+          <a:p>
+            <a:pPr indent="0" lvl="0" marL="0" rtl="0" algn="l">
+              <a:lnSpc>
+                <a:spcPct val="100000"/>
+              </a:lnSpc>
+              <a:spcBef>
+                <a:spcPts val="0"/>
+              </a:spcBef>
+              <a:spcAft>
+                <a:spcPts val="0"/>
+              </a:spcAft>
+              <a:buNone/>
+            </a:pPr>
+            <a:r>
+              <a:rPr lang="en-US">
+                <a:solidFill>
+                  <a:schemeClr val="dk1"/>
+                </a:solidFill>
+                <a:latin typeface="Consolas"/>
+                <a:ea typeface="Consolas"/>
+                <a:cs typeface="Consolas"/>
+                <a:sym typeface="Consolas"/>
+              </a:rPr>
+              <a:t>}</a:t>
+            </a:r>
+            <a:endParaRPr>
+              <a:solidFill>
+                <a:schemeClr val="dk1"/>
+              </a:solidFill>
               <a:latin typeface="Consolas"/>
               <a:ea typeface="Consolas"/>
               <a:cs typeface="Consolas"/>
@@ -34198,7 +37493,7 @@
   <p:cSld>
     <p:spTree>
       <p:nvGrpSpPr>
-        <p:cNvPr id="501" name="Shape 501"/>
+        <p:cNvPr id="506" name="Shape 506"/>
         <p:cNvGrpSpPr/>
         <p:nvPr/>
       </p:nvGrpSpPr>
@@ -34212,7 +37507,504 @@
       </p:grpSpPr>
       <p:sp>
         <p:nvSpPr>
-          <p:cNvPr id="502" name="Google Shape;502;p27"/>
+          <p:cNvPr id="507" name="Google Shape;507;g2bee99cf594_0_1"/>
+          <p:cNvSpPr txBox="1"/>
+          <p:nvPr>
+            <p:ph type="title"/>
+          </p:nvPr>
+        </p:nvSpPr>
+        <p:spPr>
+          <a:xfrm>
+            <a:off x="571370" y="571500"/>
+            <a:ext cx="11010900" cy="952500"/>
+          </a:xfrm>
+          <a:prstGeom prst="rect">
+            <a:avLst/>
+          </a:prstGeom>
+        </p:spPr>
+        <p:txBody>
+          <a:bodyPr anchorCtr="0" anchor="t" bIns="0" lIns="0" spcFirstLastPara="1" rIns="0" wrap="square" tIns="0">
+            <a:noAutofit/>
+          </a:bodyPr>
+          <a:lstStyle/>
+          <a:p>
+            <a:pPr indent="0" lvl="0" marL="0" rtl="0" algn="l">
+              <a:spcBef>
+                <a:spcPts val="0"/>
+              </a:spcBef>
+              <a:spcAft>
+                <a:spcPts val="0"/>
+              </a:spcAft>
+              <a:buNone/>
+            </a:pPr>
+            <a:r>
+              <a:rPr lang="en-US"/>
+              <a:t>LLVM IR bitcode</a:t>
+            </a:r>
+            <a:endParaRPr/>
+          </a:p>
+        </p:txBody>
+      </p:sp>
+      <p:sp>
+        <p:nvSpPr>
+          <p:cNvPr id="508" name="Google Shape;508;g2bee99cf594_0_1"/>
+          <p:cNvSpPr txBox="1"/>
+          <p:nvPr>
+            <p:ph idx="1" type="body"/>
+          </p:nvPr>
+        </p:nvSpPr>
+        <p:spPr>
+          <a:xfrm>
+            <a:off x="571375" y="1673450"/>
+            <a:ext cx="11010900" cy="5184600"/>
+          </a:xfrm>
+          <a:prstGeom prst="rect">
+            <a:avLst/>
+          </a:prstGeom>
+        </p:spPr>
+        <p:txBody>
+          <a:bodyPr anchorCtr="0" anchor="t" bIns="0" lIns="0" spcFirstLastPara="1" rIns="0" wrap="square" tIns="0">
+            <a:normAutofit/>
+          </a:bodyPr>
+          <a:lstStyle/>
+          <a:p>
+            <a:pPr indent="0" lvl="0" marL="0" rtl="0" algn="l">
+              <a:spcBef>
+                <a:spcPts val="1200"/>
+              </a:spcBef>
+              <a:spcAft>
+                <a:spcPts val="0"/>
+              </a:spcAft>
+              <a:buNone/>
+            </a:pPr>
+            <a:r>
+              <a:rPr lang="en-US"/>
+              <a:t>Binary Representation of LLVM IR</a:t>
+            </a:r>
+            <a:endParaRPr/>
+          </a:p>
+          <a:p>
+            <a:pPr indent="0" lvl="0" marL="0" rtl="0" algn="l">
+              <a:spcBef>
+                <a:spcPts val="1200"/>
+              </a:spcBef>
+              <a:spcAft>
+                <a:spcPts val="0"/>
+              </a:spcAft>
+              <a:buNone/>
+            </a:pPr>
+            <a:r>
+              <a:rPr lang="en-US"/>
+              <a:t>Use Cases:</a:t>
+            </a:r>
+            <a:endParaRPr/>
+          </a:p>
+          <a:p>
+            <a:pPr indent="-342900" lvl="0" marL="457200" rtl="0" algn="l">
+              <a:spcBef>
+                <a:spcPts val="1200"/>
+              </a:spcBef>
+              <a:spcAft>
+                <a:spcPts val="0"/>
+              </a:spcAft>
+              <a:buSzPts val="1800"/>
+              <a:buChar char="▪"/>
+            </a:pPr>
+            <a:r>
+              <a:rPr lang="en-US"/>
+              <a:t>distribution (for usage or inspection by other LLVM based tools).</a:t>
+            </a:r>
+            <a:endParaRPr/>
+          </a:p>
+          <a:p>
+            <a:pPr indent="-342900" lvl="0" marL="457200" rtl="0" algn="l">
+              <a:spcBef>
+                <a:spcPts val="0"/>
+              </a:spcBef>
+              <a:spcAft>
+                <a:spcPts val="0"/>
+              </a:spcAft>
+              <a:buSzPts val="1800"/>
+              <a:buChar char="▪"/>
+            </a:pPr>
+            <a:r>
+              <a:rPr lang="en-US"/>
+              <a:t>intermediate step in a build process that involves further optimization or cross-compilation.</a:t>
+            </a:r>
+            <a:endParaRPr/>
+          </a:p>
+          <a:p>
+            <a:pPr indent="-342900" lvl="0" marL="457200" rtl="0" algn="l">
+              <a:spcBef>
+                <a:spcPts val="0"/>
+              </a:spcBef>
+              <a:spcAft>
+                <a:spcPts val="0"/>
+              </a:spcAft>
+              <a:buSzPts val="1800"/>
+              <a:buChar char="▪"/>
+            </a:pPr>
+            <a:r>
+              <a:rPr lang="en-US"/>
+              <a:t>Just-In-Time (JIT) compilation scenarios.</a:t>
+            </a:r>
+            <a:endParaRPr/>
+          </a:p>
+        </p:txBody>
+      </p:sp>
+    </p:spTree>
+  </p:cSld>
+  <p:clrMapOvr>
+    <a:masterClrMapping/>
+  </p:clrMapOvr>
+</p:sld>
+</file>
+
+<file path=ppt/slides/slide35.xml><?xml version="1.0" encoding="utf-8"?>
+<p:sld xmlns:a="http://schemas.openxmlformats.org/drawingml/2006/main" xmlns:r="http://schemas.openxmlformats.org/officeDocument/2006/relationships" xmlns:mc="http://schemas.openxmlformats.org/markup-compatibility/2006" xmlns:mv="urn:schemas-microsoft-com:mac:vml" xmlns:p="http://schemas.openxmlformats.org/presentationml/2006/main" xmlns:c="http://schemas.openxmlformats.org/drawingml/2006/chart" xmlns:dgm="http://schemas.openxmlformats.org/drawingml/2006/diagram" xmlns:o="urn:schemas-microsoft-com:office:office" xmlns:v="urn:schemas-microsoft-com:vml" xmlns:pvml="urn:schemas-microsoft-com:office:powerpoint" xmlns:com="http://schemas.openxmlformats.org/drawingml/2006/compatibility" xmlns:p14="http://schemas.microsoft.com/office/powerpoint/2010/main" xmlns:p15="http://schemas.microsoft.com/office/powerpoint/2012/main" xmlns:ahyp="http://schemas.microsoft.com/office/drawing/2018/hyperlinkcolor">
+  <p:cSld>
+    <p:spTree>
+      <p:nvGrpSpPr>
+        <p:cNvPr id="512" name="Shape 512"/>
+        <p:cNvGrpSpPr/>
+        <p:nvPr/>
+      </p:nvGrpSpPr>
+      <p:grpSpPr>
+        <a:xfrm>
+          <a:off x="0" y="0"/>
+          <a:ext cx="0" cy="0"/>
+          <a:chOff x="0" y="0"/>
+          <a:chExt cx="0" cy="0"/>
+        </a:xfrm>
+      </p:grpSpPr>
+      <p:sp>
+        <p:nvSpPr>
+          <p:cNvPr id="513" name="Google Shape;513;g2bee99cf594_0_7"/>
+          <p:cNvSpPr txBox="1"/>
+          <p:nvPr>
+            <p:ph type="title"/>
+          </p:nvPr>
+        </p:nvSpPr>
+        <p:spPr>
+          <a:xfrm>
+            <a:off x="571370" y="571500"/>
+            <a:ext cx="11010900" cy="952500"/>
+          </a:xfrm>
+          <a:prstGeom prst="rect">
+            <a:avLst/>
+          </a:prstGeom>
+        </p:spPr>
+        <p:txBody>
+          <a:bodyPr anchorCtr="0" anchor="t" bIns="0" lIns="0" spcFirstLastPara="1" rIns="0" wrap="square" tIns="0">
+            <a:noAutofit/>
+          </a:bodyPr>
+          <a:lstStyle/>
+          <a:p>
+            <a:pPr indent="0" lvl="0" marL="0" rtl="0" algn="l">
+              <a:spcBef>
+                <a:spcPts val="0"/>
+              </a:spcBef>
+              <a:spcAft>
+                <a:spcPts val="0"/>
+              </a:spcAft>
+              <a:buNone/>
+            </a:pPr>
+            <a:r>
+              <a:rPr lang="en-US"/>
+              <a:t>LLVM IR bitcode: tooling</a:t>
+            </a:r>
+            <a:endParaRPr/>
+          </a:p>
+        </p:txBody>
+      </p:sp>
+      <p:sp>
+        <p:nvSpPr>
+          <p:cNvPr id="514" name="Google Shape;514;g2bee99cf594_0_7"/>
+          <p:cNvSpPr txBox="1"/>
+          <p:nvPr>
+            <p:ph idx="1" type="body"/>
+          </p:nvPr>
+        </p:nvSpPr>
+        <p:spPr>
+          <a:xfrm>
+            <a:off x="571375" y="1203700"/>
+            <a:ext cx="11010900" cy="5654400"/>
+          </a:xfrm>
+          <a:prstGeom prst="rect">
+            <a:avLst/>
+          </a:prstGeom>
+        </p:spPr>
+        <p:txBody>
+          <a:bodyPr anchorCtr="0" anchor="t" bIns="0" lIns="0" spcFirstLastPara="1" rIns="0" wrap="square" tIns="0">
+            <a:normAutofit/>
+          </a:bodyPr>
+          <a:lstStyle/>
+          <a:p>
+            <a:pPr indent="-342900" lvl="0" marL="457200" rtl="0" algn="l">
+              <a:spcBef>
+                <a:spcPts val="1200"/>
+              </a:spcBef>
+              <a:spcAft>
+                <a:spcPts val="0"/>
+              </a:spcAft>
+              <a:buSzPts val="1800"/>
+              <a:buChar char="▪"/>
+            </a:pPr>
+            <a:r>
+              <a:rPr lang="en-US"/>
+              <a:t>Emit bitcode:</a:t>
+            </a:r>
+            <a:endParaRPr/>
+          </a:p>
+          <a:p>
+            <a:pPr indent="-342900" lvl="1" marL="914400" rtl="0" algn="l">
+              <a:spcBef>
+                <a:spcPts val="0"/>
+              </a:spcBef>
+              <a:spcAft>
+                <a:spcPts val="0"/>
+              </a:spcAft>
+              <a:buSzPts val="1800"/>
+              <a:buFont typeface="Consolas"/>
+              <a:buChar char="•"/>
+            </a:pPr>
+            <a:r>
+              <a:rPr lang="en-US">
+                <a:latin typeface="Consolas"/>
+                <a:ea typeface="Consolas"/>
+                <a:cs typeface="Consolas"/>
+                <a:sym typeface="Consolas"/>
+              </a:rPr>
+              <a:t>clang -emit-llvm -c source.c -o source.bc</a:t>
+            </a:r>
+            <a:endParaRPr>
+              <a:latin typeface="Consolas"/>
+              <a:ea typeface="Consolas"/>
+              <a:cs typeface="Consolas"/>
+              <a:sym typeface="Consolas"/>
+            </a:endParaRPr>
+          </a:p>
+          <a:p>
+            <a:pPr indent="-342900" lvl="0" marL="457200" rtl="0" algn="l">
+              <a:spcBef>
+                <a:spcPts val="0"/>
+              </a:spcBef>
+              <a:spcAft>
+                <a:spcPts val="0"/>
+              </a:spcAft>
+              <a:buSzPts val="1800"/>
+              <a:buChar char="▪"/>
+            </a:pPr>
+            <a:r>
+              <a:rPr lang="en-US"/>
+              <a:t>Converting LLVM IR Bitcode to Human-Readable Format</a:t>
+            </a:r>
+            <a:endParaRPr/>
+          </a:p>
+          <a:p>
+            <a:pPr indent="-342900" lvl="1" marL="914400" rtl="0" algn="l">
+              <a:spcBef>
+                <a:spcPts val="0"/>
+              </a:spcBef>
+              <a:spcAft>
+                <a:spcPts val="0"/>
+              </a:spcAft>
+              <a:buSzPts val="1800"/>
+              <a:buFont typeface="Consolas"/>
+              <a:buChar char="•"/>
+            </a:pPr>
+            <a:r>
+              <a:rPr lang="en-US">
+                <a:latin typeface="Consolas"/>
+                <a:ea typeface="Consolas"/>
+                <a:cs typeface="Consolas"/>
+                <a:sym typeface="Consolas"/>
+              </a:rPr>
+              <a:t>llvm-dis source.bc -o source.ll</a:t>
+            </a:r>
+            <a:endParaRPr>
+              <a:latin typeface="Consolas"/>
+              <a:ea typeface="Consolas"/>
+              <a:cs typeface="Consolas"/>
+              <a:sym typeface="Consolas"/>
+            </a:endParaRPr>
+          </a:p>
+          <a:p>
+            <a:pPr indent="-342900" lvl="0" marL="457200" rtl="0" algn="l">
+              <a:spcBef>
+                <a:spcPts val="0"/>
+              </a:spcBef>
+              <a:spcAft>
+                <a:spcPts val="0"/>
+              </a:spcAft>
+              <a:buSzPts val="1800"/>
+              <a:buChar char="▪"/>
+            </a:pPr>
+            <a:r>
+              <a:rPr lang="en-US"/>
+              <a:t>Converting Human-Readable LLVM IR to Bitcode</a:t>
+            </a:r>
+            <a:endParaRPr/>
+          </a:p>
+          <a:p>
+            <a:pPr indent="-342900" lvl="1" marL="914400" rtl="0" algn="l">
+              <a:spcBef>
+                <a:spcPts val="0"/>
+              </a:spcBef>
+              <a:spcAft>
+                <a:spcPts val="0"/>
+              </a:spcAft>
+              <a:buSzPts val="1800"/>
+              <a:buFont typeface="Consolas"/>
+              <a:buChar char="•"/>
+            </a:pPr>
+            <a:r>
+              <a:rPr lang="en-US">
+                <a:latin typeface="Consolas"/>
+                <a:ea typeface="Consolas"/>
+                <a:cs typeface="Consolas"/>
+                <a:sym typeface="Consolas"/>
+              </a:rPr>
+              <a:t>llvm-as source.ll -o source.bc</a:t>
+            </a:r>
+            <a:endParaRPr>
+              <a:latin typeface="Consolas"/>
+              <a:ea typeface="Consolas"/>
+              <a:cs typeface="Consolas"/>
+              <a:sym typeface="Consolas"/>
+            </a:endParaRPr>
+          </a:p>
+          <a:p>
+            <a:pPr indent="-342900" lvl="0" marL="457200" rtl="0" algn="l">
+              <a:spcBef>
+                <a:spcPts val="0"/>
+              </a:spcBef>
+              <a:spcAft>
+                <a:spcPts val="0"/>
+              </a:spcAft>
+              <a:buSzPts val="1800"/>
+              <a:buChar char="▪"/>
+            </a:pPr>
+            <a:r>
+              <a:rPr lang="en-US"/>
+              <a:t>Linking Multiple LLVM Bitcode Files</a:t>
+            </a:r>
+            <a:endParaRPr/>
+          </a:p>
+          <a:p>
+            <a:pPr indent="-342900" lvl="1" marL="914400" rtl="0" algn="l">
+              <a:spcBef>
+                <a:spcPts val="0"/>
+              </a:spcBef>
+              <a:spcAft>
+                <a:spcPts val="0"/>
+              </a:spcAft>
+              <a:buSzPts val="1800"/>
+              <a:buFont typeface="Consolas"/>
+              <a:buChar char="•"/>
+            </a:pPr>
+            <a:r>
+              <a:rPr lang="en-US">
+                <a:latin typeface="Consolas"/>
+                <a:ea typeface="Consolas"/>
+                <a:cs typeface="Consolas"/>
+                <a:sym typeface="Consolas"/>
+              </a:rPr>
+              <a:t>llvm-link file1.bc file2.bc -o combined.bc</a:t>
+            </a:r>
+            <a:endParaRPr>
+              <a:latin typeface="Consolas"/>
+              <a:ea typeface="Consolas"/>
+              <a:cs typeface="Consolas"/>
+              <a:sym typeface="Consolas"/>
+            </a:endParaRPr>
+          </a:p>
+          <a:p>
+            <a:pPr indent="-342900" lvl="0" marL="457200" rtl="0" algn="l">
+              <a:spcBef>
+                <a:spcPts val="0"/>
+              </a:spcBef>
+              <a:spcAft>
+                <a:spcPts val="0"/>
+              </a:spcAft>
+              <a:buSzPts val="1800"/>
+              <a:buFont typeface="Calibri"/>
+              <a:buChar char="▪"/>
+            </a:pPr>
+            <a:r>
+              <a:rPr lang="en-US">
+                <a:latin typeface="Calibri"/>
+                <a:ea typeface="Calibri"/>
+                <a:cs typeface="Calibri"/>
+                <a:sym typeface="Calibri"/>
+              </a:rPr>
+              <a:t>Execute LLVM IR bitcode</a:t>
+            </a:r>
+            <a:endParaRPr>
+              <a:latin typeface="Calibri"/>
+              <a:ea typeface="Calibri"/>
+              <a:cs typeface="Calibri"/>
+              <a:sym typeface="Calibri"/>
+            </a:endParaRPr>
+          </a:p>
+          <a:p>
+            <a:pPr indent="-342900" lvl="1" marL="914400" rtl="0" algn="l">
+              <a:spcBef>
+                <a:spcPts val="0"/>
+              </a:spcBef>
+              <a:spcAft>
+                <a:spcPts val="0"/>
+              </a:spcAft>
+              <a:buSzPts val="1800"/>
+              <a:buFont typeface="Consolas"/>
+              <a:buChar char="•"/>
+            </a:pPr>
+            <a:r>
+              <a:rPr lang="en-US">
+                <a:latin typeface="Consolas"/>
+                <a:ea typeface="Consolas"/>
+                <a:cs typeface="Consolas"/>
+                <a:sym typeface="Consolas"/>
+              </a:rPr>
+              <a:t>lli source.bc</a:t>
+            </a:r>
+            <a:endParaRPr>
+              <a:latin typeface="Consolas"/>
+              <a:ea typeface="Consolas"/>
+              <a:cs typeface="Consolas"/>
+              <a:sym typeface="Consolas"/>
+            </a:endParaRPr>
+          </a:p>
+        </p:txBody>
+      </p:sp>
+    </p:spTree>
+  </p:cSld>
+  <p:clrMapOvr>
+    <a:masterClrMapping/>
+  </p:clrMapOvr>
+</p:sld>
+</file>
+
+<file path=ppt/slides/slide36.xml><?xml version="1.0" encoding="utf-8"?>
+<p:sld xmlns:a="http://schemas.openxmlformats.org/drawingml/2006/main" xmlns:r="http://schemas.openxmlformats.org/officeDocument/2006/relationships" xmlns:mc="http://schemas.openxmlformats.org/markup-compatibility/2006" xmlns:mv="urn:schemas-microsoft-com:mac:vml" xmlns:p="http://schemas.openxmlformats.org/presentationml/2006/main" xmlns:c="http://schemas.openxmlformats.org/drawingml/2006/chart" xmlns:dgm="http://schemas.openxmlformats.org/drawingml/2006/diagram" xmlns:o="urn:schemas-microsoft-com:office:office" xmlns:v="urn:schemas-microsoft-com:vml" xmlns:pvml="urn:schemas-microsoft-com:office:powerpoint" xmlns:com="http://schemas.openxmlformats.org/drawingml/2006/compatibility" xmlns:p14="http://schemas.microsoft.com/office/powerpoint/2010/main" xmlns:p15="http://schemas.microsoft.com/office/powerpoint/2012/main" xmlns:ahyp="http://schemas.microsoft.com/office/drawing/2018/hyperlinkcolor">
+  <p:cSld>
+    <p:spTree>
+      <p:nvGrpSpPr>
+        <p:cNvPr id="518" name="Shape 518"/>
+        <p:cNvGrpSpPr/>
+        <p:nvPr/>
+      </p:nvGrpSpPr>
+      <p:grpSpPr>
+        <a:xfrm>
+          <a:off x="0" y="0"/>
+          <a:ext cx="0" cy="0"/>
+          <a:chOff x="0" y="0"/>
+          <a:chExt cx="0" cy="0"/>
+        </a:xfrm>
+      </p:grpSpPr>
+      <p:sp>
+        <p:nvSpPr>
+          <p:cNvPr id="519" name="Google Shape;519;p27"/>
           <p:cNvSpPr txBox="1"/>
           <p:nvPr>
             <p:ph type="title"/>
@@ -34264,7 +38056,7 @@
       </p:sp>
       <p:sp>
         <p:nvSpPr>
-          <p:cNvPr id="503" name="Google Shape;503;p27"/>
+          <p:cNvPr id="520" name="Google Shape;520;p27"/>
           <p:cNvSpPr txBox="1"/>
           <p:nvPr>
             <p:ph idx="1" type="body"/>
@@ -34469,12 +38261,12 @@
 </p:sld>
 </file>
 
-<file path=ppt/slides/slide35.xml><?xml version="1.0" encoding="utf-8"?>
+<file path=ppt/slides/slide37.xml><?xml version="1.0" encoding="utf-8"?>
 <p:sld xmlns:a="http://schemas.openxmlformats.org/drawingml/2006/main" xmlns:r="http://schemas.openxmlformats.org/officeDocument/2006/relationships" xmlns:mc="http://schemas.openxmlformats.org/markup-compatibility/2006" xmlns:mv="urn:schemas-microsoft-com:mac:vml" xmlns:p="http://schemas.openxmlformats.org/presentationml/2006/main" xmlns:c="http://schemas.openxmlformats.org/drawingml/2006/chart" xmlns:dgm="http://schemas.openxmlformats.org/drawingml/2006/diagram" xmlns:o="urn:schemas-microsoft-com:office:office" xmlns:v="urn:schemas-microsoft-com:vml" xmlns:pvml="urn:schemas-microsoft-com:office:powerpoint" xmlns:com="http://schemas.openxmlformats.org/drawingml/2006/compatibility" xmlns:p14="http://schemas.microsoft.com/office/powerpoint/2010/main" xmlns:p15="http://schemas.microsoft.com/office/powerpoint/2012/main" xmlns:ahyp="http://schemas.microsoft.com/office/drawing/2018/hyperlinkcolor">
   <p:cSld>
     <p:spTree>
       <p:nvGrpSpPr>
-        <p:cNvPr id="507" name="Shape 507"/>
+        <p:cNvPr id="524" name="Shape 524"/>
         <p:cNvGrpSpPr/>
         <p:nvPr/>
       </p:nvGrpSpPr>
@@ -34488,7 +38280,7 @@
       </p:grpSpPr>
       <p:sp>
         <p:nvSpPr>
-          <p:cNvPr id="508" name="Google Shape;508;g2bee99cf594_0_14"/>
+          <p:cNvPr id="525" name="Google Shape;525;g2bee99cf594_0_14"/>
           <p:cNvSpPr txBox="1"/>
           <p:nvPr>
             <p:ph type="title"/>
@@ -34528,7 +38320,7 @@
       </p:sp>
       <p:sp>
         <p:nvSpPr>
-          <p:cNvPr id="509" name="Google Shape;509;g2bee99cf594_0_14"/>
+          <p:cNvPr id="526" name="Google Shape;526;g2bee99cf594_0_14"/>
           <p:cNvSpPr txBox="1"/>
           <p:nvPr>
             <p:ph idx="1" type="body"/>
@@ -34814,12 +38606,12 @@
 </p:sld>
 </file>
 
-<file path=ppt/slides/slide36.xml><?xml version="1.0" encoding="utf-8"?>
+<file path=ppt/slides/slide38.xml><?xml version="1.0" encoding="utf-8"?>
 <p:sld xmlns:a="http://schemas.openxmlformats.org/drawingml/2006/main" xmlns:r="http://schemas.openxmlformats.org/officeDocument/2006/relationships" xmlns:mc="http://schemas.openxmlformats.org/markup-compatibility/2006" xmlns:mv="urn:schemas-microsoft-com:mac:vml" xmlns:p="http://schemas.openxmlformats.org/presentationml/2006/main" xmlns:c="http://schemas.openxmlformats.org/drawingml/2006/chart" xmlns:dgm="http://schemas.openxmlformats.org/drawingml/2006/diagram" xmlns:o="urn:schemas-microsoft-com:office:office" xmlns:v="urn:schemas-microsoft-com:vml" xmlns:pvml="urn:schemas-microsoft-com:office:powerpoint" xmlns:com="http://schemas.openxmlformats.org/drawingml/2006/compatibility" xmlns:p14="http://schemas.microsoft.com/office/powerpoint/2010/main" xmlns:p15="http://schemas.microsoft.com/office/powerpoint/2012/main" xmlns:ahyp="http://schemas.microsoft.com/office/drawing/2018/hyperlinkcolor">
   <p:cSld>
     <p:spTree>
       <p:nvGrpSpPr>
-        <p:cNvPr id="513" name="Shape 513"/>
+        <p:cNvPr id="530" name="Shape 530"/>
         <p:cNvGrpSpPr/>
         <p:nvPr/>
       </p:nvGrpSpPr>
@@ -34833,7 +38625,7 @@
       </p:grpSpPr>
       <p:sp>
         <p:nvSpPr>
-          <p:cNvPr id="514" name="Google Shape;514;p28"/>
+          <p:cNvPr id="531" name="Google Shape;531;p28"/>
           <p:cNvSpPr txBox="1"/>
           <p:nvPr>
             <p:ph type="title"/>
@@ -34885,7 +38677,7 @@
       </p:sp>
       <p:pic>
         <p:nvPicPr>
-          <p:cNvPr id="515" name="Google Shape;515;p28"/>
+          <p:cNvPr id="532" name="Google Shape;532;p28"/>
           <p:cNvPicPr preferRelativeResize="0"/>
           <p:nvPr>
             <p:ph idx="1" type="body"/>
@@ -34932,12 +38724,12 @@
 </p:sld>
 </file>
 
-<file path=ppt/slides/slide37.xml><?xml version="1.0" encoding="utf-8"?>
+<file path=ppt/slides/slide39.xml><?xml version="1.0" encoding="utf-8"?>
 <p:sld xmlns:a="http://schemas.openxmlformats.org/drawingml/2006/main" xmlns:r="http://schemas.openxmlformats.org/officeDocument/2006/relationships" xmlns:mc="http://schemas.openxmlformats.org/markup-compatibility/2006" xmlns:mv="urn:schemas-microsoft-com:mac:vml" xmlns:p="http://schemas.openxmlformats.org/presentationml/2006/main" xmlns:c="http://schemas.openxmlformats.org/drawingml/2006/chart" xmlns:dgm="http://schemas.openxmlformats.org/drawingml/2006/diagram" xmlns:o="urn:schemas-microsoft-com:office:office" xmlns:v="urn:schemas-microsoft-com:vml" xmlns:pvml="urn:schemas-microsoft-com:office:powerpoint" xmlns:com="http://schemas.openxmlformats.org/drawingml/2006/compatibility" xmlns:p14="http://schemas.microsoft.com/office/powerpoint/2010/main" xmlns:p15="http://schemas.microsoft.com/office/powerpoint/2012/main" xmlns:ahyp="http://schemas.microsoft.com/office/drawing/2018/hyperlinkcolor">
   <p:cSld>
     <p:spTree>
       <p:nvGrpSpPr>
-        <p:cNvPr id="519" name="Shape 519"/>
+        <p:cNvPr id="536" name="Shape 536"/>
         <p:cNvGrpSpPr/>
         <p:nvPr/>
       </p:nvGrpSpPr>
@@ -34951,7 +38743,7 @@
       </p:grpSpPr>
       <p:sp>
         <p:nvSpPr>
-          <p:cNvPr id="520" name="Google Shape;520;p29"/>
+          <p:cNvPr id="537" name="Google Shape;537;p29"/>
           <p:cNvSpPr txBox="1"/>
           <p:nvPr>
             <p:ph type="title"/>
@@ -35003,7 +38795,7 @@
       </p:sp>
       <p:sp>
         <p:nvSpPr>
-          <p:cNvPr id="521" name="Google Shape;521;p29"/>
+          <p:cNvPr id="538" name="Google Shape;538;p29"/>
           <p:cNvSpPr txBox="1"/>
           <p:nvPr>
             <p:ph idx="1" type="body"/>
@@ -35184,432 +38976,6 @@
       </p:transition>
     </mc:Fallback>
   </mc:AlternateContent>
-</p:sld>
-</file>
-
-<file path=ppt/slides/slide38.xml><?xml version="1.0" encoding="utf-8"?>
-<p:sld xmlns:a="http://schemas.openxmlformats.org/drawingml/2006/main" xmlns:r="http://schemas.openxmlformats.org/officeDocument/2006/relationships" xmlns:mc="http://schemas.openxmlformats.org/markup-compatibility/2006" xmlns:mv="urn:schemas-microsoft-com:mac:vml" xmlns:p="http://schemas.openxmlformats.org/presentationml/2006/main" xmlns:c="http://schemas.openxmlformats.org/drawingml/2006/chart" xmlns:dgm="http://schemas.openxmlformats.org/drawingml/2006/diagram" xmlns:o="urn:schemas-microsoft-com:office:office" xmlns:v="urn:schemas-microsoft-com:vml" xmlns:pvml="urn:schemas-microsoft-com:office:powerpoint" xmlns:com="http://schemas.openxmlformats.org/drawingml/2006/compatibility" xmlns:p14="http://schemas.microsoft.com/office/powerpoint/2010/main" xmlns:p15="http://schemas.microsoft.com/office/powerpoint/2012/main" xmlns:ahyp="http://schemas.microsoft.com/office/drawing/2018/hyperlinkcolor">
-  <p:cSld>
-    <p:spTree>
-      <p:nvGrpSpPr>
-        <p:cNvPr id="525" name="Shape 525"/>
-        <p:cNvGrpSpPr/>
-        <p:nvPr/>
-      </p:nvGrpSpPr>
-      <p:grpSpPr>
-        <a:xfrm>
-          <a:off x="0" y="0"/>
-          <a:ext cx="0" cy="0"/>
-          <a:chOff x="0" y="0"/>
-          <a:chExt cx="0" cy="0"/>
-        </a:xfrm>
-      </p:grpSpPr>
-      <p:sp>
-        <p:nvSpPr>
-          <p:cNvPr id="526" name="Google Shape;526;p30"/>
-          <p:cNvSpPr txBox="1"/>
-          <p:nvPr>
-            <p:ph type="title"/>
-          </p:nvPr>
-        </p:nvSpPr>
-        <p:spPr>
-          <a:xfrm>
-            <a:off x="571370" y="571500"/>
-            <a:ext cx="11010816" cy="952499"/>
-          </a:xfrm>
-          <a:prstGeom prst="rect">
-            <a:avLst/>
-          </a:prstGeom>
-          <a:noFill/>
-          <a:ln>
-            <a:noFill/>
-          </a:ln>
-        </p:spPr>
-        <p:txBody>
-          <a:bodyPr anchorCtr="0" anchor="t" bIns="0" lIns="0" spcFirstLastPara="1" rIns="0" wrap="square" tIns="0">
-            <a:noAutofit/>
-          </a:bodyPr>
-          <a:lstStyle/>
-          <a:p>
-            <a:pPr indent="0" lvl="0" marL="0" rtl="0" algn="l">
-              <a:lnSpc>
-                <a:spcPct val="90000"/>
-              </a:lnSpc>
-              <a:spcBef>
-                <a:spcPts val="0"/>
-              </a:spcBef>
-              <a:spcAft>
-                <a:spcPts val="0"/>
-              </a:spcAft>
-              <a:buClr>
-                <a:srgbClr val="525252"/>
-              </a:buClr>
-              <a:buSzPts val="4000"/>
-              <a:buFont typeface="Arial"/>
-              <a:buNone/>
-            </a:pPr>
-            <a:r>
-              <a:rPr lang="en-US"/>
-              <a:t>Next time…</a:t>
-            </a:r>
-            <a:endParaRPr/>
-          </a:p>
-        </p:txBody>
-      </p:sp>
-      <p:sp>
-        <p:nvSpPr>
-          <p:cNvPr id="527" name="Google Shape;527;p30"/>
-          <p:cNvSpPr txBox="1"/>
-          <p:nvPr>
-            <p:ph idx="1" type="body"/>
-          </p:nvPr>
-        </p:nvSpPr>
-        <p:spPr>
-          <a:xfrm>
-            <a:off x="571370" y="1673454"/>
-            <a:ext cx="11010900" cy="4574947"/>
-          </a:xfrm>
-          <a:prstGeom prst="rect">
-            <a:avLst/>
-          </a:prstGeom>
-          <a:noFill/>
-          <a:ln>
-            <a:noFill/>
-          </a:ln>
-        </p:spPr>
-        <p:txBody>
-          <a:bodyPr anchorCtr="0" anchor="t" bIns="0" lIns="0" spcFirstLastPara="1" rIns="0" wrap="square" tIns="0">
-            <a:normAutofit/>
-          </a:bodyPr>
-          <a:lstStyle/>
-          <a:p>
-            <a:pPr indent="-228600" lvl="0" marL="228600" rtl="0" algn="l">
-              <a:lnSpc>
-                <a:spcPct val="100000"/>
-              </a:lnSpc>
-              <a:spcBef>
-                <a:spcPts val="0"/>
-              </a:spcBef>
-              <a:spcAft>
-                <a:spcPts val="0"/>
-              </a:spcAft>
-              <a:buClr>
-                <a:schemeClr val="lt2"/>
-              </a:buClr>
-              <a:buSzPts val="2800"/>
-              <a:buChar char="▪"/>
-            </a:pPr>
-            <a:r>
-              <a:rPr lang="en-US"/>
-              <a:t>LLVM Passes</a:t>
-            </a:r>
-            <a:endParaRPr/>
-          </a:p>
-          <a:p>
-            <a:pPr indent="-228600" lvl="0" marL="228600" rtl="0" algn="l">
-              <a:lnSpc>
-                <a:spcPct val="100000"/>
-              </a:lnSpc>
-              <a:spcBef>
-                <a:spcPts val="1200"/>
-              </a:spcBef>
-              <a:spcAft>
-                <a:spcPts val="0"/>
-              </a:spcAft>
-              <a:buClr>
-                <a:schemeClr val="lt2"/>
-              </a:buClr>
-              <a:buSzPts val="2800"/>
-              <a:buChar char="▪"/>
-            </a:pPr>
-            <a:r>
-              <a:rPr lang="en-US"/>
-              <a:t>IR Optimizations</a:t>
-            </a:r>
-            <a:endParaRPr/>
-          </a:p>
-        </p:txBody>
-      </p:sp>
-    </p:spTree>
-  </p:cSld>
-  <p:clrMapOvr>
-    <a:masterClrMapping/>
-  </p:clrMapOvr>
-  <mc:AlternateContent>
-    <mc:Choice Requires="p14">
-      <p:transition spd="slow" p14:dur="700">
-        <p:fade/>
-      </p:transition>
-    </mc:Choice>
-    <mc:Fallback>
-      <p:transition spd="slow">
-        <p:fade/>
-      </p:transition>
-    </mc:Fallback>
-  </mc:AlternateContent>
-</p:sld>
-</file>
-
-<file path=ppt/slides/slide39.xml><?xml version="1.0" encoding="utf-8"?>
-<p:sld xmlns:a="http://schemas.openxmlformats.org/drawingml/2006/main" xmlns:r="http://schemas.openxmlformats.org/officeDocument/2006/relationships" xmlns:mc="http://schemas.openxmlformats.org/markup-compatibility/2006" xmlns:mv="urn:schemas-microsoft-com:mac:vml" xmlns:p="http://schemas.openxmlformats.org/presentationml/2006/main" xmlns:c="http://schemas.openxmlformats.org/drawingml/2006/chart" xmlns:dgm="http://schemas.openxmlformats.org/drawingml/2006/diagram" xmlns:o="urn:schemas-microsoft-com:office:office" xmlns:v="urn:schemas-microsoft-com:vml" xmlns:pvml="urn:schemas-microsoft-com:office:powerpoint" xmlns:com="http://schemas.openxmlformats.org/drawingml/2006/compatibility" xmlns:p14="http://schemas.microsoft.com/office/powerpoint/2010/main" xmlns:p15="http://schemas.microsoft.com/office/powerpoint/2012/main" xmlns:ahyp="http://schemas.microsoft.com/office/drawing/2018/hyperlinkcolor" show="0">
-  <p:cSld>
-    <p:spTree>
-      <p:nvGrpSpPr>
-        <p:cNvPr id="531" name="Shape 531"/>
-        <p:cNvGrpSpPr/>
-        <p:nvPr/>
-      </p:nvGrpSpPr>
-      <p:grpSpPr>
-        <a:xfrm>
-          <a:off x="0" y="0"/>
-          <a:ext cx="0" cy="0"/>
-          <a:chOff x="0" y="0"/>
-          <a:chExt cx="0" cy="0"/>
-        </a:xfrm>
-      </p:grpSpPr>
-      <p:sp>
-        <p:nvSpPr>
-          <p:cNvPr id="532" name="Google Shape;532;g26a0424328b_0_0"/>
-          <p:cNvSpPr txBox="1"/>
-          <p:nvPr>
-            <p:ph type="title"/>
-          </p:nvPr>
-        </p:nvSpPr>
-        <p:spPr>
-          <a:xfrm>
-            <a:off x="571370" y="571500"/>
-            <a:ext cx="11010900" cy="952500"/>
-          </a:xfrm>
-          <a:prstGeom prst="rect">
-            <a:avLst/>
-          </a:prstGeom>
-        </p:spPr>
-        <p:txBody>
-          <a:bodyPr anchorCtr="0" anchor="t" bIns="0" lIns="0" spcFirstLastPara="1" rIns="0" wrap="square" tIns="0">
-            <a:noAutofit/>
-          </a:bodyPr>
-          <a:lstStyle/>
-          <a:p>
-            <a:pPr indent="0" lvl="0" marL="0" rtl="0" algn="l">
-              <a:spcBef>
-                <a:spcPts val="0"/>
-              </a:spcBef>
-              <a:spcAft>
-                <a:spcPts val="0"/>
-              </a:spcAft>
-              <a:buNone/>
-            </a:pPr>
-            <a:r>
-              <a:rPr lang="en-US"/>
-              <a:t>Test</a:t>
-            </a:r>
-            <a:endParaRPr/>
-          </a:p>
-        </p:txBody>
-      </p:sp>
-      <p:sp>
-        <p:nvSpPr>
-          <p:cNvPr id="533" name="Google Shape;533;g26a0424328b_0_0"/>
-          <p:cNvSpPr txBox="1"/>
-          <p:nvPr>
-            <p:ph idx="1" type="body"/>
-          </p:nvPr>
-        </p:nvSpPr>
-        <p:spPr>
-          <a:xfrm>
-            <a:off x="571370" y="1673454"/>
-            <a:ext cx="11010900" cy="4575000"/>
-          </a:xfrm>
-          <a:prstGeom prst="rect">
-            <a:avLst/>
-          </a:prstGeom>
-        </p:spPr>
-        <p:txBody>
-          <a:bodyPr anchorCtr="0" anchor="t" bIns="0" lIns="0" spcFirstLastPara="1" rIns="0" wrap="square" tIns="0">
-            <a:normAutofit/>
-          </a:bodyPr>
-          <a:lstStyle/>
-          <a:p>
-            <a:pPr indent="0" lvl="0" marL="0" rtl="0" algn="l">
-              <a:spcBef>
-                <a:spcPts val="1200"/>
-              </a:spcBef>
-              <a:spcAft>
-                <a:spcPts val="0"/>
-              </a:spcAft>
-              <a:buNone/>
-            </a:pPr>
-            <a:r>
-              <a:rPr lang="en-US" u="sng">
-                <a:solidFill>
-                  <a:schemeClr val="hlink"/>
-                </a:solidFill>
-                <a:hlinkClick r:id="rId3"/>
-              </a:rPr>
-              <a:t>https://forms.gle/JbjBRMFNXym6tBQG6</a:t>
-            </a:r>
-            <a:endParaRPr/>
-          </a:p>
-          <a:p>
-            <a:pPr indent="0" lvl="0" marL="0" rtl="0" algn="l">
-              <a:spcBef>
-                <a:spcPts val="1200"/>
-              </a:spcBef>
-              <a:spcAft>
-                <a:spcPts val="0"/>
-              </a:spcAft>
-              <a:buNone/>
-            </a:pPr>
-            <a:r>
-              <a:t/>
-            </a:r>
-            <a:endParaRPr/>
-          </a:p>
-          <a:p>
-            <a:pPr indent="0" lvl="0" marL="0" rtl="0" algn="l">
-              <a:spcBef>
-                <a:spcPts val="1200"/>
-              </a:spcBef>
-              <a:spcAft>
-                <a:spcPts val="0"/>
-              </a:spcAft>
-              <a:buNone/>
-            </a:pPr>
-            <a:r>
-              <a:t/>
-            </a:r>
-            <a:endParaRPr/>
-          </a:p>
-        </p:txBody>
-      </p:sp>
-      <p:pic>
-        <p:nvPicPr>
-          <p:cNvPr id="534" name="Google Shape;534;g26a0424328b_0_0"/>
-          <p:cNvPicPr preferRelativeResize="0"/>
-          <p:nvPr/>
-        </p:nvPicPr>
-        <p:blipFill>
-          <a:blip r:embed="rId4">
-            <a:alphaModFix/>
-          </a:blip>
-          <a:stretch>
-            <a:fillRect/>
-          </a:stretch>
-        </p:blipFill>
-        <p:spPr>
-          <a:xfrm>
-            <a:off x="8102175" y="2309075"/>
-            <a:ext cx="2914650" cy="2819400"/>
-          </a:xfrm>
-          <a:prstGeom prst="rect">
-            <a:avLst/>
-          </a:prstGeom>
-          <a:noFill/>
-          <a:ln>
-            <a:noFill/>
-          </a:ln>
-        </p:spPr>
-      </p:pic>
-      <p:pic>
-        <p:nvPicPr>
-          <p:cNvPr id="535" name="Google Shape;535;g26a0424328b_0_0"/>
-          <p:cNvPicPr preferRelativeResize="0"/>
-          <p:nvPr/>
-        </p:nvPicPr>
-        <p:blipFill>
-          <a:blip r:embed="rId5">
-            <a:alphaModFix/>
-          </a:blip>
-          <a:stretch>
-            <a:fillRect/>
-          </a:stretch>
-        </p:blipFill>
-        <p:spPr>
-          <a:xfrm>
-            <a:off x="318000" y="2773446"/>
-            <a:ext cx="6995374" cy="3171950"/>
-          </a:xfrm>
-          <a:prstGeom prst="rect">
-            <a:avLst/>
-          </a:prstGeom>
-          <a:noFill/>
-          <a:ln>
-            <a:noFill/>
-          </a:ln>
-        </p:spPr>
-      </p:pic>
-      <p:sp>
-        <p:nvSpPr>
-          <p:cNvPr id="536" name="Google Shape;536;g26a0424328b_0_0"/>
-          <p:cNvSpPr txBox="1"/>
-          <p:nvPr/>
-        </p:nvSpPr>
-        <p:spPr>
-          <a:xfrm>
-            <a:off x="8510750" y="6397900"/>
-            <a:ext cx="3356100" cy="492600"/>
-          </a:xfrm>
-          <a:prstGeom prst="rect">
-            <a:avLst/>
-          </a:prstGeom>
-          <a:noFill/>
-          <a:ln>
-            <a:noFill/>
-          </a:ln>
-        </p:spPr>
-        <p:txBody>
-          <a:bodyPr anchorCtr="0" anchor="t" bIns="91425" lIns="91425" spcFirstLastPara="1" rIns="91425" wrap="square" tIns="91425">
-            <a:spAutoFit/>
-          </a:bodyPr>
-          <a:lstStyle/>
-          <a:p>
-            <a:pPr indent="0" lvl="0" marL="0" rtl="0" algn="l">
-              <a:spcBef>
-                <a:spcPts val="0"/>
-              </a:spcBef>
-              <a:spcAft>
-                <a:spcPts val="0"/>
-              </a:spcAft>
-              <a:buNone/>
-            </a:pPr>
-            <a:r>
-              <a:rPr lang="en-US" sz="2000">
-                <a:solidFill>
-                  <a:schemeClr val="lt2"/>
-                </a:solidFill>
-              </a:rPr>
-              <a:t>Backup: </a:t>
-            </a:r>
-            <a:r>
-              <a:rPr lang="en-US" sz="2000" u="sng">
-                <a:solidFill>
-                  <a:schemeClr val="hlink"/>
-                </a:solidFill>
-                <a:hlinkClick r:id="rId6"/>
-              </a:rPr>
-              <a:t>me@gooddoog.ru</a:t>
-            </a:r>
-            <a:r>
-              <a:rPr lang="en-US" sz="2000">
-                <a:solidFill>
-                  <a:schemeClr val="lt2"/>
-                </a:solidFill>
-              </a:rPr>
-              <a:t> </a:t>
-            </a:r>
-            <a:endParaRPr sz="2000">
-              <a:solidFill>
-                <a:schemeClr val="lt2"/>
-              </a:solidFill>
-            </a:endParaRPr>
-          </a:p>
-        </p:txBody>
-      </p:sp>
-    </p:spTree>
-  </p:cSld>
-  <p:clrMapOvr>
-    <a:masterClrMapping/>
-  </p:clrMapOvr>
 </p:sld>
 </file>
 
@@ -35692,13 +39058,13 @@
           <a:blip r:embed="rId3">
             <a:alphaModFix/>
           </a:blip>
-          <a:srcRect b="0" l="0" r="0" t="36701"/>
+          <a:srcRect b="0" l="2155" r="2059" t="36701"/>
           <a:stretch/>
         </p:blipFill>
         <p:spPr>
           <a:xfrm>
-            <a:off x="633052" y="1524000"/>
-            <a:ext cx="10925899" cy="4730874"/>
+            <a:off x="868050" y="1524000"/>
+            <a:ext cx="10465775" cy="4730874"/>
           </a:xfrm>
           <a:prstGeom prst="rect">
             <a:avLst/>
@@ -35807,11 +39173,11 @@
 </file>
 
 <file path=ppt/slides/slide40.xml><?xml version="1.0" encoding="utf-8"?>
-<p:sld xmlns:a="http://schemas.openxmlformats.org/drawingml/2006/main" xmlns:r="http://schemas.openxmlformats.org/officeDocument/2006/relationships" xmlns:mc="http://schemas.openxmlformats.org/markup-compatibility/2006" xmlns:mv="urn:schemas-microsoft-com:mac:vml" xmlns:p="http://schemas.openxmlformats.org/presentationml/2006/main" xmlns:c="http://schemas.openxmlformats.org/drawingml/2006/chart" xmlns:dgm="http://schemas.openxmlformats.org/drawingml/2006/diagram" xmlns:o="urn:schemas-microsoft-com:office:office" xmlns:v="urn:schemas-microsoft-com:vml" xmlns:pvml="urn:schemas-microsoft-com:office:powerpoint" xmlns:com="http://schemas.openxmlformats.org/drawingml/2006/compatibility" xmlns:p14="http://schemas.microsoft.com/office/powerpoint/2010/main" xmlns:p15="http://schemas.microsoft.com/office/powerpoint/2012/main" xmlns:ahyp="http://schemas.microsoft.com/office/drawing/2018/hyperlinkcolor" show="0">
+<p:sld xmlns:a="http://schemas.openxmlformats.org/drawingml/2006/main" xmlns:r="http://schemas.openxmlformats.org/officeDocument/2006/relationships" xmlns:mc="http://schemas.openxmlformats.org/markup-compatibility/2006" xmlns:mv="urn:schemas-microsoft-com:mac:vml" xmlns:p="http://schemas.openxmlformats.org/presentationml/2006/main" xmlns:c="http://schemas.openxmlformats.org/drawingml/2006/chart" xmlns:dgm="http://schemas.openxmlformats.org/drawingml/2006/diagram" xmlns:o="urn:schemas-microsoft-com:office:office" xmlns:v="urn:schemas-microsoft-com:vml" xmlns:pvml="urn:schemas-microsoft-com:office:powerpoint" xmlns:com="http://schemas.openxmlformats.org/drawingml/2006/compatibility" xmlns:p14="http://schemas.microsoft.com/office/powerpoint/2010/main" xmlns:p15="http://schemas.microsoft.com/office/powerpoint/2012/main" xmlns:ahyp="http://schemas.microsoft.com/office/drawing/2018/hyperlinkcolor">
   <p:cSld>
     <p:spTree>
       <p:nvGrpSpPr>
-        <p:cNvPr id="540" name="Shape 540"/>
+        <p:cNvPr id="542" name="Shape 542"/>
         <p:cNvGrpSpPr/>
         <p:nvPr/>
       </p:nvGrpSpPr>
@@ -35825,7 +39191,170 @@
       </p:grpSpPr>
       <p:sp>
         <p:nvSpPr>
-          <p:cNvPr id="541" name="Google Shape;541;g32fbb870741_0_0"/>
+          <p:cNvPr id="543" name="Google Shape;543;p30"/>
+          <p:cNvSpPr txBox="1"/>
+          <p:nvPr>
+            <p:ph type="title"/>
+          </p:nvPr>
+        </p:nvSpPr>
+        <p:spPr>
+          <a:xfrm>
+            <a:off x="571370" y="571500"/>
+            <a:ext cx="11010816" cy="952499"/>
+          </a:xfrm>
+          <a:prstGeom prst="rect">
+            <a:avLst/>
+          </a:prstGeom>
+          <a:noFill/>
+          <a:ln>
+            <a:noFill/>
+          </a:ln>
+        </p:spPr>
+        <p:txBody>
+          <a:bodyPr anchorCtr="0" anchor="t" bIns="0" lIns="0" spcFirstLastPara="1" rIns="0" wrap="square" tIns="0">
+            <a:noAutofit/>
+          </a:bodyPr>
+          <a:lstStyle/>
+          <a:p>
+            <a:pPr indent="0" lvl="0" marL="0" rtl="0" algn="l">
+              <a:lnSpc>
+                <a:spcPct val="90000"/>
+              </a:lnSpc>
+              <a:spcBef>
+                <a:spcPts val="0"/>
+              </a:spcBef>
+              <a:spcAft>
+                <a:spcPts val="0"/>
+              </a:spcAft>
+              <a:buClr>
+                <a:srgbClr val="525252"/>
+              </a:buClr>
+              <a:buSzPts val="4000"/>
+              <a:buFont typeface="Arial"/>
+              <a:buNone/>
+            </a:pPr>
+            <a:r>
+              <a:rPr lang="en-US"/>
+              <a:t>Next time…</a:t>
+            </a:r>
+            <a:endParaRPr/>
+          </a:p>
+        </p:txBody>
+      </p:sp>
+      <p:sp>
+        <p:nvSpPr>
+          <p:cNvPr id="544" name="Google Shape;544;p30"/>
+          <p:cNvSpPr txBox="1"/>
+          <p:nvPr>
+            <p:ph idx="1" type="body"/>
+          </p:nvPr>
+        </p:nvSpPr>
+        <p:spPr>
+          <a:xfrm>
+            <a:off x="571370" y="1673454"/>
+            <a:ext cx="11010900" cy="4574947"/>
+          </a:xfrm>
+          <a:prstGeom prst="rect">
+            <a:avLst/>
+          </a:prstGeom>
+          <a:noFill/>
+          <a:ln>
+            <a:noFill/>
+          </a:ln>
+        </p:spPr>
+        <p:txBody>
+          <a:bodyPr anchorCtr="0" anchor="t" bIns="0" lIns="0" spcFirstLastPara="1" rIns="0" wrap="square" tIns="0">
+            <a:normAutofit/>
+          </a:bodyPr>
+          <a:lstStyle/>
+          <a:p>
+            <a:pPr indent="-228600" lvl="0" marL="228600" rtl="0" algn="l">
+              <a:lnSpc>
+                <a:spcPct val="100000"/>
+              </a:lnSpc>
+              <a:spcBef>
+                <a:spcPts val="0"/>
+              </a:spcBef>
+              <a:spcAft>
+                <a:spcPts val="0"/>
+              </a:spcAft>
+              <a:buClr>
+                <a:schemeClr val="lt2"/>
+              </a:buClr>
+              <a:buSzPts val="2800"/>
+              <a:buChar char="▪"/>
+            </a:pPr>
+            <a:r>
+              <a:rPr lang="en-US"/>
+              <a:t>LLVM Passes</a:t>
+            </a:r>
+            <a:endParaRPr/>
+          </a:p>
+          <a:p>
+            <a:pPr indent="-228600" lvl="0" marL="228600" rtl="0" algn="l">
+              <a:lnSpc>
+                <a:spcPct val="100000"/>
+              </a:lnSpc>
+              <a:spcBef>
+                <a:spcPts val="1200"/>
+              </a:spcBef>
+              <a:spcAft>
+                <a:spcPts val="0"/>
+              </a:spcAft>
+              <a:buClr>
+                <a:schemeClr val="lt2"/>
+              </a:buClr>
+              <a:buSzPts val="2800"/>
+              <a:buChar char="▪"/>
+            </a:pPr>
+            <a:r>
+              <a:rPr lang="en-US"/>
+              <a:t>IR Optimizations</a:t>
+            </a:r>
+            <a:endParaRPr/>
+          </a:p>
+        </p:txBody>
+      </p:sp>
+    </p:spTree>
+  </p:cSld>
+  <p:clrMapOvr>
+    <a:masterClrMapping/>
+  </p:clrMapOvr>
+  <mc:AlternateContent>
+    <mc:Choice Requires="p14">
+      <p:transition spd="slow" p14:dur="700">
+        <p:fade/>
+      </p:transition>
+    </mc:Choice>
+    <mc:Fallback>
+      <p:transition spd="slow">
+        <p:fade/>
+      </p:transition>
+    </mc:Fallback>
+  </mc:AlternateContent>
+</p:sld>
+</file>
+
+<file path=ppt/slides/slide41.xml><?xml version="1.0" encoding="utf-8"?>
+<p:sld xmlns:a="http://schemas.openxmlformats.org/drawingml/2006/main" xmlns:r="http://schemas.openxmlformats.org/officeDocument/2006/relationships" xmlns:mc="http://schemas.openxmlformats.org/markup-compatibility/2006" xmlns:mv="urn:schemas-microsoft-com:mac:vml" xmlns:p="http://schemas.openxmlformats.org/presentationml/2006/main" xmlns:c="http://schemas.openxmlformats.org/drawingml/2006/chart" xmlns:dgm="http://schemas.openxmlformats.org/drawingml/2006/diagram" xmlns:o="urn:schemas-microsoft-com:office:office" xmlns:v="urn:schemas-microsoft-com:vml" xmlns:pvml="urn:schemas-microsoft-com:office:powerpoint" xmlns:com="http://schemas.openxmlformats.org/drawingml/2006/compatibility" xmlns:p14="http://schemas.microsoft.com/office/powerpoint/2010/main" xmlns:p15="http://schemas.microsoft.com/office/powerpoint/2012/main" xmlns:ahyp="http://schemas.microsoft.com/office/drawing/2018/hyperlinkcolor" show="0">
+  <p:cSld>
+    <p:spTree>
+      <p:nvGrpSpPr>
+        <p:cNvPr id="548" name="Shape 548"/>
+        <p:cNvGrpSpPr/>
+        <p:nvPr/>
+      </p:nvGrpSpPr>
+      <p:grpSpPr>
+        <a:xfrm>
+          <a:off x="0" y="0"/>
+          <a:ext cx="0" cy="0"/>
+          <a:chOff x="0" y="0"/>
+          <a:chExt cx="0" cy="0"/>
+        </a:xfrm>
+      </p:grpSpPr>
+      <p:sp>
+        <p:nvSpPr>
+          <p:cNvPr id="549" name="Google Shape;549;g26a0424328b_0_0"/>
           <p:cNvSpPr txBox="1"/>
           <p:nvPr>
             <p:ph type="title"/>
@@ -35865,7 +39394,7 @@
       </p:sp>
       <p:sp>
         <p:nvSpPr>
-          <p:cNvPr id="542" name="Google Shape;542;g32fbb870741_0_0"/>
+          <p:cNvPr id="550" name="Google Shape;550;g26a0424328b_0_0"/>
           <p:cNvSpPr txBox="1"/>
           <p:nvPr>
             <p:ph idx="1" type="body"/>
@@ -35902,19 +39431,101 @@
                 </a:solidFill>
                 <a:hlinkClick r:id="rId3"/>
               </a:rPr>
-              <a:t>https://forms.gle/KNKvREkPhq3QNHj18</a:t>
-            </a:r>
-            <a:r>
-              <a:rPr lang="en-US"/>
-              <a:t>  </a:t>
+              <a:t>https://forms.gle/JbjBRMFNXym6tBQG6</a:t>
+            </a:r>
+            <a:endParaRPr/>
+          </a:p>
+          <a:p>
+            <a:pPr indent="0" lvl="0" marL="0" rtl="0" algn="l">
+              <a:spcBef>
+                <a:spcPts val="1200"/>
+              </a:spcBef>
+              <a:spcAft>
+                <a:spcPts val="0"/>
+              </a:spcAft>
+              <a:buNone/>
+            </a:pPr>
+            <a:r>
+              <a:t/>
+            </a:r>
+            <a:endParaRPr/>
+          </a:p>
+          <a:p>
+            <a:pPr indent="0" lvl="0" marL="0" rtl="0" algn="l">
+              <a:spcBef>
+                <a:spcPts val="1200"/>
+              </a:spcBef>
+              <a:spcAft>
+                <a:spcPts val="0"/>
+              </a:spcAft>
+              <a:buNone/>
+            </a:pPr>
+            <a:r>
+              <a:t/>
             </a:r>
             <a:endParaRPr/>
           </a:p>
         </p:txBody>
       </p:sp>
+      <p:pic>
+        <p:nvPicPr>
+          <p:cNvPr id="551" name="Google Shape;551;g26a0424328b_0_0"/>
+          <p:cNvPicPr preferRelativeResize="0"/>
+          <p:nvPr/>
+        </p:nvPicPr>
+        <p:blipFill>
+          <a:blip r:embed="rId4">
+            <a:alphaModFix/>
+          </a:blip>
+          <a:stretch>
+            <a:fillRect/>
+          </a:stretch>
+        </p:blipFill>
+        <p:spPr>
+          <a:xfrm>
+            <a:off x="8102175" y="2309075"/>
+            <a:ext cx="2914650" cy="2819400"/>
+          </a:xfrm>
+          <a:prstGeom prst="rect">
+            <a:avLst/>
+          </a:prstGeom>
+          <a:noFill/>
+          <a:ln>
+            <a:noFill/>
+          </a:ln>
+        </p:spPr>
+      </p:pic>
+      <p:pic>
+        <p:nvPicPr>
+          <p:cNvPr id="552" name="Google Shape;552;g26a0424328b_0_0"/>
+          <p:cNvPicPr preferRelativeResize="0"/>
+          <p:nvPr/>
+        </p:nvPicPr>
+        <p:blipFill>
+          <a:blip r:embed="rId5">
+            <a:alphaModFix/>
+          </a:blip>
+          <a:stretch>
+            <a:fillRect/>
+          </a:stretch>
+        </p:blipFill>
+        <p:spPr>
+          <a:xfrm>
+            <a:off x="318000" y="2773446"/>
+            <a:ext cx="6995374" cy="3171950"/>
+          </a:xfrm>
+          <a:prstGeom prst="rect">
+            <a:avLst/>
+          </a:prstGeom>
+          <a:noFill/>
+          <a:ln>
+            <a:noFill/>
+          </a:ln>
+        </p:spPr>
+      </p:pic>
       <p:sp>
         <p:nvSpPr>
-          <p:cNvPr id="543" name="Google Shape;543;g32fbb870741_0_0"/>
+          <p:cNvPr id="553" name="Google Shape;553;g26a0424328b_0_0"/>
           <p:cNvSpPr txBox="1"/>
           <p:nvPr/>
         </p:nvSpPr>
@@ -35959,6 +39570,187 @@
                 <a:solidFill>
                   <a:schemeClr val="hlink"/>
                 </a:solidFill>
+                <a:hlinkClick r:id="rId6"/>
+              </a:rPr>
+              <a:t>me@gooddoog.ru</a:t>
+            </a:r>
+            <a:r>
+              <a:rPr lang="en-US" sz="2000">
+                <a:solidFill>
+                  <a:schemeClr val="lt2"/>
+                </a:solidFill>
+              </a:rPr>
+              <a:t> </a:t>
+            </a:r>
+            <a:endParaRPr sz="2000">
+              <a:solidFill>
+                <a:schemeClr val="lt2"/>
+              </a:solidFill>
+            </a:endParaRPr>
+          </a:p>
+        </p:txBody>
+      </p:sp>
+    </p:spTree>
+  </p:cSld>
+  <p:clrMapOvr>
+    <a:masterClrMapping/>
+  </p:clrMapOvr>
+</p:sld>
+</file>
+
+<file path=ppt/slides/slide42.xml><?xml version="1.0" encoding="utf-8"?>
+<p:sld xmlns:a="http://schemas.openxmlformats.org/drawingml/2006/main" xmlns:r="http://schemas.openxmlformats.org/officeDocument/2006/relationships" xmlns:mc="http://schemas.openxmlformats.org/markup-compatibility/2006" xmlns:mv="urn:schemas-microsoft-com:mac:vml" xmlns:p="http://schemas.openxmlformats.org/presentationml/2006/main" xmlns:c="http://schemas.openxmlformats.org/drawingml/2006/chart" xmlns:dgm="http://schemas.openxmlformats.org/drawingml/2006/diagram" xmlns:o="urn:schemas-microsoft-com:office:office" xmlns:v="urn:schemas-microsoft-com:vml" xmlns:pvml="urn:schemas-microsoft-com:office:powerpoint" xmlns:com="http://schemas.openxmlformats.org/drawingml/2006/compatibility" xmlns:p14="http://schemas.microsoft.com/office/powerpoint/2010/main" xmlns:p15="http://schemas.microsoft.com/office/powerpoint/2012/main" xmlns:ahyp="http://schemas.microsoft.com/office/drawing/2018/hyperlinkcolor" show="0">
+  <p:cSld>
+    <p:spTree>
+      <p:nvGrpSpPr>
+        <p:cNvPr id="557" name="Shape 557"/>
+        <p:cNvGrpSpPr/>
+        <p:nvPr/>
+      </p:nvGrpSpPr>
+      <p:grpSpPr>
+        <a:xfrm>
+          <a:off x="0" y="0"/>
+          <a:ext cx="0" cy="0"/>
+          <a:chOff x="0" y="0"/>
+          <a:chExt cx="0" cy="0"/>
+        </a:xfrm>
+      </p:grpSpPr>
+      <p:sp>
+        <p:nvSpPr>
+          <p:cNvPr id="558" name="Google Shape;558;g32fbb870741_0_0"/>
+          <p:cNvSpPr txBox="1"/>
+          <p:nvPr>
+            <p:ph type="title"/>
+          </p:nvPr>
+        </p:nvSpPr>
+        <p:spPr>
+          <a:xfrm>
+            <a:off x="571370" y="571500"/>
+            <a:ext cx="11010900" cy="952500"/>
+          </a:xfrm>
+          <a:prstGeom prst="rect">
+            <a:avLst/>
+          </a:prstGeom>
+        </p:spPr>
+        <p:txBody>
+          <a:bodyPr anchorCtr="0" anchor="t" bIns="0" lIns="0" spcFirstLastPara="1" rIns="0" wrap="square" tIns="0">
+            <a:noAutofit/>
+          </a:bodyPr>
+          <a:lstStyle/>
+          <a:p>
+            <a:pPr indent="0" lvl="0" marL="0" rtl="0" algn="l">
+              <a:spcBef>
+                <a:spcPts val="0"/>
+              </a:spcBef>
+              <a:spcAft>
+                <a:spcPts val="0"/>
+              </a:spcAft>
+              <a:buNone/>
+            </a:pPr>
+            <a:r>
+              <a:rPr lang="en-US"/>
+              <a:t>Test</a:t>
+            </a:r>
+            <a:endParaRPr/>
+          </a:p>
+        </p:txBody>
+      </p:sp>
+      <p:sp>
+        <p:nvSpPr>
+          <p:cNvPr id="559" name="Google Shape;559;g32fbb870741_0_0"/>
+          <p:cNvSpPr txBox="1"/>
+          <p:nvPr>
+            <p:ph idx="1" type="body"/>
+          </p:nvPr>
+        </p:nvSpPr>
+        <p:spPr>
+          <a:xfrm>
+            <a:off x="571370" y="1673454"/>
+            <a:ext cx="11010900" cy="4575000"/>
+          </a:xfrm>
+          <a:prstGeom prst="rect">
+            <a:avLst/>
+          </a:prstGeom>
+        </p:spPr>
+        <p:txBody>
+          <a:bodyPr anchorCtr="0" anchor="t" bIns="0" lIns="0" spcFirstLastPara="1" rIns="0" wrap="square" tIns="0">
+            <a:normAutofit/>
+          </a:bodyPr>
+          <a:lstStyle/>
+          <a:p>
+            <a:pPr indent="0" lvl="0" marL="0" rtl="0" algn="l">
+              <a:spcBef>
+                <a:spcPts val="1200"/>
+              </a:spcBef>
+              <a:spcAft>
+                <a:spcPts val="0"/>
+              </a:spcAft>
+              <a:buNone/>
+            </a:pPr>
+            <a:r>
+              <a:rPr lang="en-US" u="sng">
+                <a:solidFill>
+                  <a:schemeClr val="hlink"/>
+                </a:solidFill>
+                <a:hlinkClick r:id="rId3"/>
+              </a:rPr>
+              <a:t>https://forms.gle/KNKvREkPhq3QNHj18</a:t>
+            </a:r>
+            <a:r>
+              <a:rPr lang="en-US"/>
+              <a:t>  </a:t>
+            </a:r>
+            <a:endParaRPr/>
+          </a:p>
+        </p:txBody>
+      </p:sp>
+      <p:sp>
+        <p:nvSpPr>
+          <p:cNvPr id="560" name="Google Shape;560;g32fbb870741_0_0"/>
+          <p:cNvSpPr txBox="1"/>
+          <p:nvPr/>
+        </p:nvSpPr>
+        <p:spPr>
+          <a:xfrm>
+            <a:off x="8510750" y="6397900"/>
+            <a:ext cx="3356100" cy="492600"/>
+          </a:xfrm>
+          <a:prstGeom prst="rect">
+            <a:avLst/>
+          </a:prstGeom>
+          <a:noFill/>
+          <a:ln>
+            <a:noFill/>
+          </a:ln>
+        </p:spPr>
+        <p:txBody>
+          <a:bodyPr anchorCtr="0" anchor="t" bIns="91425" lIns="91425" spcFirstLastPara="1" rIns="91425" wrap="square" tIns="91425">
+            <a:spAutoFit/>
+          </a:bodyPr>
+          <a:lstStyle/>
+          <a:p>
+            <a:pPr indent="0" lvl="0" marL="0" rtl="0" algn="l">
+              <a:spcBef>
+                <a:spcPts val="0"/>
+              </a:spcBef>
+              <a:spcAft>
+                <a:spcPts val="0"/>
+              </a:spcAft>
+              <a:buNone/>
+            </a:pPr>
+            <a:r>
+              <a:rPr lang="en-US" sz="2000">
+                <a:solidFill>
+                  <a:schemeClr val="lt2"/>
+                </a:solidFill>
+              </a:rPr>
+              <a:t>Backup: </a:t>
+            </a:r>
+            <a:r>
+              <a:rPr lang="en-US" sz="2000" u="sng">
+                <a:solidFill>
+                  <a:schemeClr val="hlink"/>
+                </a:solidFill>
                 <a:hlinkClick r:id="rId4"/>
               </a:rPr>
               <a:t>me@gooddoog.ru</a:t>
@@ -35981,7 +39773,7 @@
       </p:sp>
       <p:pic>
         <p:nvPicPr>
-          <p:cNvPr id="544" name="Google Shape;544;g32fbb870741_0_0"/>
+          <p:cNvPr id="561" name="Google Shape;561;g32fbb870741_0_0"/>
           <p:cNvPicPr preferRelativeResize="0"/>
           <p:nvPr/>
         </p:nvPicPr>
@@ -36009,7 +39801,7 @@
       </p:pic>
       <p:pic>
         <p:nvPicPr>
-          <p:cNvPr id="545" name="Google Shape;545;g32fbb870741_0_0"/>
+          <p:cNvPr id="562" name="Google Shape;562;g32fbb870741_0_0"/>
           <p:cNvPicPr preferRelativeResize="0"/>
           <p:nvPr/>
         </p:nvPicPr>
@@ -36043,12 +39835,12 @@
 </p:sld>
 </file>
 
-<file path=ppt/slides/slide41.xml><?xml version="1.0" encoding="utf-8"?>
+<file path=ppt/slides/slide43.xml><?xml version="1.0" encoding="utf-8"?>
 <p:sld xmlns:a="http://schemas.openxmlformats.org/drawingml/2006/main" xmlns:r="http://schemas.openxmlformats.org/officeDocument/2006/relationships" xmlns:mc="http://schemas.openxmlformats.org/markup-compatibility/2006" xmlns:mv="urn:schemas-microsoft-com:mac:vml" xmlns:p="http://schemas.openxmlformats.org/presentationml/2006/main" xmlns:c="http://schemas.openxmlformats.org/drawingml/2006/chart" xmlns:dgm="http://schemas.openxmlformats.org/drawingml/2006/diagram" xmlns:o="urn:schemas-microsoft-com:office:office" xmlns:v="urn:schemas-microsoft-com:vml" xmlns:pvml="urn:schemas-microsoft-com:office:powerpoint" xmlns:com="http://schemas.openxmlformats.org/drawingml/2006/compatibility" xmlns:p14="http://schemas.microsoft.com/office/powerpoint/2010/main" xmlns:p15="http://schemas.microsoft.com/office/powerpoint/2012/main" xmlns:ahyp="http://schemas.microsoft.com/office/drawing/2018/hyperlinkcolor">
   <p:cSld>
     <p:spTree>
       <p:nvGrpSpPr>
-        <p:cNvPr id="549" name="Shape 549"/>
+        <p:cNvPr id="566" name="Shape 566"/>
         <p:cNvGrpSpPr/>
         <p:nvPr/>
       </p:nvGrpSpPr>
@@ -36062,7 +39854,7 @@
       </p:grpSpPr>
       <p:sp>
         <p:nvSpPr>
-          <p:cNvPr id="550" name="Google Shape;550;g3c4d2c5fc43_0_0"/>
+          <p:cNvPr id="567" name="Google Shape;567;g3c4d2c5fc43_0_0"/>
           <p:cNvSpPr txBox="1"/>
           <p:nvPr>
             <p:ph type="title"/>
@@ -36102,7 +39894,7 @@
       </p:sp>
       <p:sp>
         <p:nvSpPr>
-          <p:cNvPr id="551" name="Google Shape;551;g3c4d2c5fc43_0_0"/>
+          <p:cNvPr id="568" name="Google Shape;568;g3c4d2c5fc43_0_0"/>
           <p:cNvSpPr txBox="1"/>
           <p:nvPr>
             <p:ph idx="1" type="body"/>
@@ -36151,7 +39943,7 @@
       </p:sp>
       <p:sp>
         <p:nvSpPr>
-          <p:cNvPr id="552" name="Google Shape;552;g3c4d2c5fc43_0_0"/>
+          <p:cNvPr id="569" name="Google Shape;569;g3c4d2c5fc43_0_0"/>
           <p:cNvSpPr txBox="1"/>
           <p:nvPr/>
         </p:nvSpPr>
@@ -36218,7 +40010,7 @@
       </p:sp>
       <p:pic>
         <p:nvPicPr>
-          <p:cNvPr id="553" name="Google Shape;553;g3c4d2c5fc43_0_0"/>
+          <p:cNvPr id="570" name="Google Shape;570;g3c4d2c5fc43_0_0"/>
           <p:cNvPicPr preferRelativeResize="0"/>
           <p:nvPr/>
         </p:nvPicPr>
@@ -36246,7 +40038,7 @@
       </p:pic>
       <p:pic>
         <p:nvPicPr>
-          <p:cNvPr id="554" name="Google Shape;554;g3c4d2c5fc43_0_0"/>
+          <p:cNvPr id="571" name="Google Shape;571;g3c4d2c5fc43_0_0"/>
           <p:cNvPicPr preferRelativeResize="0"/>
           <p:nvPr/>
         </p:nvPicPr>
@@ -36280,12 +40072,12 @@
 </p:sld>
 </file>
 
-<file path=ppt/slides/slide42.xml><?xml version="1.0" encoding="utf-8"?>
+<file path=ppt/slides/slide44.xml><?xml version="1.0" encoding="utf-8"?>
 <p:sld xmlns:a="http://schemas.openxmlformats.org/drawingml/2006/main" xmlns:r="http://schemas.openxmlformats.org/officeDocument/2006/relationships" xmlns:mc="http://schemas.openxmlformats.org/markup-compatibility/2006" xmlns:mv="urn:schemas-microsoft-com:mac:vml" xmlns:p="http://schemas.openxmlformats.org/presentationml/2006/main" xmlns:c="http://schemas.openxmlformats.org/drawingml/2006/chart" xmlns:dgm="http://schemas.openxmlformats.org/drawingml/2006/diagram" xmlns:o="urn:schemas-microsoft-com:office:office" xmlns:v="urn:schemas-microsoft-com:vml" xmlns:pvml="urn:schemas-microsoft-com:office:powerpoint" xmlns:com="http://schemas.openxmlformats.org/drawingml/2006/compatibility" xmlns:p14="http://schemas.microsoft.com/office/powerpoint/2010/main" xmlns:p15="http://schemas.microsoft.com/office/powerpoint/2012/main" xmlns:ahyp="http://schemas.microsoft.com/office/drawing/2018/hyperlinkcolor">
   <p:cSld>
     <p:spTree>
       <p:nvGrpSpPr>
-        <p:cNvPr id="558" name="Shape 558"/>
+        <p:cNvPr id="575" name="Shape 575"/>
         <p:cNvGrpSpPr/>
         <p:nvPr/>
       </p:nvGrpSpPr>
@@ -36299,7 +40091,7 @@
       </p:grpSpPr>
       <p:sp>
         <p:nvSpPr>
-          <p:cNvPr id="559" name="Google Shape;559;p31"/>
+          <p:cNvPr id="576" name="Google Shape;576;p31"/>
           <p:cNvSpPr txBox="1"/>
           <p:nvPr>
             <p:ph type="title"/>
@@ -36351,7 +40143,7 @@
       </p:sp>
       <p:sp>
         <p:nvSpPr>
-          <p:cNvPr id="560" name="Google Shape;560;p31"/>
+          <p:cNvPr id="577" name="Google Shape;577;p31"/>
           <p:cNvSpPr txBox="1"/>
           <p:nvPr>
             <p:ph idx="1" type="body"/>
@@ -38104,6 +41896,285 @@
 </file>
 
 <file path=ppt/theme/theme1.xml><?xml version="1.0" encoding="utf-8"?>
+<a:theme xmlns:a="http://schemas.openxmlformats.org/drawingml/2006/main" xmlns:r="http://schemas.openxmlformats.org/officeDocument/2006/relationships" name="21_BasicWhite">
+  <a:themeElements>
+    <a:clrScheme name="Intel2020">
+      <a:dk1>
+        <a:srgbClr val="000000"/>
+      </a:dk1>
+      <a:lt1>
+        <a:srgbClr val="FFFFFF"/>
+      </a:lt1>
+      <a:dk2>
+        <a:srgbClr val="004A86"/>
+      </a:dk2>
+      <a:lt2>
+        <a:srgbClr val="525252"/>
+      </a:lt2>
+      <a:accent1>
+        <a:srgbClr val="0068B5"/>
+      </a:accent1>
+      <a:accent2>
+        <a:srgbClr val="00C7FD"/>
+      </a:accent2>
+      <a:accent3>
+        <a:srgbClr val="F6CB4B"/>
+      </a:accent3>
+      <a:accent4>
+        <a:srgbClr val="D96930"/>
+      </a:accent4>
+      <a:accent5>
+        <a:srgbClr val="8F5DA2"/>
+      </a:accent5>
+      <a:accent6>
+        <a:srgbClr val="8BAE46"/>
+      </a:accent6>
+      <a:hlink>
+        <a:srgbClr val="0068B5"/>
+      </a:hlink>
+      <a:folHlink>
+        <a:srgbClr val="0068B5"/>
+      </a:folHlink>
+    </a:clrScheme>
+    <a:fontScheme name="Office">
+      <a:majorFont>
+        <a:latin typeface="Arial"/>
+        <a:ea typeface=""/>
+        <a:cs typeface=""/>
+        <a:font script="Jpan" typeface="ＭＳ Ｐゴシック"/>
+        <a:font script="Hang" typeface="맑은 고딕"/>
+        <a:font script="Hans" typeface="宋体"/>
+        <a:font script="Hant" typeface="新細明體"/>
+        <a:font script="Arab" typeface="Times New Roman"/>
+        <a:font script="Hebr" typeface="Times New Roman"/>
+        <a:font script="Thai" typeface="Angsana New"/>
+        <a:font script="Ethi" typeface="Nyala"/>
+        <a:font script="Beng" typeface="Vrinda"/>
+        <a:font script="Gujr" typeface="Shruti"/>
+        <a:font script="Khmr" typeface="MoolBoran"/>
+        <a:font script="Knda" typeface="Tunga"/>
+        <a:font script="Guru" typeface="Raavi"/>
+        <a:font script="Cans" typeface="Euphemia"/>
+        <a:font script="Cher" typeface="Plantagenet Cherokee"/>
+        <a:font script="Yiii" typeface="Microsoft Yi Baiti"/>
+        <a:font script="Tibt" typeface="Microsoft Himalaya"/>
+        <a:font script="Thaa" typeface="MV Boli"/>
+        <a:font script="Deva" typeface="Mangal"/>
+        <a:font script="Telu" typeface="Gautami"/>
+        <a:font script="Taml" typeface="Latha"/>
+        <a:font script="Syrc" typeface="Estrangelo Edessa"/>
+        <a:font script="Orya" typeface="Kalinga"/>
+        <a:font script="Mlym" typeface="Kartika"/>
+        <a:font script="Laoo" typeface="DokChampa"/>
+        <a:font script="Sinh" typeface="Iskoola Pota"/>
+        <a:font script="Mong" typeface="Mongolian Baiti"/>
+        <a:font script="Viet" typeface="Times New Roman"/>
+        <a:font script="Uigh" typeface="Microsoft Uighur"/>
+        <a:font script="Geor" typeface="Sylfaen"/>
+      </a:majorFont>
+      <a:minorFont>
+        <a:latin typeface="Arial"/>
+        <a:ea typeface=""/>
+        <a:cs typeface=""/>
+        <a:font script="Jpan" typeface="ＭＳ Ｐゴシック"/>
+        <a:font script="Hang" typeface="맑은 고딕"/>
+        <a:font script="Hans" typeface="宋体"/>
+        <a:font script="Hant" typeface="新細明體"/>
+        <a:font script="Arab" typeface="Arial"/>
+        <a:font script="Hebr" typeface="Arial"/>
+        <a:font script="Thai" typeface="Cordia New"/>
+        <a:font script="Ethi" typeface="Nyala"/>
+        <a:font script="Beng" typeface="Vrinda"/>
+        <a:font script="Gujr" typeface="Shruti"/>
+        <a:font script="Khmr" typeface="DaunPenh"/>
+        <a:font script="Knda" typeface="Tunga"/>
+        <a:font script="Guru" typeface="Raavi"/>
+        <a:font script="Cans" typeface="Euphemia"/>
+        <a:font script="Cher" typeface="Plantagenet Cherokee"/>
+        <a:font script="Yiii" typeface="Microsoft Yi Baiti"/>
+        <a:font script="Tibt" typeface="Microsoft Himalaya"/>
+        <a:font script="Thaa" typeface="MV Boli"/>
+        <a:font script="Deva" typeface="Mangal"/>
+        <a:font script="Telu" typeface="Gautami"/>
+        <a:font script="Taml" typeface="Latha"/>
+        <a:font script="Syrc" typeface="Estrangelo Edessa"/>
+        <a:font script="Orya" typeface="Kalinga"/>
+        <a:font script="Mlym" typeface="Kartika"/>
+        <a:font script="Laoo" typeface="DokChampa"/>
+        <a:font script="Sinh" typeface="Iskoola Pota"/>
+        <a:font script="Mong" typeface="Mongolian Baiti"/>
+        <a:font script="Viet" typeface="Arial"/>
+        <a:font script="Uigh" typeface="Microsoft Uighur"/>
+        <a:font script="Geor" typeface="Sylfaen"/>
+      </a:minorFont>
+    </a:fontScheme>
+    <a:fmtScheme name="Office">
+      <a:fillStyleLst>
+        <a:solidFill>
+          <a:schemeClr val="phClr"/>
+        </a:solidFill>
+        <a:gradFill rotWithShape="1">
+          <a:gsLst>
+            <a:gs pos="0">
+              <a:schemeClr val="phClr">
+                <a:tint val="50000"/>
+                <a:satMod val="300000"/>
+              </a:schemeClr>
+            </a:gs>
+            <a:gs pos="35000">
+              <a:schemeClr val="phClr">
+                <a:tint val="37000"/>
+                <a:satMod val="300000"/>
+              </a:schemeClr>
+            </a:gs>
+            <a:gs pos="100000">
+              <a:schemeClr val="phClr">
+                <a:tint val="15000"/>
+                <a:satMod val="350000"/>
+              </a:schemeClr>
+            </a:gs>
+          </a:gsLst>
+          <a:lin ang="16200000" scaled="1"/>
+        </a:gradFill>
+        <a:gradFill rotWithShape="1">
+          <a:gsLst>
+            <a:gs pos="0">
+              <a:schemeClr val="phClr">
+                <a:tint val="100000"/>
+                <a:shade val="100000"/>
+                <a:satMod val="130000"/>
+              </a:schemeClr>
+            </a:gs>
+            <a:gs pos="100000">
+              <a:schemeClr val="phClr">
+                <a:tint val="50000"/>
+                <a:shade val="100000"/>
+                <a:satMod val="350000"/>
+              </a:schemeClr>
+            </a:gs>
+          </a:gsLst>
+          <a:lin ang="16200000" scaled="0"/>
+        </a:gradFill>
+      </a:fillStyleLst>
+      <a:lnStyleLst>
+        <a:ln w="9525" cap="flat" cmpd="sng" algn="ctr">
+          <a:solidFill>
+            <a:schemeClr val="phClr">
+              <a:shade val="95000"/>
+              <a:satMod val="105000"/>
+            </a:schemeClr>
+          </a:solidFill>
+          <a:prstDash val="solid"/>
+        </a:ln>
+        <a:ln w="25400" cap="flat" cmpd="sng" algn="ctr">
+          <a:solidFill>
+            <a:schemeClr val="phClr"/>
+          </a:solidFill>
+          <a:prstDash val="solid"/>
+        </a:ln>
+        <a:ln w="38100" cap="flat" cmpd="sng" algn="ctr">
+          <a:solidFill>
+            <a:schemeClr val="phClr"/>
+          </a:solidFill>
+          <a:prstDash val="solid"/>
+        </a:ln>
+      </a:lnStyleLst>
+      <a:effectStyleLst>
+        <a:effectStyle>
+          <a:effectLst>
+            <a:outerShdw blurRad="40000" dist="20000" dir="5400000" rotWithShape="0">
+              <a:srgbClr val="000000">
+                <a:alpha val="38000"/>
+              </a:srgbClr>
+            </a:outerShdw>
+          </a:effectLst>
+        </a:effectStyle>
+        <a:effectStyle>
+          <a:effectLst>
+            <a:outerShdw blurRad="40000" dist="23000" dir="5400000" rotWithShape="0">
+              <a:srgbClr val="000000">
+                <a:alpha val="35000"/>
+              </a:srgbClr>
+            </a:outerShdw>
+          </a:effectLst>
+        </a:effectStyle>
+        <a:effectStyle>
+          <a:effectLst>
+            <a:outerShdw blurRad="40000" dist="23000" dir="5400000" rotWithShape="0">
+              <a:srgbClr val="000000">
+                <a:alpha val="35000"/>
+              </a:srgbClr>
+            </a:outerShdw>
+          </a:effectLst>
+          <a:scene3d>
+            <a:camera prst="orthographicFront">
+              <a:rot lat="0" lon="0" rev="0"/>
+            </a:camera>
+            <a:lightRig rig="threePt" dir="t">
+              <a:rot lat="0" lon="0" rev="1200000"/>
+            </a:lightRig>
+          </a:scene3d>
+          <a:sp3d>
+            <a:bevelT w="63500" h="25400"/>
+          </a:sp3d>
+        </a:effectStyle>
+      </a:effectStyleLst>
+      <a:bgFillStyleLst>
+        <a:solidFill>
+          <a:schemeClr val="phClr"/>
+        </a:solidFill>
+        <a:gradFill rotWithShape="1">
+          <a:gsLst>
+            <a:gs pos="0">
+              <a:schemeClr val="phClr">
+                <a:tint val="40000"/>
+                <a:satMod val="350000"/>
+              </a:schemeClr>
+            </a:gs>
+            <a:gs pos="40000">
+              <a:schemeClr val="phClr">
+                <a:tint val="45000"/>
+                <a:shade val="99000"/>
+                <a:satMod val="350000"/>
+              </a:schemeClr>
+            </a:gs>
+            <a:gs pos="100000">
+              <a:schemeClr val="phClr">
+                <a:shade val="20000"/>
+                <a:satMod val="255000"/>
+              </a:schemeClr>
+            </a:gs>
+          </a:gsLst>
+          <a:path path="circle">
+            <a:fillToRect l="50000" t="-80000" r="50000" b="180000"/>
+          </a:path>
+        </a:gradFill>
+        <a:gradFill rotWithShape="1">
+          <a:gsLst>
+            <a:gs pos="0">
+              <a:schemeClr val="phClr">
+                <a:tint val="80000"/>
+                <a:satMod val="300000"/>
+              </a:schemeClr>
+            </a:gs>
+            <a:gs pos="100000">
+              <a:schemeClr val="phClr">
+                <a:shade val="30000"/>
+                <a:satMod val="200000"/>
+              </a:schemeClr>
+            </a:gs>
+          </a:gsLst>
+          <a:path path="circle">
+            <a:fillToRect l="50000" t="50000" r="50000" b="50000"/>
+          </a:path>
+        </a:gradFill>
+      </a:bgFillStyleLst>
+    </a:fmtScheme>
+  </a:themeElements>
+</a:theme>
+</file>
+
+<file path=ppt/theme/theme2.xml><?xml version="1.0" encoding="utf-8"?>
 <a:theme xmlns:a="http://schemas.openxmlformats.org/drawingml/2006/main" xmlns:r="http://schemas.openxmlformats.org/officeDocument/2006/relationships" name="21_BasicWhite">
   <a:themeElements>
     <a:clrScheme name="21_BasicWhite">
@@ -38380,283 +42451,4 @@
     </a:fmtScheme>
   </a:themeElements>
 </a:theme>
-</file>
-
-<file path=ppt/theme/theme2.xml><?xml version="1.0" encoding="utf-8"?>
-<a:theme xmlns:a="http://schemas.openxmlformats.org/drawingml/2006/main" xmlns:r="http://schemas.openxmlformats.org/officeDocument/2006/relationships" name="21_BasicWhite">
-  <a:themeElements>
-    <a:clrScheme name="Intel2020">
-      <a:dk1>
-        <a:srgbClr val="000000"/>
-      </a:dk1>
-      <a:lt1>
-        <a:srgbClr val="FFFFFF"/>
-      </a:lt1>
-      <a:dk2>
-        <a:srgbClr val="004A86"/>
-      </a:dk2>
-      <a:lt2>
-        <a:srgbClr val="525252"/>
-      </a:lt2>
-      <a:accent1>
-        <a:srgbClr val="0068B5"/>
-      </a:accent1>
-      <a:accent2>
-        <a:srgbClr val="00C7FD"/>
-      </a:accent2>
-      <a:accent3>
-        <a:srgbClr val="F6CB4B"/>
-      </a:accent3>
-      <a:accent4>
-        <a:srgbClr val="D96930"/>
-      </a:accent4>
-      <a:accent5>
-        <a:srgbClr val="8F5DA2"/>
-      </a:accent5>
-      <a:accent6>
-        <a:srgbClr val="8BAE46"/>
-      </a:accent6>
-      <a:hlink>
-        <a:srgbClr val="0068B5"/>
-      </a:hlink>
-      <a:folHlink>
-        <a:srgbClr val="0068B5"/>
-      </a:folHlink>
-    </a:clrScheme>
-    <a:fontScheme name="Office">
-      <a:majorFont>
-        <a:latin typeface="Arial"/>
-        <a:ea typeface=""/>
-        <a:cs typeface=""/>
-        <a:font script="Jpan" typeface="ＭＳ Ｐゴシック"/>
-        <a:font script="Hang" typeface="맑은 고딕"/>
-        <a:font script="Hans" typeface="宋体"/>
-        <a:font script="Hant" typeface="新細明體"/>
-        <a:font script="Arab" typeface="Times New Roman"/>
-        <a:font script="Hebr" typeface="Times New Roman"/>
-        <a:font script="Thai" typeface="Angsana New"/>
-        <a:font script="Ethi" typeface="Nyala"/>
-        <a:font script="Beng" typeface="Vrinda"/>
-        <a:font script="Gujr" typeface="Shruti"/>
-        <a:font script="Khmr" typeface="MoolBoran"/>
-        <a:font script="Knda" typeface="Tunga"/>
-        <a:font script="Guru" typeface="Raavi"/>
-        <a:font script="Cans" typeface="Euphemia"/>
-        <a:font script="Cher" typeface="Plantagenet Cherokee"/>
-        <a:font script="Yiii" typeface="Microsoft Yi Baiti"/>
-        <a:font script="Tibt" typeface="Microsoft Himalaya"/>
-        <a:font script="Thaa" typeface="MV Boli"/>
-        <a:font script="Deva" typeface="Mangal"/>
-        <a:font script="Telu" typeface="Gautami"/>
-        <a:font script="Taml" typeface="Latha"/>
-        <a:font script="Syrc" typeface="Estrangelo Edessa"/>
-        <a:font script="Orya" typeface="Kalinga"/>
-        <a:font script="Mlym" typeface="Kartika"/>
-        <a:font script="Laoo" typeface="DokChampa"/>
-        <a:font script="Sinh" typeface="Iskoola Pota"/>
-        <a:font script="Mong" typeface="Mongolian Baiti"/>
-        <a:font script="Viet" typeface="Times New Roman"/>
-        <a:font script="Uigh" typeface="Microsoft Uighur"/>
-        <a:font script="Geor" typeface="Sylfaen"/>
-      </a:majorFont>
-      <a:minorFont>
-        <a:latin typeface="Arial"/>
-        <a:ea typeface=""/>
-        <a:cs typeface=""/>
-        <a:font script="Jpan" typeface="ＭＳ Ｐゴシック"/>
-        <a:font script="Hang" typeface="맑은 고딕"/>
-        <a:font script="Hans" typeface="宋体"/>
-        <a:font script="Hant" typeface="新細明體"/>
-        <a:font script="Arab" typeface="Arial"/>
-        <a:font script="Hebr" typeface="Arial"/>
-        <a:font script="Thai" typeface="Cordia New"/>
-        <a:font script="Ethi" typeface="Nyala"/>
-        <a:font script="Beng" typeface="Vrinda"/>
-        <a:font script="Gujr" typeface="Shruti"/>
-        <a:font script="Khmr" typeface="DaunPenh"/>
-        <a:font script="Knda" typeface="Tunga"/>
-        <a:font script="Guru" typeface="Raavi"/>
-        <a:font script="Cans" typeface="Euphemia"/>
-        <a:font script="Cher" typeface="Plantagenet Cherokee"/>
-        <a:font script="Yiii" typeface="Microsoft Yi Baiti"/>
-        <a:font script="Tibt" typeface="Microsoft Himalaya"/>
-        <a:font script="Thaa" typeface="MV Boli"/>
-        <a:font script="Deva" typeface="Mangal"/>
-        <a:font script="Telu" typeface="Gautami"/>
-        <a:font script="Taml" typeface="Latha"/>
-        <a:font script="Syrc" typeface="Estrangelo Edessa"/>
-        <a:font script="Orya" typeface="Kalinga"/>
-        <a:font script="Mlym" typeface="Kartika"/>
-        <a:font script="Laoo" typeface="DokChampa"/>
-        <a:font script="Sinh" typeface="Iskoola Pota"/>
-        <a:font script="Mong" typeface="Mongolian Baiti"/>
-        <a:font script="Viet" typeface="Arial"/>
-        <a:font script="Uigh" typeface="Microsoft Uighur"/>
-        <a:font script="Geor" typeface="Sylfaen"/>
-      </a:minorFont>
-    </a:fontScheme>
-    <a:fmtScheme name="Office">
-      <a:fillStyleLst>
-        <a:solidFill>
-          <a:schemeClr val="phClr"/>
-        </a:solidFill>
-        <a:gradFill rotWithShape="1">
-          <a:gsLst>
-            <a:gs pos="0">
-              <a:schemeClr val="phClr">
-                <a:tint val="50000"/>
-                <a:satMod val="300000"/>
-              </a:schemeClr>
-            </a:gs>
-            <a:gs pos="35000">
-              <a:schemeClr val="phClr">
-                <a:tint val="37000"/>
-                <a:satMod val="300000"/>
-              </a:schemeClr>
-            </a:gs>
-            <a:gs pos="100000">
-              <a:schemeClr val="phClr">
-                <a:tint val="15000"/>
-                <a:satMod val="350000"/>
-              </a:schemeClr>
-            </a:gs>
-          </a:gsLst>
-          <a:lin ang="16200000" scaled="1"/>
-        </a:gradFill>
-        <a:gradFill rotWithShape="1">
-          <a:gsLst>
-            <a:gs pos="0">
-              <a:schemeClr val="phClr">
-                <a:tint val="100000"/>
-                <a:shade val="100000"/>
-                <a:satMod val="130000"/>
-              </a:schemeClr>
-            </a:gs>
-            <a:gs pos="100000">
-              <a:schemeClr val="phClr">
-                <a:tint val="50000"/>
-                <a:shade val="100000"/>
-                <a:satMod val="350000"/>
-              </a:schemeClr>
-            </a:gs>
-          </a:gsLst>
-          <a:lin ang="16200000" scaled="0"/>
-        </a:gradFill>
-      </a:fillStyleLst>
-      <a:lnStyleLst>
-        <a:ln w="9525" cap="flat" cmpd="sng" algn="ctr">
-          <a:solidFill>
-            <a:schemeClr val="phClr">
-              <a:shade val="95000"/>
-              <a:satMod val="105000"/>
-            </a:schemeClr>
-          </a:solidFill>
-          <a:prstDash val="solid"/>
-        </a:ln>
-        <a:ln w="25400" cap="flat" cmpd="sng" algn="ctr">
-          <a:solidFill>
-            <a:schemeClr val="phClr"/>
-          </a:solidFill>
-          <a:prstDash val="solid"/>
-        </a:ln>
-        <a:ln w="38100" cap="flat" cmpd="sng" algn="ctr">
-          <a:solidFill>
-            <a:schemeClr val="phClr"/>
-          </a:solidFill>
-          <a:prstDash val="solid"/>
-        </a:ln>
-      </a:lnStyleLst>
-      <a:effectStyleLst>
-        <a:effectStyle>
-          <a:effectLst>
-            <a:outerShdw blurRad="40000" dist="20000" dir="5400000" rotWithShape="0">
-              <a:srgbClr val="000000">
-                <a:alpha val="38000"/>
-              </a:srgbClr>
-            </a:outerShdw>
-          </a:effectLst>
-        </a:effectStyle>
-        <a:effectStyle>
-          <a:effectLst>
-            <a:outerShdw blurRad="40000" dist="23000" dir="5400000" rotWithShape="0">
-              <a:srgbClr val="000000">
-                <a:alpha val="35000"/>
-              </a:srgbClr>
-            </a:outerShdw>
-          </a:effectLst>
-        </a:effectStyle>
-        <a:effectStyle>
-          <a:effectLst>
-            <a:outerShdw blurRad="40000" dist="23000" dir="5400000" rotWithShape="0">
-              <a:srgbClr val="000000">
-                <a:alpha val="35000"/>
-              </a:srgbClr>
-            </a:outerShdw>
-          </a:effectLst>
-          <a:scene3d>
-            <a:camera prst="orthographicFront">
-              <a:rot lat="0" lon="0" rev="0"/>
-            </a:camera>
-            <a:lightRig rig="threePt" dir="t">
-              <a:rot lat="0" lon="0" rev="1200000"/>
-            </a:lightRig>
-          </a:scene3d>
-          <a:sp3d>
-            <a:bevelT w="63500" h="25400"/>
-          </a:sp3d>
-        </a:effectStyle>
-      </a:effectStyleLst>
-      <a:bgFillStyleLst>
-        <a:solidFill>
-          <a:schemeClr val="phClr"/>
-        </a:solidFill>
-        <a:gradFill rotWithShape="1">
-          <a:gsLst>
-            <a:gs pos="0">
-              <a:schemeClr val="phClr">
-                <a:tint val="40000"/>
-                <a:satMod val="350000"/>
-              </a:schemeClr>
-            </a:gs>
-            <a:gs pos="40000">
-              <a:schemeClr val="phClr">
-                <a:tint val="45000"/>
-                <a:shade val="99000"/>
-                <a:satMod val="350000"/>
-              </a:schemeClr>
-            </a:gs>
-            <a:gs pos="100000">
-              <a:schemeClr val="phClr">
-                <a:shade val="20000"/>
-                <a:satMod val="255000"/>
-              </a:schemeClr>
-            </a:gs>
-          </a:gsLst>
-          <a:path path="circle">
-            <a:fillToRect l="50000" t="-80000" r="50000" b="180000"/>
-          </a:path>
-        </a:gradFill>
-        <a:gradFill rotWithShape="1">
-          <a:gsLst>
-            <a:gs pos="0">
-              <a:schemeClr val="phClr">
-                <a:tint val="80000"/>
-                <a:satMod val="300000"/>
-              </a:schemeClr>
-            </a:gs>
-            <a:gs pos="100000">
-              <a:schemeClr val="phClr">
-                <a:shade val="30000"/>
-                <a:satMod val="200000"/>
-              </a:schemeClr>
-            </a:gs>
-          </a:gsLst>
-          <a:path path="circle">
-            <a:fillToRect l="50000" t="50000" r="50000" b="50000"/>
-          </a:path>
-        </a:gradFill>
-      </a:bgFillStyleLst>
-    </a:fmtScheme>
-  </a:themeElements>
-</a:theme>
 </file>